--- a/docs/lecture_slides/Week 2/Week2_Lecture5_slides_1_19_2024.pptx
+++ b/docs/lecture_slides/Week 2/Week2_Lecture5_slides_1_19_2024.pptx
@@ -25,21 +25,6 @@
     <p:sldId id="324" r:id="rId19"/>
     <p:sldId id="352" r:id="rId20"/>
     <p:sldId id="348" r:id="rId21"/>
-    <p:sldId id="303" r:id="rId22"/>
-    <p:sldId id="259" r:id="rId23"/>
-    <p:sldId id="325" r:id="rId24"/>
-    <p:sldId id="346" r:id="rId25"/>
-    <p:sldId id="349" r:id="rId26"/>
-    <p:sldId id="341" r:id="rId27"/>
-    <p:sldId id="350" r:id="rId28"/>
-    <p:sldId id="351" r:id="rId29"/>
-    <p:sldId id="345" r:id="rId30"/>
-    <p:sldId id="313" r:id="rId31"/>
-    <p:sldId id="314" r:id="rId32"/>
-    <p:sldId id="315" r:id="rId33"/>
-    <p:sldId id="316" r:id="rId34"/>
-    <p:sldId id="317" r:id="rId35"/>
-    <p:sldId id="283" r:id="rId36"/>
   </p:sldIdLst>
   <p:sldSz cx="12192000" cy="6858000"/>
   <p:notesSz cx="6858000" cy="9144000"/>
@@ -293,7 +278,7 @@
           <a:p>
             <a:fld id="{06882561-BD16-4A95-ACA1-5204E478F2FE}" type="datetimeFigureOut">
               <a:rPr lang="en-US" smtClean="0"/>
-              <a:t>9/4/2026</a:t>
+              <a:t>9/9/2026</a:t>
             </a:fld>
             <a:endParaRPr lang="en-US"/>
           </a:p>
@@ -491,7 +476,7 @@
           <a:p>
             <a:fld id="{06882561-BD16-4A95-ACA1-5204E478F2FE}" type="datetimeFigureOut">
               <a:rPr lang="en-US" smtClean="0"/>
-              <a:t>9/4/2026</a:t>
+              <a:t>9/9/2026</a:t>
             </a:fld>
             <a:endParaRPr lang="en-US"/>
           </a:p>
@@ -699,7 +684,7 @@
           <a:p>
             <a:fld id="{06882561-BD16-4A95-ACA1-5204E478F2FE}" type="datetimeFigureOut">
               <a:rPr lang="en-US" smtClean="0"/>
-              <a:t>9/4/2026</a:t>
+              <a:t>9/9/2026</a:t>
             </a:fld>
             <a:endParaRPr lang="en-US"/>
           </a:p>
@@ -897,7 +882,7 @@
           <a:p>
             <a:fld id="{06882561-BD16-4A95-ACA1-5204E478F2FE}" type="datetimeFigureOut">
               <a:rPr lang="en-US" smtClean="0"/>
-              <a:t>9/4/2026</a:t>
+              <a:t>9/9/2026</a:t>
             </a:fld>
             <a:endParaRPr lang="en-US"/>
           </a:p>
@@ -1172,7 +1157,7 @@
           <a:p>
             <a:fld id="{06882561-BD16-4A95-ACA1-5204E478F2FE}" type="datetimeFigureOut">
               <a:rPr lang="en-US" smtClean="0"/>
-              <a:t>9/4/2026</a:t>
+              <a:t>9/9/2026</a:t>
             </a:fld>
             <a:endParaRPr lang="en-US"/>
           </a:p>
@@ -1437,7 +1422,7 @@
           <a:p>
             <a:fld id="{06882561-BD16-4A95-ACA1-5204E478F2FE}" type="datetimeFigureOut">
               <a:rPr lang="en-US" smtClean="0"/>
-              <a:t>9/4/2026</a:t>
+              <a:t>9/9/2026</a:t>
             </a:fld>
             <a:endParaRPr lang="en-US"/>
           </a:p>
@@ -1849,7 +1834,7 @@
           <a:p>
             <a:fld id="{06882561-BD16-4A95-ACA1-5204E478F2FE}" type="datetimeFigureOut">
               <a:rPr lang="en-US" smtClean="0"/>
-              <a:t>9/4/2026</a:t>
+              <a:t>9/9/2026</a:t>
             </a:fld>
             <a:endParaRPr lang="en-US"/>
           </a:p>
@@ -1990,7 +1975,7 @@
           <a:p>
             <a:fld id="{06882561-BD16-4A95-ACA1-5204E478F2FE}" type="datetimeFigureOut">
               <a:rPr lang="en-US" smtClean="0"/>
-              <a:t>9/4/2026</a:t>
+              <a:t>9/9/2026</a:t>
             </a:fld>
             <a:endParaRPr lang="en-US"/>
           </a:p>
@@ -2103,7 +2088,7 @@
           <a:p>
             <a:fld id="{06882561-BD16-4A95-ACA1-5204E478F2FE}" type="datetimeFigureOut">
               <a:rPr lang="en-US" smtClean="0"/>
-              <a:t>9/4/2026</a:t>
+              <a:t>9/9/2026</a:t>
             </a:fld>
             <a:endParaRPr lang="en-US"/>
           </a:p>
@@ -2414,7 +2399,7 @@
           <a:p>
             <a:fld id="{06882561-BD16-4A95-ACA1-5204E478F2FE}" type="datetimeFigureOut">
               <a:rPr lang="en-US" smtClean="0"/>
-              <a:t>9/4/2026</a:t>
+              <a:t>9/9/2026</a:t>
             </a:fld>
             <a:endParaRPr lang="en-US"/>
           </a:p>
@@ -2702,7 +2687,7 @@
           <a:p>
             <a:fld id="{06882561-BD16-4A95-ACA1-5204E478F2FE}" type="datetimeFigureOut">
               <a:rPr lang="en-US" smtClean="0"/>
-              <a:t>9/4/2026</a:t>
+              <a:t>9/9/2026</a:t>
             </a:fld>
             <a:endParaRPr lang="en-US"/>
           </a:p>
@@ -2943,7 +2928,7 @@
           <a:p>
             <a:fld id="{06882561-BD16-4A95-ACA1-5204E478F2FE}" type="datetimeFigureOut">
               <a:rPr lang="en-US" smtClean="0"/>
-              <a:t>9/4/2026</a:t>
+              <a:t>9/9/2026</a:t>
             </a:fld>
             <a:endParaRPr lang="en-US"/>
           </a:p>
@@ -7094,8 +7079,8 @@
           </a:p>
         </p:txBody>
       </p:sp>
-      <mc:AlternateContent xmlns:mc="http://schemas.openxmlformats.org/markup-compatibility/2006">
-        <mc:Choice xmlns:a14="http://schemas.microsoft.com/office/drawing/2010/main" Requires="a14">
+      <mc:AlternateContent xmlns:mc="http://schemas.openxmlformats.org/markup-compatibility/2006" xmlns:a14="http://schemas.microsoft.com/office/drawing/2010/main">
+        <mc:Choice Requires="a14">
           <p:sp>
             <p:nvSpPr>
               <p:cNvPr id="3" name="Content Placeholder 2">
@@ -7340,7 +7325,7 @@
             </p:txBody>
           </p:sp>
         </mc:Choice>
-        <mc:Fallback>
+        <mc:Fallback xmlns="">
           <p:sp>
             <p:nvSpPr>
               <p:cNvPr id="3" name="Content Placeholder 2">
@@ -8248,8 +8233,8 @@
           </a:p>
         </p:txBody>
       </p:sp>
-      <mc:AlternateContent xmlns:mc="http://schemas.openxmlformats.org/markup-compatibility/2006">
-        <mc:Choice xmlns:a14="http://schemas.microsoft.com/office/drawing/2010/main" Requires="a14">
+      <mc:AlternateContent xmlns:mc="http://schemas.openxmlformats.org/markup-compatibility/2006" xmlns:a14="http://schemas.microsoft.com/office/drawing/2010/main">
+        <mc:Choice Requires="a14">
           <p:sp>
             <p:nvSpPr>
               <p:cNvPr id="3" name="Content Placeholder 2">
@@ -8434,7 +8419,7 @@
             </p:txBody>
           </p:sp>
         </mc:Choice>
-        <mc:Fallback>
+        <mc:Fallback xmlns="">
           <p:sp>
             <p:nvSpPr>
               <p:cNvPr id="3" name="Content Placeholder 2">
@@ -8601,8 +8586,8 @@
           <a:chExt cx="0" cy="0"/>
         </a:xfrm>
       </p:grpSpPr>
-      <mc:AlternateContent xmlns:mc="http://schemas.openxmlformats.org/markup-compatibility/2006">
-        <mc:Choice xmlns:a14="http://schemas.microsoft.com/office/drawing/2010/main" Requires="a14">
+      <mc:AlternateContent xmlns:mc="http://schemas.openxmlformats.org/markup-compatibility/2006" xmlns:a14="http://schemas.microsoft.com/office/drawing/2010/main">
+        <mc:Choice Requires="a14">
           <p:sp>
             <p:nvSpPr>
               <p:cNvPr id="4" name="Content Placeholder 2">
@@ -9798,7 +9783,7 @@
             </p:txBody>
           </p:sp>
         </mc:Choice>
-        <mc:Fallback>
+        <mc:Fallback xmlns="">
           <p:sp>
             <p:nvSpPr>
               <p:cNvPr id="4" name="Content Placeholder 2">
@@ -11545,3294 +11530,6 @@
 </p:sld>
 </file>
 
-<file path=ppt/slides/slide21.xml><?xml version="1.0" encoding="utf-8"?>
-<p:sld xmlns:a="http://schemas.openxmlformats.org/drawingml/2006/main" xmlns:r="http://schemas.openxmlformats.org/officeDocument/2006/relationships" xmlns:p="http://schemas.openxmlformats.org/presentationml/2006/main">
-  <p:cSld>
-    <p:spTree>
-      <p:nvGrpSpPr>
-        <p:cNvPr id="1" name=""/>
-        <p:cNvGrpSpPr/>
-        <p:nvPr/>
-      </p:nvGrpSpPr>
-      <p:grpSpPr>
-        <a:xfrm>
-          <a:off x="0" y="0"/>
-          <a:ext cx="0" cy="0"/>
-          <a:chOff x="0" y="0"/>
-          <a:chExt cx="0" cy="0"/>
-        </a:xfrm>
-      </p:grpSpPr>
-      <p:sp>
-        <p:nvSpPr>
-          <p:cNvPr id="2" name="Title 1">
-            <a:extLst>
-              <a:ext uri="{FF2B5EF4-FFF2-40B4-BE49-F238E27FC236}">
-                <a16:creationId xmlns:a16="http://schemas.microsoft.com/office/drawing/2014/main" id="{96B6764E-1650-762B-5308-1049092EAE9A}"/>
-              </a:ext>
-            </a:extLst>
-          </p:cNvPr>
-          <p:cNvSpPr>
-            <a:spLocks noGrp="1"/>
-          </p:cNvSpPr>
-          <p:nvPr>
-            <p:ph type="title"/>
-          </p:nvPr>
-        </p:nvSpPr>
-        <p:spPr/>
-        <p:txBody>
-          <a:bodyPr/>
-          <a:lstStyle/>
-          <a:p>
-            <a:r>
-              <a:rPr lang="en-US" dirty="0">
-                <a:solidFill>
-                  <a:srgbClr val="1F3864"/>
-                </a:solidFill>
-              </a:rPr>
-              <a:t>Variability of A Distribution: Measures of Spread</a:t>
-            </a:r>
-          </a:p>
-        </p:txBody>
-      </p:sp>
-      <p:pic>
-        <p:nvPicPr>
-          <p:cNvPr id="7" name="Picture 6">
-            <a:extLst>
-              <a:ext uri="{FF2B5EF4-FFF2-40B4-BE49-F238E27FC236}">
-                <a16:creationId xmlns:a16="http://schemas.microsoft.com/office/drawing/2014/main" id="{A2F4481B-DAA2-3B91-063C-978376309A11}"/>
-              </a:ext>
-            </a:extLst>
-          </p:cNvPr>
-          <p:cNvPicPr>
-            <a:picLocks noChangeAspect="1"/>
-          </p:cNvPicPr>
-          <p:nvPr/>
-        </p:nvPicPr>
-        <p:blipFill>
-          <a:blip r:embed="rId2"/>
-          <a:stretch>
-            <a:fillRect/>
-          </a:stretch>
-        </p:blipFill>
-        <p:spPr>
-          <a:xfrm>
-            <a:off x="2498689" y="1771748"/>
-            <a:ext cx="8783276" cy="4810796"/>
-          </a:xfrm>
-          <a:prstGeom prst="rect">
-            <a:avLst/>
-          </a:prstGeom>
-        </p:spPr>
-      </p:pic>
-      <p:sp>
-        <p:nvSpPr>
-          <p:cNvPr id="3" name="Slide Number Placeholder 2">
-            <a:extLst>
-              <a:ext uri="{FF2B5EF4-FFF2-40B4-BE49-F238E27FC236}">
-                <a16:creationId xmlns:a16="http://schemas.microsoft.com/office/drawing/2014/main" id="{3B38AD11-2CC4-2AB6-9CE5-DCCB89DAAB7C}"/>
-              </a:ext>
-            </a:extLst>
-          </p:cNvPr>
-          <p:cNvSpPr>
-            <a:spLocks noGrp="1"/>
-          </p:cNvSpPr>
-          <p:nvPr>
-            <p:ph type="sldNum" sz="quarter" idx="12"/>
-          </p:nvPr>
-        </p:nvSpPr>
-        <p:spPr/>
-        <p:txBody>
-          <a:bodyPr/>
-          <a:lstStyle/>
-          <a:p>
-            <a:fld id="{A80A81DD-F10A-4B1C-963A-0ABBB4865886}" type="slidenum">
-              <a:rPr lang="en-US" smtClean="0"/>
-              <a:t>21</a:t>
-            </a:fld>
-            <a:endParaRPr lang="en-US"/>
-          </a:p>
-        </p:txBody>
-      </p:sp>
-    </p:spTree>
-    <p:extLst>
-      <p:ext uri="{BB962C8B-B14F-4D97-AF65-F5344CB8AC3E}">
-        <p14:creationId xmlns:p14="http://schemas.microsoft.com/office/powerpoint/2010/main" val="165904137"/>
-      </p:ext>
-    </p:extLst>
-  </p:cSld>
-  <p:clrMapOvr>
-    <a:masterClrMapping/>
-  </p:clrMapOvr>
-</p:sld>
-</file>
-
-<file path=ppt/slides/slide22.xml><?xml version="1.0" encoding="utf-8"?>
-<p:sld xmlns:a="http://schemas.openxmlformats.org/drawingml/2006/main" xmlns:r="http://schemas.openxmlformats.org/officeDocument/2006/relationships" xmlns:p="http://schemas.openxmlformats.org/presentationml/2006/main">
-  <p:cSld>
-    <p:spTree>
-      <p:nvGrpSpPr>
-        <p:cNvPr id="1" name=""/>
-        <p:cNvGrpSpPr/>
-        <p:nvPr/>
-      </p:nvGrpSpPr>
-      <p:grpSpPr>
-        <a:xfrm>
-          <a:off x="0" y="0"/>
-          <a:ext cx="0" cy="0"/>
-          <a:chOff x="0" y="0"/>
-          <a:chExt cx="0" cy="0"/>
-        </a:xfrm>
-      </p:grpSpPr>
-      <p:pic>
-        <p:nvPicPr>
-          <p:cNvPr id="7" name="Picture 6">
-            <a:extLst>
-              <a:ext uri="{FF2B5EF4-FFF2-40B4-BE49-F238E27FC236}">
-                <a16:creationId xmlns:a16="http://schemas.microsoft.com/office/drawing/2014/main" id="{32D83D08-E688-A516-345A-2BA8AFF8552E}"/>
-              </a:ext>
-            </a:extLst>
-          </p:cNvPr>
-          <p:cNvPicPr>
-            <a:picLocks noChangeAspect="1"/>
-          </p:cNvPicPr>
-          <p:nvPr/>
-        </p:nvPicPr>
-        <p:blipFill>
-          <a:blip r:embed="rId2"/>
-          <a:stretch>
-            <a:fillRect/>
-          </a:stretch>
-        </p:blipFill>
-        <p:spPr>
-          <a:xfrm>
-            <a:off x="6373323" y="3687010"/>
-            <a:ext cx="5685913" cy="3170990"/>
-          </a:xfrm>
-          <a:prstGeom prst="rect">
-            <a:avLst/>
-          </a:prstGeom>
-        </p:spPr>
-      </p:pic>
-      <p:sp>
-        <p:nvSpPr>
-          <p:cNvPr id="3" name="Content Placeholder 2">
-            <a:extLst>
-              <a:ext uri="{FF2B5EF4-FFF2-40B4-BE49-F238E27FC236}">
-                <a16:creationId xmlns:a16="http://schemas.microsoft.com/office/drawing/2014/main" id="{08F83EFD-680B-07F4-94B1-411EFE5D3C50}"/>
-              </a:ext>
-            </a:extLst>
-          </p:cNvPr>
-          <p:cNvSpPr>
-            <a:spLocks noGrp="1"/>
-          </p:cNvSpPr>
-          <p:nvPr>
-            <p:ph idx="1"/>
-          </p:nvPr>
-        </p:nvSpPr>
-        <p:spPr>
-          <a:xfrm>
-            <a:off x="351834" y="1825625"/>
-            <a:ext cx="5257800" cy="4667250"/>
-          </a:xfrm>
-        </p:spPr>
-        <p:txBody>
-          <a:bodyPr>
-            <a:normAutofit fontScale="70000" lnSpcReduction="20000"/>
-          </a:bodyPr>
-          <a:lstStyle/>
-          <a:p>
-            <a:r>
-              <a:rPr lang="en-US" dirty="0"/>
-              <a:t>The </a:t>
-            </a:r>
-            <a:r>
-              <a:rPr lang="en-US" b="1" dirty="0">
-                <a:solidFill>
-                  <a:srgbClr val="C00000"/>
-                </a:solidFill>
-              </a:rPr>
-              <a:t>range</a:t>
-            </a:r>
-            <a:r>
-              <a:rPr lang="en-US" dirty="0"/>
-              <a:t> is a measure of the distance between the smallest and largest values in the data</a:t>
-            </a:r>
-          </a:p>
-          <a:p>
-            <a:endParaRPr lang="en-US" dirty="0"/>
-          </a:p>
-          <a:p>
-            <a:pPr marL="457200" lvl="1" indent="0">
-              <a:buNone/>
-            </a:pPr>
-            <a:r>
-              <a:rPr lang="en-US" dirty="0"/>
-              <a:t>The range can be computed with only two data points the minimum value and maximum value</a:t>
-            </a:r>
-          </a:p>
-          <a:p>
-            <a:endParaRPr lang="en-US" dirty="0"/>
-          </a:p>
-          <a:p>
-            <a:r>
-              <a:rPr lang="en-US" dirty="0"/>
-              <a:t>If the range of a set of data is large, then usually this indicates greater dispersion of values</a:t>
-            </a:r>
-          </a:p>
-          <a:p>
-            <a:endParaRPr lang="en-US" dirty="0"/>
-          </a:p>
-          <a:p>
-            <a:r>
-              <a:rPr lang="en-US" dirty="0"/>
-              <a:t>The range is </a:t>
-            </a:r>
-            <a:r>
-              <a:rPr lang="en-US" u="sng" dirty="0"/>
-              <a:t>severely</a:t>
-            </a:r>
-            <a:r>
-              <a:rPr lang="en-US" dirty="0"/>
-              <a:t> affected by the presence of outliers</a:t>
-            </a:r>
-          </a:p>
-          <a:p>
-            <a:endParaRPr lang="en-US" dirty="0"/>
-          </a:p>
-          <a:p>
-            <a:r>
-              <a:rPr lang="en-US" dirty="0"/>
-              <a:t>We typically </a:t>
-            </a:r>
-            <a:r>
-              <a:rPr lang="en-US" u="sng" dirty="0"/>
-              <a:t>do not</a:t>
-            </a:r>
-            <a:r>
-              <a:rPr lang="en-US" dirty="0"/>
-              <a:t> use the range to measure variability</a:t>
-            </a:r>
-          </a:p>
-        </p:txBody>
-      </p:sp>
-      <p:pic>
-        <p:nvPicPr>
-          <p:cNvPr id="5" name="Picture 4">
-            <a:extLst>
-              <a:ext uri="{FF2B5EF4-FFF2-40B4-BE49-F238E27FC236}">
-                <a16:creationId xmlns:a16="http://schemas.microsoft.com/office/drawing/2014/main" id="{36C44C54-000D-E381-2205-131B79AD8FA5}"/>
-              </a:ext>
-            </a:extLst>
-          </p:cNvPr>
-          <p:cNvPicPr>
-            <a:picLocks noChangeAspect="1"/>
-          </p:cNvPicPr>
-          <p:nvPr/>
-        </p:nvPicPr>
-        <p:blipFill>
-          <a:blip r:embed="rId3"/>
-          <a:stretch>
-            <a:fillRect/>
-          </a:stretch>
-        </p:blipFill>
-        <p:spPr>
-          <a:xfrm>
-            <a:off x="6373324" y="942974"/>
-            <a:ext cx="5466842" cy="3138827"/>
-          </a:xfrm>
-          <a:prstGeom prst="rect">
-            <a:avLst/>
-          </a:prstGeom>
-        </p:spPr>
-      </p:pic>
-      <p:sp>
-        <p:nvSpPr>
-          <p:cNvPr id="2" name="Title 1">
-            <a:extLst>
-              <a:ext uri="{FF2B5EF4-FFF2-40B4-BE49-F238E27FC236}">
-                <a16:creationId xmlns:a16="http://schemas.microsoft.com/office/drawing/2014/main" id="{2D084E88-7278-810D-D713-71E32243F66B}"/>
-              </a:ext>
-            </a:extLst>
-          </p:cNvPr>
-          <p:cNvSpPr>
-            <a:spLocks noGrp="1"/>
-          </p:cNvSpPr>
-          <p:nvPr>
-            <p:ph type="title"/>
-          </p:nvPr>
-        </p:nvSpPr>
-        <p:spPr/>
-        <p:txBody>
-          <a:bodyPr/>
-          <a:lstStyle/>
-          <a:p>
-            <a:r>
-              <a:rPr lang="en-US" dirty="0">
-                <a:solidFill>
-                  <a:srgbClr val="1F3864"/>
-                </a:solidFill>
-              </a:rPr>
-              <a:t>Measures of Spread: Range</a:t>
-            </a:r>
-          </a:p>
-        </p:txBody>
-      </p:sp>
-      <p:sp>
-        <p:nvSpPr>
-          <p:cNvPr id="4" name="Slide Number Placeholder 3">
-            <a:extLst>
-              <a:ext uri="{FF2B5EF4-FFF2-40B4-BE49-F238E27FC236}">
-                <a16:creationId xmlns:a16="http://schemas.microsoft.com/office/drawing/2014/main" id="{08203966-5407-94DA-479C-BB9A9F8F2CAF}"/>
-              </a:ext>
-            </a:extLst>
-          </p:cNvPr>
-          <p:cNvSpPr>
-            <a:spLocks noGrp="1"/>
-          </p:cNvSpPr>
-          <p:nvPr>
-            <p:ph type="sldNum" sz="quarter" idx="12"/>
-          </p:nvPr>
-        </p:nvSpPr>
-        <p:spPr/>
-        <p:txBody>
-          <a:bodyPr/>
-          <a:lstStyle/>
-          <a:p>
-            <a:fld id="{A80A81DD-F10A-4B1C-963A-0ABBB4865886}" type="slidenum">
-              <a:rPr lang="en-US" smtClean="0"/>
-              <a:t>22</a:t>
-            </a:fld>
-            <a:endParaRPr lang="en-US"/>
-          </a:p>
-        </p:txBody>
-      </p:sp>
-    </p:spTree>
-    <p:extLst>
-      <p:ext uri="{BB962C8B-B14F-4D97-AF65-F5344CB8AC3E}">
-        <p14:creationId xmlns:p14="http://schemas.microsoft.com/office/powerpoint/2010/main" val="2200598851"/>
-      </p:ext>
-    </p:extLst>
-  </p:cSld>
-  <p:clrMapOvr>
-    <a:masterClrMapping/>
-  </p:clrMapOvr>
-</p:sld>
-</file>
-
-<file path=ppt/slides/slide23.xml><?xml version="1.0" encoding="utf-8"?>
-<p:sld xmlns:a="http://schemas.openxmlformats.org/drawingml/2006/main" xmlns:r="http://schemas.openxmlformats.org/officeDocument/2006/relationships" xmlns:p="http://schemas.openxmlformats.org/presentationml/2006/main">
-  <p:cSld>
-    <p:spTree>
-      <p:nvGrpSpPr>
-        <p:cNvPr id="1" name=""/>
-        <p:cNvGrpSpPr/>
-        <p:nvPr/>
-      </p:nvGrpSpPr>
-      <p:grpSpPr>
-        <a:xfrm>
-          <a:off x="0" y="0"/>
-          <a:ext cx="0" cy="0"/>
-          <a:chOff x="0" y="0"/>
-          <a:chExt cx="0" cy="0"/>
-        </a:xfrm>
-      </p:grpSpPr>
-      <p:sp>
-        <p:nvSpPr>
-          <p:cNvPr id="6" name="Body card">
-            <a:extLst>
-              <a:ext uri="{FF2B5EF4-FFF2-40B4-BE49-F238E27FC236}">
-                <a16:creationId xmlns:a16="http://schemas.microsoft.com/office/drawing/2014/main" id="{BE8495F7-FD8E-CE47-6FF5-9B67FDC5FFCF}"/>
-              </a:ext>
-            </a:extLst>
-          </p:cNvPr>
-          <p:cNvSpPr/>
-          <p:nvPr/>
-        </p:nvSpPr>
-        <p:spPr>
-          <a:xfrm>
-            <a:off x="635000" y="1676400"/>
-            <a:ext cx="10922000" cy="4749800"/>
-          </a:xfrm>
-          <a:prstGeom prst="roundRect">
-            <a:avLst>
-              <a:gd name="adj" fmla="val 3000"/>
-            </a:avLst>
-          </a:prstGeom>
-          <a:solidFill>
-            <a:srgbClr val="F2F6FC"/>
-          </a:solidFill>
-          <a:ln w="19050">
-            <a:solidFill>
-              <a:srgbClr val="4472C4"/>
-            </a:solidFill>
-          </a:ln>
-        </p:spPr>
-        <p:style>
-          <a:lnRef idx="2">
-            <a:schemeClr val="accent1">
-              <a:shade val="15000"/>
-            </a:schemeClr>
-          </a:lnRef>
-          <a:fillRef idx="1">
-            <a:schemeClr val="accent1"/>
-          </a:fillRef>
-          <a:effectRef idx="0">
-            <a:schemeClr val="accent1"/>
-          </a:effectRef>
-          <a:fontRef idx="minor">
-            <a:schemeClr val="lt1"/>
-          </a:fontRef>
-        </p:style>
-        <p:txBody>
-          <a:bodyPr rtlCol="0" anchor="ctr"/>
-          <a:lstStyle/>
-          <a:p>
-            <a:pPr algn="ctr"/>
-            <a:endParaRPr lang="en-US"/>
-          </a:p>
-        </p:txBody>
-      </p:sp>
-      <p:sp>
-        <p:nvSpPr>
-          <p:cNvPr id="2" name="Title 1">
-            <a:extLst>
-              <a:ext uri="{FF2B5EF4-FFF2-40B4-BE49-F238E27FC236}">
-                <a16:creationId xmlns:a16="http://schemas.microsoft.com/office/drawing/2014/main" id="{506D6BCC-CAB3-F735-AC9E-6A7940310802}"/>
-              </a:ext>
-            </a:extLst>
-          </p:cNvPr>
-          <p:cNvSpPr>
-            <a:spLocks noGrp="1"/>
-          </p:cNvSpPr>
-          <p:nvPr>
-            <p:ph type="title"/>
-          </p:nvPr>
-        </p:nvSpPr>
-        <p:spPr/>
-        <p:txBody>
-          <a:bodyPr/>
-          <a:lstStyle/>
-          <a:p>
-            <a:r>
-              <a:rPr lang="en-US" sz="4400" dirty="0">
-                <a:solidFill>
-                  <a:srgbClr val="1F3864"/>
-                </a:solidFill>
-              </a:rPr>
-              <a:t>Measures of Spread: Interquartile Range</a:t>
-            </a:r>
-            <a:endParaRPr lang="en-US" dirty="0">
-              <a:solidFill>
-                <a:srgbClr val="1F3864"/>
-              </a:solidFill>
-            </a:endParaRPr>
-          </a:p>
-        </p:txBody>
-      </p:sp>
-      <mc:AlternateContent xmlns:mc="http://schemas.openxmlformats.org/markup-compatibility/2006">
-        <mc:Choice xmlns:a14="http://schemas.microsoft.com/office/drawing/2010/main" Requires="a14">
-          <p:sp>
-            <p:nvSpPr>
-              <p:cNvPr id="3" name="Content Placeholder 2">
-                <a:extLst>
-                  <a:ext uri="{FF2B5EF4-FFF2-40B4-BE49-F238E27FC236}">
-                    <a16:creationId xmlns:a16="http://schemas.microsoft.com/office/drawing/2014/main" id="{748E8586-DD23-94D2-D323-FAF1EE2B0EC8}"/>
-                  </a:ext>
-                </a:extLst>
-              </p:cNvPr>
-              <p:cNvSpPr>
-                <a:spLocks noGrp="1"/>
-              </p:cNvSpPr>
-              <p:nvPr>
-                <p:ph idx="1"/>
-              </p:nvPr>
-            </p:nvSpPr>
-            <p:spPr/>
-            <p:txBody>
-              <a:bodyPr>
-                <a:normAutofit lnSpcReduction="10000"/>
-              </a:bodyPr>
-              <a:lstStyle/>
-              <a:p>
-                <a:r>
-                  <a:rPr lang="en-US" dirty="0"/>
-                  <a:t>The </a:t>
-                </a:r>
-                <a:r>
-                  <a:rPr lang="en-US" b="1" dirty="0">
-                    <a:solidFill>
-                      <a:srgbClr val="C00000"/>
-                    </a:solidFill>
-                  </a:rPr>
-                  <a:t>interquartile range (IQR)</a:t>
-                </a:r>
-                <a:r>
-                  <a:rPr lang="en-US" dirty="0"/>
-                  <a:t> measures the spread of the middle 50% of the observations </a:t>
-                </a:r>
-              </a:p>
-              <a:p>
-                <a:endParaRPr lang="en-US" dirty="0"/>
-              </a:p>
-              <a:p>
-                <a:r>
-                  <a:rPr lang="en-US" dirty="0"/>
-                  <a:t>It is resistant to outliers</a:t>
-                </a:r>
-              </a:p>
-              <a:p>
-                <a:pPr marL="0" indent="0" algn="ctr">
-                  <a:buNone/>
-                </a:pPr>
-                <a:endParaRPr lang="en-US" sz="2400" b="1" i="1" dirty="0">
-                  <a:latin typeface="Cambria Math" panose="02040503050406030204" pitchFamily="18" charset="0"/>
-                </a:endParaRPr>
-              </a:p>
-              <a:p>
-                <a:pPr marL="0" indent="0" algn="ctr">
-                  <a:buNone/>
-                </a:pPr>
-                <a14:m>
-                  <m:oMathPara xmlns:m="http://schemas.openxmlformats.org/officeDocument/2006/math">
-                    <m:oMath>
-                      <m:r>
-                        <a:rPr lang="en-US" sz="2400" b="1" i="1" smtClean="0">
-                          <a:solidFill>
-                            <a:srgbClr val="C00000"/>
-                          </a:solidFill>
-                          <a:latin typeface="Cambria Math" panose="02040503050406030204" pitchFamily="18" charset="0"/>
-                        </a:rPr>
-                        <m:t>𝑰𝑸𝑹</m:t>
-                      </m:r>
-                      <m:r>
-                        <a:rPr lang="en-US" sz="2400" b="1" i="1" smtClean="0">
-                          <a:solidFill>
-                            <a:srgbClr val="C00000"/>
-                          </a:solidFill>
-                          <a:latin typeface="Cambria Math" panose="02040503050406030204" pitchFamily="18" charset="0"/>
-                        </a:rPr>
-                        <m:t>=</m:t>
-                      </m:r>
-                      <m:r>
-                        <a:rPr lang="en-US" sz="2400" b="1" i="1" smtClean="0">
-                          <a:solidFill>
-                            <a:srgbClr val="C00000"/>
-                          </a:solidFill>
-                          <a:latin typeface="Cambria Math" panose="02040503050406030204" pitchFamily="18" charset="0"/>
-                        </a:rPr>
-                        <m:t>𝑸</m:t>
-                      </m:r>
-                      <m:r>
-                        <a:rPr lang="en-US" sz="2400" b="1" i="1" smtClean="0">
-                          <a:solidFill>
-                            <a:srgbClr val="C00000"/>
-                          </a:solidFill>
-                          <a:latin typeface="Cambria Math" panose="02040503050406030204" pitchFamily="18" charset="0"/>
-                        </a:rPr>
-                        <m:t>𝟑</m:t>
-                      </m:r>
-                      <m:r>
-                        <a:rPr lang="en-US" sz="2400" b="1" i="1" smtClean="0">
-                          <a:solidFill>
-                            <a:srgbClr val="C00000"/>
-                          </a:solidFill>
-                          <a:latin typeface="Cambria Math" panose="02040503050406030204" pitchFamily="18" charset="0"/>
-                        </a:rPr>
-                        <m:t> −</m:t>
-                      </m:r>
-                      <m:r>
-                        <a:rPr lang="en-US" sz="2400" b="1" i="1" smtClean="0">
-                          <a:solidFill>
-                            <a:srgbClr val="C00000"/>
-                          </a:solidFill>
-                          <a:latin typeface="Cambria Math" panose="02040503050406030204" pitchFamily="18" charset="0"/>
-                        </a:rPr>
-                        <m:t>𝑸</m:t>
-                      </m:r>
-                      <m:r>
-                        <a:rPr lang="en-US" sz="2400" b="1" i="1" smtClean="0">
-                          <a:solidFill>
-                            <a:srgbClr val="C00000"/>
-                          </a:solidFill>
-                          <a:latin typeface="Cambria Math" panose="02040503050406030204" pitchFamily="18" charset="0"/>
-                        </a:rPr>
-                        <m:t>𝟏</m:t>
-                      </m:r>
-                    </m:oMath>
-                  </m:oMathPara>
-                </a14:m>
-                <a:endParaRPr lang="en-US" sz="2400" b="1" dirty="0"/>
-              </a:p>
-              <a:p>
-                <a:pPr marL="0" indent="0" algn="ctr">
-                  <a:buNone/>
-                </a:pPr>
-                <a:endParaRPr lang="en-US" sz="2400" b="1" dirty="0"/>
-              </a:p>
-              <a:p>
-                <a:r>
-                  <a:rPr lang="en-US" sz="2400" dirty="0"/>
-                  <a:t>The more variability the larger the value of the </a:t>
-                </a:r>
-                <a:r>
-                  <a:rPr lang="en-US" sz="2400" b="1" dirty="0">
-                    <a:solidFill>
-                      <a:srgbClr val="C00000"/>
-                    </a:solidFill>
-                  </a:rPr>
-                  <a:t>IQR</a:t>
-                </a:r>
-                <a:r>
-                  <a:rPr lang="en-US" sz="2400" dirty="0"/>
-                  <a:t> </a:t>
-                </a:r>
-              </a:p>
-              <a:p>
-                <a:endParaRPr lang="en-US" sz="2400" dirty="0"/>
-              </a:p>
-              <a:p>
-                <a:r>
-                  <a:rPr lang="en-US" sz="2400" b="1" dirty="0">
-                    <a:solidFill>
-                      <a:srgbClr val="C00000"/>
-                    </a:solidFill>
-                  </a:rPr>
-                  <a:t>IQR </a:t>
-                </a:r>
-                <a:r>
-                  <a:rPr lang="en-US" sz="2400" dirty="0"/>
-                  <a:t>is a good choice for distributions that are highly skewed!</a:t>
-                </a:r>
-                <a:endParaRPr lang="en-US" sz="2400" b="1" dirty="0"/>
-              </a:p>
-              <a:p>
-                <a:pPr marL="0" indent="0" algn="ctr">
-                  <a:buNone/>
-                </a:pPr>
-                <a:endParaRPr lang="en-US" sz="2400" b="1" dirty="0"/>
-              </a:p>
-              <a:p>
-                <a:endParaRPr lang="en-US" sz="2400" b="1" dirty="0"/>
-              </a:p>
-            </p:txBody>
-          </p:sp>
-        </mc:Choice>
-        <mc:Fallback>
-          <p:sp>
-            <p:nvSpPr>
-              <p:cNvPr id="3" name="Content Placeholder 2">
-                <a:extLst>
-                  <a:ext uri="{FF2B5EF4-FFF2-40B4-BE49-F238E27FC236}">
-                    <a16:creationId xmlns:a16="http://schemas.microsoft.com/office/drawing/2014/main" id="{748E8586-DD23-94D2-D323-FAF1EE2B0EC8}"/>
-                  </a:ext>
-                </a:extLst>
-              </p:cNvPr>
-              <p:cNvSpPr>
-                <a:spLocks noGrp="1" noRot="1" noChangeAspect="1" noMove="1" noResize="1" noEditPoints="1" noAdjustHandles="1" noChangeArrowheads="1" noChangeShapeType="1" noTextEdit="1"/>
-              </p:cNvSpPr>
-              <p:nvPr>
-                <p:ph idx="1"/>
-              </p:nvPr>
-            </p:nvSpPr>
-            <p:spPr>
-              <a:blipFill>
-                <a:blip r:embed="rId2"/>
-                <a:stretch>
-                  <a:fillRect l="-1043" t="-3081" r="-1333"/>
-                </a:stretch>
-              </a:blipFill>
-            </p:spPr>
-            <p:txBody>
-              <a:bodyPr/>
-              <a:lstStyle/>
-              <a:p>
-                <a:r>
-                  <a:rPr lang="en-US">
-                    <a:noFill/>
-                  </a:rPr>
-                  <a:t> </a:t>
-                </a:r>
-              </a:p>
-            </p:txBody>
-          </p:sp>
-        </mc:Fallback>
-      </mc:AlternateContent>
-      <p:sp>
-        <p:nvSpPr>
-          <p:cNvPr id="4" name="Slide Number Placeholder 3">
-            <a:extLst>
-              <a:ext uri="{FF2B5EF4-FFF2-40B4-BE49-F238E27FC236}">
-                <a16:creationId xmlns:a16="http://schemas.microsoft.com/office/drawing/2014/main" id="{7C8AED4B-7D0B-B025-EFFA-10727BEB6974}"/>
-              </a:ext>
-            </a:extLst>
-          </p:cNvPr>
-          <p:cNvSpPr>
-            <a:spLocks noGrp="1"/>
-          </p:cNvSpPr>
-          <p:nvPr>
-            <p:ph type="sldNum" sz="quarter" idx="12"/>
-          </p:nvPr>
-        </p:nvSpPr>
-        <p:spPr/>
-        <p:txBody>
-          <a:bodyPr/>
-          <a:lstStyle/>
-          <a:p>
-            <a:fld id="{A80A81DD-F10A-4B1C-963A-0ABBB4865886}" type="slidenum">
-              <a:rPr lang="en-US" smtClean="0"/>
-              <a:t>23</a:t>
-            </a:fld>
-            <a:endParaRPr lang="en-US"/>
-          </a:p>
-        </p:txBody>
-      </p:sp>
-      <p:sp>
-        <p:nvSpPr>
-          <p:cNvPr id="5" name="Title rule">
-            <a:extLst>
-              <a:ext uri="{FF2B5EF4-FFF2-40B4-BE49-F238E27FC236}">
-                <a16:creationId xmlns:a16="http://schemas.microsoft.com/office/drawing/2014/main" id="{6C59B7F6-6EC8-75C4-2EBA-7F43BFA74F95}"/>
-              </a:ext>
-            </a:extLst>
-          </p:cNvPr>
-          <p:cNvSpPr/>
-          <p:nvPr/>
-        </p:nvSpPr>
-        <p:spPr>
-          <a:xfrm>
-            <a:off x="838200" y="1600200"/>
-            <a:ext cx="10515600" cy="38100"/>
-          </a:xfrm>
-          <a:prstGeom prst="rect">
-            <a:avLst/>
-          </a:prstGeom>
-          <a:solidFill>
-            <a:srgbClr val="4472C4"/>
-          </a:solidFill>
-          <a:ln w="12700" cap="flat" cmpd="sng" algn="ctr">
-            <a:noFill/>
-            <a:prstDash val="solid"/>
-            <a:miter lim="800000"/>
-          </a:ln>
-          <a:effectLst/>
-          <a:extLst>
-            <a:ext uri="{91240B29-F687-4F45-9708-019B960494DF}">
-              <a14:hiddenLine xmlns:a14="http://schemas.microsoft.com/office/drawing/2010/main" w="12700" cap="flat" cmpd="sng" algn="ctr">
-                <a:solidFill>
-                  <a:schemeClr val="accent1">
-                    <a:shade val="15000"/>
-                  </a:schemeClr>
-                </a:solidFill>
-                <a:prstDash val="solid"/>
-                <a:miter lim="800000"/>
-              </a14:hiddenLine>
-            </a:ext>
-          </a:extLst>
-        </p:spPr>
-        <p:style>
-          <a:lnRef idx="2">
-            <a:schemeClr val="accent1">
-              <a:shade val="15000"/>
-            </a:schemeClr>
-          </a:lnRef>
-          <a:fillRef idx="1">
-            <a:schemeClr val="accent1"/>
-          </a:fillRef>
-          <a:effectRef idx="0">
-            <a:schemeClr val="accent1"/>
-          </a:effectRef>
-          <a:fontRef idx="minor">
-            <a:schemeClr val="lt1"/>
-          </a:fontRef>
-        </p:style>
-        <p:txBody>
-          <a:bodyPr rtlCol="0" anchor="ctr"/>
-          <a:lstStyle/>
-          <a:p>
-            <a:pPr algn="ctr"/>
-            <a:endParaRPr lang="en-US"/>
-          </a:p>
-        </p:txBody>
-      </p:sp>
-    </p:spTree>
-    <p:extLst>
-      <p:ext uri="{BB962C8B-B14F-4D97-AF65-F5344CB8AC3E}">
-        <p14:creationId xmlns:p14="http://schemas.microsoft.com/office/powerpoint/2010/main" val="984771053"/>
-      </p:ext>
-    </p:extLst>
-  </p:cSld>
-  <p:clrMapOvr>
-    <a:masterClrMapping/>
-  </p:clrMapOvr>
-</p:sld>
-</file>
-
-<file path=ppt/slides/slide24.xml><?xml version="1.0" encoding="utf-8"?>
-<p:sld xmlns:a="http://schemas.openxmlformats.org/drawingml/2006/main" xmlns:r="http://schemas.openxmlformats.org/officeDocument/2006/relationships" xmlns:p="http://schemas.openxmlformats.org/presentationml/2006/main">
-  <p:cSld>
-    <p:spTree>
-      <p:nvGrpSpPr>
-        <p:cNvPr id="1" name=""/>
-        <p:cNvGrpSpPr/>
-        <p:nvPr/>
-      </p:nvGrpSpPr>
-      <p:grpSpPr>
-        <a:xfrm>
-          <a:off x="0" y="0"/>
-          <a:ext cx="0" cy="0"/>
-          <a:chOff x="0" y="0"/>
-          <a:chExt cx="0" cy="0"/>
-        </a:xfrm>
-      </p:grpSpPr>
-      <p:sp>
-        <p:nvSpPr>
-          <p:cNvPr id="6" name="Body card">
-            <a:extLst>
-              <a:ext uri="{FF2B5EF4-FFF2-40B4-BE49-F238E27FC236}">
-                <a16:creationId xmlns:a16="http://schemas.microsoft.com/office/drawing/2014/main" id="{02C0B440-F91E-6F7A-3DFC-2793BD9D70C0}"/>
-              </a:ext>
-            </a:extLst>
-          </p:cNvPr>
-          <p:cNvSpPr/>
-          <p:nvPr/>
-        </p:nvSpPr>
-        <p:spPr>
-          <a:xfrm>
-            <a:off x="635000" y="1676400"/>
-            <a:ext cx="10922000" cy="1739900"/>
-          </a:xfrm>
-          <a:prstGeom prst="roundRect">
-            <a:avLst>
-              <a:gd name="adj" fmla="val 3000"/>
-            </a:avLst>
-          </a:prstGeom>
-          <a:solidFill>
-            <a:srgbClr val="F2F6FC"/>
-          </a:solidFill>
-          <a:ln w="19050">
-            <a:solidFill>
-              <a:srgbClr val="4472C4"/>
-            </a:solidFill>
-          </a:ln>
-        </p:spPr>
-        <p:style>
-          <a:lnRef idx="2">
-            <a:schemeClr val="accent1">
-              <a:shade val="15000"/>
-            </a:schemeClr>
-          </a:lnRef>
-          <a:fillRef idx="1">
-            <a:schemeClr val="accent1"/>
-          </a:fillRef>
-          <a:effectRef idx="0">
-            <a:schemeClr val="accent1"/>
-          </a:effectRef>
-          <a:fontRef idx="minor">
-            <a:schemeClr val="lt1"/>
-          </a:fontRef>
-        </p:style>
-        <p:txBody>
-          <a:bodyPr rtlCol="0" anchor="ctr"/>
-          <a:lstStyle/>
-          <a:p>
-            <a:pPr algn="ctr"/>
-            <a:endParaRPr lang="en-US"/>
-          </a:p>
-        </p:txBody>
-      </p:sp>
-      <p:sp>
-        <p:nvSpPr>
-          <p:cNvPr id="2" name="Title 1">
-            <a:extLst>
-              <a:ext uri="{FF2B5EF4-FFF2-40B4-BE49-F238E27FC236}">
-                <a16:creationId xmlns:a16="http://schemas.microsoft.com/office/drawing/2014/main" id="{2EEA510B-84BA-0986-946A-7635FB295312}"/>
-              </a:ext>
-            </a:extLst>
-          </p:cNvPr>
-          <p:cNvSpPr>
-            <a:spLocks noGrp="1"/>
-          </p:cNvSpPr>
-          <p:nvPr>
-            <p:ph type="title"/>
-          </p:nvPr>
-        </p:nvSpPr>
-        <p:spPr/>
-        <p:txBody>
-          <a:bodyPr/>
-          <a:lstStyle/>
-          <a:p>
-            <a:r>
-              <a:rPr lang="en-US" dirty="0">
-                <a:solidFill>
-                  <a:srgbClr val="1F3864"/>
-                </a:solidFill>
-              </a:rPr>
-              <a:t>Practice: Finding quartiles and IQR</a:t>
-            </a:r>
-          </a:p>
-        </p:txBody>
-      </p:sp>
-      <p:sp>
-        <p:nvSpPr>
-          <p:cNvPr id="3" name="Content Placeholder 2">
-            <a:extLst>
-              <a:ext uri="{FF2B5EF4-FFF2-40B4-BE49-F238E27FC236}">
-                <a16:creationId xmlns:a16="http://schemas.microsoft.com/office/drawing/2014/main" id="{BBB3D4BA-5F56-129C-FF6C-FCDB24448C5B}"/>
-              </a:ext>
-            </a:extLst>
-          </p:cNvPr>
-          <p:cNvSpPr>
-            <a:spLocks noGrp="1"/>
-          </p:cNvSpPr>
-          <p:nvPr>
-            <p:ph idx="1"/>
-          </p:nvPr>
-        </p:nvSpPr>
-        <p:spPr/>
-        <p:txBody>
-          <a:bodyPr/>
-          <a:lstStyle/>
-          <a:p>
-            <a:pPr marL="0" indent="0">
-              <a:buNone/>
-            </a:pPr>
-            <a:r>
-              <a:rPr lang="en-US" dirty="0"/>
-              <a:t>Exam Scores 61,61,65,65,66,68,69,73,74,75,76,78,79,90,94</a:t>
-            </a:r>
-          </a:p>
-          <a:p>
-            <a:pPr marL="0" indent="0">
-              <a:buNone/>
-            </a:pPr>
-            <a:endParaRPr lang="en-US" dirty="0"/>
-          </a:p>
-          <a:p>
-            <a:pPr marL="0" indent="0">
-              <a:buNone/>
-            </a:pPr>
-            <a:r>
-              <a:rPr lang="en-US" dirty="0"/>
-              <a:t>Compute the IQR</a:t>
-            </a:r>
-          </a:p>
-        </p:txBody>
-      </p:sp>
-      <p:sp>
-        <p:nvSpPr>
-          <p:cNvPr id="4" name="Slide Number Placeholder 3">
-            <a:extLst>
-              <a:ext uri="{FF2B5EF4-FFF2-40B4-BE49-F238E27FC236}">
-                <a16:creationId xmlns:a16="http://schemas.microsoft.com/office/drawing/2014/main" id="{48B69AC6-F494-838D-32D6-9D4046F5E8A8}"/>
-              </a:ext>
-            </a:extLst>
-          </p:cNvPr>
-          <p:cNvSpPr>
-            <a:spLocks noGrp="1"/>
-          </p:cNvSpPr>
-          <p:nvPr>
-            <p:ph type="sldNum" sz="quarter" idx="12"/>
-          </p:nvPr>
-        </p:nvSpPr>
-        <p:spPr/>
-        <p:txBody>
-          <a:bodyPr/>
-          <a:lstStyle/>
-          <a:p>
-            <a:fld id="{A80A81DD-F10A-4B1C-963A-0ABBB4865886}" type="slidenum">
-              <a:rPr lang="en-US" smtClean="0"/>
-              <a:t>24</a:t>
-            </a:fld>
-            <a:endParaRPr lang="en-US"/>
-          </a:p>
-        </p:txBody>
-      </p:sp>
-      <p:sp>
-        <p:nvSpPr>
-          <p:cNvPr id="5" name="Title rule">
-            <a:extLst>
-              <a:ext uri="{FF2B5EF4-FFF2-40B4-BE49-F238E27FC236}">
-                <a16:creationId xmlns:a16="http://schemas.microsoft.com/office/drawing/2014/main" id="{5E310728-7EBB-3282-A6DF-A2124C2A2A94}"/>
-              </a:ext>
-            </a:extLst>
-          </p:cNvPr>
-          <p:cNvSpPr/>
-          <p:nvPr/>
-        </p:nvSpPr>
-        <p:spPr>
-          <a:xfrm>
-            <a:off x="838200" y="1600200"/>
-            <a:ext cx="10515600" cy="38100"/>
-          </a:xfrm>
-          <a:prstGeom prst="rect">
-            <a:avLst/>
-          </a:prstGeom>
-          <a:solidFill>
-            <a:srgbClr val="4472C4"/>
-          </a:solidFill>
-          <a:ln w="12700" cap="flat" cmpd="sng" algn="ctr">
-            <a:noFill/>
-            <a:prstDash val="solid"/>
-            <a:miter lim="800000"/>
-          </a:ln>
-          <a:effectLst/>
-          <a:extLst>
-            <a:ext uri="{91240B29-F687-4F45-9708-019B960494DF}">
-              <a14:hiddenLine xmlns:a14="http://schemas.microsoft.com/office/drawing/2010/main" w="12700" cap="flat" cmpd="sng" algn="ctr">
-                <a:solidFill>
-                  <a:schemeClr val="accent1">
-                    <a:shade val="15000"/>
-                  </a:schemeClr>
-                </a:solidFill>
-                <a:prstDash val="solid"/>
-                <a:miter lim="800000"/>
-              </a14:hiddenLine>
-            </a:ext>
-          </a:extLst>
-        </p:spPr>
-        <p:style>
-          <a:lnRef idx="2">
-            <a:schemeClr val="accent1">
-              <a:shade val="15000"/>
-            </a:schemeClr>
-          </a:lnRef>
-          <a:fillRef idx="1">
-            <a:schemeClr val="accent1"/>
-          </a:fillRef>
-          <a:effectRef idx="0">
-            <a:schemeClr val="accent1"/>
-          </a:effectRef>
-          <a:fontRef idx="minor">
-            <a:schemeClr val="lt1"/>
-          </a:fontRef>
-        </p:style>
-        <p:txBody>
-          <a:bodyPr rtlCol="0" anchor="ctr"/>
-          <a:lstStyle/>
-          <a:p>
-            <a:pPr algn="ctr"/>
-            <a:endParaRPr lang="en-US"/>
-          </a:p>
-        </p:txBody>
-      </p:sp>
-    </p:spTree>
-    <p:extLst>
-      <p:ext uri="{BB962C8B-B14F-4D97-AF65-F5344CB8AC3E}">
-        <p14:creationId xmlns:p14="http://schemas.microsoft.com/office/powerpoint/2010/main" val="1769097806"/>
-      </p:ext>
-    </p:extLst>
-  </p:cSld>
-  <p:clrMapOvr>
-    <a:masterClrMapping/>
-  </p:clrMapOvr>
-</p:sld>
-</file>
-
-<file path=ppt/slides/slide25.xml><?xml version="1.0" encoding="utf-8"?>
-<p:sld xmlns:a="http://schemas.openxmlformats.org/drawingml/2006/main" xmlns:r="http://schemas.openxmlformats.org/officeDocument/2006/relationships" xmlns:p="http://schemas.openxmlformats.org/presentationml/2006/main">
-  <p:cSld>
-    <p:spTree>
-      <p:nvGrpSpPr>
-        <p:cNvPr id="1" name=""/>
-        <p:cNvGrpSpPr/>
-        <p:nvPr/>
-      </p:nvGrpSpPr>
-      <p:grpSpPr>
-        <a:xfrm>
-          <a:off x="0" y="0"/>
-          <a:ext cx="0" cy="0"/>
-          <a:chOff x="0" y="0"/>
-          <a:chExt cx="0" cy="0"/>
-        </a:xfrm>
-      </p:grpSpPr>
-      <p:sp>
-        <p:nvSpPr>
-          <p:cNvPr id="2" name="Title 1">
-            <a:extLst>
-              <a:ext uri="{FF2B5EF4-FFF2-40B4-BE49-F238E27FC236}">
-                <a16:creationId xmlns:a16="http://schemas.microsoft.com/office/drawing/2014/main" id="{5E5AA028-A7CA-27E1-ACC7-31804B9B3860}"/>
-              </a:ext>
-            </a:extLst>
-          </p:cNvPr>
-          <p:cNvSpPr>
-            <a:spLocks noGrp="1"/>
-          </p:cNvSpPr>
-          <p:nvPr>
-            <p:ph type="title"/>
-          </p:nvPr>
-        </p:nvSpPr>
-        <p:spPr>
-          <a:xfrm>
-            <a:off x="838200" y="368300"/>
-            <a:ext cx="10515600" cy="1320800"/>
-          </a:xfrm>
-        </p:spPr>
-        <p:txBody>
-          <a:bodyPr>
-            <a:normAutofit/>
-          </a:bodyPr>
-          <a:lstStyle/>
-          <a:p>
-            <a:r>
-              <a:rPr lang="en-US" sz="3600" dirty="0">
-                <a:solidFill>
-                  <a:srgbClr val="1F3864"/>
-                </a:solidFill>
-              </a:rPr>
-              <a:t>The Boxplot (Box and Whisker Plot): A five number summary</a:t>
-            </a:r>
-          </a:p>
-        </p:txBody>
-      </p:sp>
-      <p:sp>
-        <p:nvSpPr>
-          <p:cNvPr id="3" name="Content Placeholder 2">
-            <a:extLst>
-              <a:ext uri="{FF2B5EF4-FFF2-40B4-BE49-F238E27FC236}">
-                <a16:creationId xmlns:a16="http://schemas.microsoft.com/office/drawing/2014/main" id="{00D0CDBC-1066-FD3E-EAC4-1CD68D78009C}"/>
-              </a:ext>
-            </a:extLst>
-          </p:cNvPr>
-          <p:cNvSpPr>
-            <a:spLocks noGrp="1"/>
-          </p:cNvSpPr>
-          <p:nvPr>
-            <p:ph idx="1"/>
-          </p:nvPr>
-        </p:nvSpPr>
-        <p:spPr>
-          <a:xfrm>
-            <a:off x="838200" y="1514763"/>
-            <a:ext cx="4448175" cy="4662199"/>
-          </a:xfrm>
-        </p:spPr>
-        <p:txBody>
-          <a:bodyPr>
-            <a:normAutofit fontScale="92500"/>
-          </a:bodyPr>
-          <a:lstStyle/>
-          <a:p>
-            <a:r>
-              <a:rPr lang="en-US" dirty="0"/>
-              <a:t> Pros: </a:t>
-            </a:r>
-          </a:p>
-          <a:p>
-            <a:pPr lvl="1"/>
-            <a:r>
-              <a:rPr lang="en-US" dirty="0"/>
-              <a:t>good for describing shape and location</a:t>
-            </a:r>
-          </a:p>
-          <a:p>
-            <a:pPr lvl="1"/>
-            <a:r>
-              <a:rPr lang="en-US" dirty="0"/>
-              <a:t>Can be used to identify outliers</a:t>
-            </a:r>
-          </a:p>
-          <a:p>
-            <a:pPr lvl="1"/>
-            <a:r>
-              <a:rPr lang="en-US" dirty="0"/>
-              <a:t>Length of whiskers indicates skew</a:t>
-            </a:r>
-          </a:p>
-          <a:p>
-            <a:pPr lvl="1"/>
-            <a:r>
-              <a:rPr lang="en-US" dirty="0"/>
-              <a:t>Good for comparing two distributions or across categories</a:t>
-            </a:r>
-          </a:p>
-          <a:p>
-            <a:r>
-              <a:rPr lang="en-US" dirty="0"/>
-              <a:t>Cons: </a:t>
-            </a:r>
-          </a:p>
-          <a:p>
-            <a:pPr lvl="1"/>
-            <a:r>
-              <a:rPr lang="en-US" dirty="0"/>
-              <a:t>does not show certain features like mounds, or gaps as well as a histogram</a:t>
-            </a:r>
-          </a:p>
-        </p:txBody>
-      </p:sp>
-      <p:pic>
-        <p:nvPicPr>
-          <p:cNvPr id="5" name="Picture 4" descr="A diagram of a box plot&#10;&#10;Description automatically generated">
-            <a:extLst>
-              <a:ext uri="{FF2B5EF4-FFF2-40B4-BE49-F238E27FC236}">
-                <a16:creationId xmlns:a16="http://schemas.microsoft.com/office/drawing/2014/main" id="{018FD8B2-9B43-319A-0198-F033315EADDA}"/>
-              </a:ext>
-            </a:extLst>
-          </p:cNvPr>
-          <p:cNvPicPr>
-            <a:picLocks noChangeAspect="1"/>
-          </p:cNvPicPr>
-          <p:nvPr/>
-        </p:nvPicPr>
-        <p:blipFill>
-          <a:blip r:embed="rId2">
-            <a:extLst>
-              <a:ext uri="{28A0092B-C50C-407E-A947-70E740481C1C}">
-                <a14:useLocalDpi xmlns:a14="http://schemas.microsoft.com/office/drawing/2010/main" val="0"/>
-              </a:ext>
-              <a:ext uri="{837473B0-CC2E-450A-ABE3-18F120FF3D39}">
-                <a1611:picAttrSrcUrl xmlns:a1611="http://schemas.microsoft.com/office/drawing/2016/11/main" r:id="rId3"/>
-              </a:ext>
-            </a:extLst>
-          </a:blip>
-          <a:stretch>
-            <a:fillRect/>
-          </a:stretch>
-        </p:blipFill>
-        <p:spPr>
-          <a:xfrm>
-            <a:off x="5451619" y="2368404"/>
-            <a:ext cx="6657975" cy="3667125"/>
-          </a:xfrm>
-          <a:prstGeom prst="rect">
-            <a:avLst/>
-          </a:prstGeom>
-        </p:spPr>
-      </p:pic>
-      <p:sp>
-        <p:nvSpPr>
-          <p:cNvPr id="4" name="Slide Number Placeholder 3">
-            <a:extLst>
-              <a:ext uri="{FF2B5EF4-FFF2-40B4-BE49-F238E27FC236}">
-                <a16:creationId xmlns:a16="http://schemas.microsoft.com/office/drawing/2014/main" id="{E1735FB2-D8B7-AAF8-DAEA-A410B5774503}"/>
-              </a:ext>
-            </a:extLst>
-          </p:cNvPr>
-          <p:cNvSpPr>
-            <a:spLocks noGrp="1"/>
-          </p:cNvSpPr>
-          <p:nvPr>
-            <p:ph type="sldNum" sz="quarter" idx="12"/>
-          </p:nvPr>
-        </p:nvSpPr>
-        <p:spPr/>
-        <p:txBody>
-          <a:bodyPr/>
-          <a:lstStyle/>
-          <a:p>
-            <a:fld id="{A80A81DD-F10A-4B1C-963A-0ABBB4865886}" type="slidenum">
-              <a:rPr lang="en-US" smtClean="0"/>
-              <a:t>25</a:t>
-            </a:fld>
-            <a:endParaRPr lang="en-US"/>
-          </a:p>
-        </p:txBody>
-      </p:sp>
-    </p:spTree>
-    <p:extLst>
-      <p:ext uri="{BB962C8B-B14F-4D97-AF65-F5344CB8AC3E}">
-        <p14:creationId xmlns:p14="http://schemas.microsoft.com/office/powerpoint/2010/main" val="3576401033"/>
-      </p:ext>
-    </p:extLst>
-  </p:cSld>
-  <p:clrMapOvr>
-    <a:masterClrMapping/>
-  </p:clrMapOvr>
-</p:sld>
-</file>
-
-<file path=ppt/slides/slide26.xml><?xml version="1.0" encoding="utf-8"?>
-<p:sld xmlns:a="http://schemas.openxmlformats.org/drawingml/2006/main" xmlns:r="http://schemas.openxmlformats.org/officeDocument/2006/relationships" xmlns:p="http://schemas.openxmlformats.org/presentationml/2006/main">
-  <p:cSld>
-    <p:spTree>
-      <p:nvGrpSpPr>
-        <p:cNvPr id="1" name=""/>
-        <p:cNvGrpSpPr/>
-        <p:nvPr/>
-      </p:nvGrpSpPr>
-      <p:grpSpPr>
-        <a:xfrm>
-          <a:off x="0" y="0"/>
-          <a:ext cx="0" cy="0"/>
-          <a:chOff x="0" y="0"/>
-          <a:chExt cx="0" cy="0"/>
-        </a:xfrm>
-      </p:grpSpPr>
-      <p:pic>
-        <p:nvPicPr>
-          <p:cNvPr id="9" name="Picture 8">
-            <a:extLst>
-              <a:ext uri="{FF2B5EF4-FFF2-40B4-BE49-F238E27FC236}">
-                <a16:creationId xmlns:a16="http://schemas.microsoft.com/office/drawing/2014/main" id="{056E2CDD-0BF2-1E07-E65C-54C10EEB8C54}"/>
-              </a:ext>
-            </a:extLst>
-          </p:cNvPr>
-          <p:cNvPicPr>
-            <a:picLocks noChangeAspect="1"/>
-          </p:cNvPicPr>
-          <p:nvPr/>
-        </p:nvPicPr>
-        <p:blipFill>
-          <a:blip r:embed="rId2"/>
-          <a:stretch>
-            <a:fillRect/>
-          </a:stretch>
-        </p:blipFill>
-        <p:spPr>
-          <a:xfrm>
-            <a:off x="1521454" y="0"/>
-            <a:ext cx="9149091" cy="6858000"/>
-          </a:xfrm>
-          <a:prstGeom prst="rect">
-            <a:avLst/>
-          </a:prstGeom>
-        </p:spPr>
-      </p:pic>
-      <p:sp>
-        <p:nvSpPr>
-          <p:cNvPr id="2" name="Slide Number Placeholder 1">
-            <a:extLst>
-              <a:ext uri="{FF2B5EF4-FFF2-40B4-BE49-F238E27FC236}">
-                <a16:creationId xmlns:a16="http://schemas.microsoft.com/office/drawing/2014/main" id="{3F2A178C-85BE-9C3D-8880-ADF68CEC94D4}"/>
-              </a:ext>
-            </a:extLst>
-          </p:cNvPr>
-          <p:cNvSpPr>
-            <a:spLocks noGrp="1"/>
-          </p:cNvSpPr>
-          <p:nvPr>
-            <p:ph type="sldNum" sz="quarter" idx="12"/>
-          </p:nvPr>
-        </p:nvSpPr>
-        <p:spPr/>
-        <p:txBody>
-          <a:bodyPr/>
-          <a:lstStyle/>
-          <a:p>
-            <a:fld id="{A80A81DD-F10A-4B1C-963A-0ABBB4865886}" type="slidenum">
-              <a:rPr lang="en-US" smtClean="0"/>
-              <a:t>26</a:t>
-            </a:fld>
-            <a:endParaRPr lang="en-US"/>
-          </a:p>
-        </p:txBody>
-      </p:sp>
-    </p:spTree>
-    <p:extLst>
-      <p:ext uri="{BB962C8B-B14F-4D97-AF65-F5344CB8AC3E}">
-        <p14:creationId xmlns:p14="http://schemas.microsoft.com/office/powerpoint/2010/main" val="1961021952"/>
-      </p:ext>
-    </p:extLst>
-  </p:cSld>
-  <p:clrMapOvr>
-    <a:masterClrMapping/>
-  </p:clrMapOvr>
-</p:sld>
-</file>
-
-<file path=ppt/slides/slide27.xml><?xml version="1.0" encoding="utf-8"?>
-<p:sld xmlns:a="http://schemas.openxmlformats.org/drawingml/2006/main" xmlns:r="http://schemas.openxmlformats.org/officeDocument/2006/relationships" xmlns:p="http://schemas.openxmlformats.org/presentationml/2006/main">
-  <p:cSld>
-    <p:spTree>
-      <p:nvGrpSpPr>
-        <p:cNvPr id="1" name=""/>
-        <p:cNvGrpSpPr/>
-        <p:nvPr/>
-      </p:nvGrpSpPr>
-      <p:grpSpPr>
-        <a:xfrm>
-          <a:off x="0" y="0"/>
-          <a:ext cx="0" cy="0"/>
-          <a:chOff x="0" y="0"/>
-          <a:chExt cx="0" cy="0"/>
-        </a:xfrm>
-      </p:grpSpPr>
-      <mc:AlternateContent xmlns:mc="http://schemas.openxmlformats.org/markup-compatibility/2006">
-        <mc:Choice xmlns:a14="http://schemas.microsoft.com/office/drawing/2010/main" Requires="a14">
-          <p:sp>
-            <p:nvSpPr>
-              <p:cNvPr id="4" name="Content Placeholder 2">
-                <a:extLst>
-                  <a:ext uri="{FF2B5EF4-FFF2-40B4-BE49-F238E27FC236}">
-                    <a16:creationId xmlns:a16="http://schemas.microsoft.com/office/drawing/2014/main" id="{C933D906-CF81-5AD4-2902-D9DD0E0EF8B7}"/>
-                  </a:ext>
-                </a:extLst>
-              </p:cNvPr>
-              <p:cNvSpPr txBox="1">
-                <a:spLocks/>
-              </p:cNvSpPr>
-              <p:nvPr/>
-            </p:nvSpPr>
-            <p:spPr>
-              <a:xfrm>
-                <a:off x="838199" y="1411704"/>
-                <a:ext cx="10393219" cy="4795132"/>
-              </a:xfrm>
-              <a:prstGeom prst="rect">
-                <a:avLst/>
-              </a:prstGeom>
-            </p:spPr>
-            <p:txBody>
-              <a:bodyPr vert="horz" lIns="91440" tIns="45720" rIns="91440" bIns="45720" rtlCol="0">
-                <a:normAutofit/>
-              </a:bodyPr>
-              <a:lstStyle>
-                <a:lvl1pPr marL="228600" indent="-228600" algn="l" defTabSz="914400" rtl="0" eaLnBrk="1" latinLnBrk="0" hangingPunct="1">
-                  <a:lnSpc>
-                    <a:spcPct val="90000"/>
-                  </a:lnSpc>
-                  <a:spcBef>
-                    <a:spcPts val="1000"/>
-                  </a:spcBef>
-                  <a:buFont typeface="Arial" panose="020B0604020202020204" pitchFamily="34" charset="0"/>
-                  <a:buChar char="•"/>
-                  <a:defRPr sz="2800" kern="1200">
-                    <a:solidFill>
-                      <a:schemeClr val="tx1"/>
-                    </a:solidFill>
-                    <a:latin typeface="+mn-lt"/>
-                    <a:ea typeface="+mn-ea"/>
-                    <a:cs typeface="+mn-cs"/>
-                  </a:defRPr>
-                </a:lvl1pPr>
-                <a:lvl2pPr marL="685800" indent="-228600" algn="l" defTabSz="914400" rtl="0" eaLnBrk="1" latinLnBrk="0" hangingPunct="1">
-                  <a:lnSpc>
-                    <a:spcPct val="90000"/>
-                  </a:lnSpc>
-                  <a:spcBef>
-                    <a:spcPts val="500"/>
-                  </a:spcBef>
-                  <a:buFont typeface="Arial" panose="020B0604020202020204" pitchFamily="34" charset="0"/>
-                  <a:buChar char="•"/>
-                  <a:defRPr sz="2400" kern="1200">
-                    <a:solidFill>
-                      <a:schemeClr val="tx1"/>
-                    </a:solidFill>
-                    <a:latin typeface="+mn-lt"/>
-                    <a:ea typeface="+mn-ea"/>
-                    <a:cs typeface="+mn-cs"/>
-                  </a:defRPr>
-                </a:lvl2pPr>
-                <a:lvl3pPr marL="1143000" indent="-228600" algn="l" defTabSz="914400" rtl="0" eaLnBrk="1" latinLnBrk="0" hangingPunct="1">
-                  <a:lnSpc>
-                    <a:spcPct val="90000"/>
-                  </a:lnSpc>
-                  <a:spcBef>
-                    <a:spcPts val="500"/>
-                  </a:spcBef>
-                  <a:buFont typeface="Arial" panose="020B0604020202020204" pitchFamily="34" charset="0"/>
-                  <a:buChar char="•"/>
-                  <a:defRPr sz="2000" kern="1200">
-                    <a:solidFill>
-                      <a:schemeClr val="tx1"/>
-                    </a:solidFill>
-                    <a:latin typeface="+mn-lt"/>
-                    <a:ea typeface="+mn-ea"/>
-                    <a:cs typeface="+mn-cs"/>
-                  </a:defRPr>
-                </a:lvl3pPr>
-                <a:lvl4pPr marL="1600200" indent="-228600" algn="l" defTabSz="914400" rtl="0" eaLnBrk="1" latinLnBrk="0" hangingPunct="1">
-                  <a:lnSpc>
-                    <a:spcPct val="90000"/>
-                  </a:lnSpc>
-                  <a:spcBef>
-                    <a:spcPts val="500"/>
-                  </a:spcBef>
-                  <a:buFont typeface="Arial" panose="020B0604020202020204" pitchFamily="34" charset="0"/>
-                  <a:buChar char="•"/>
-                  <a:defRPr sz="1800" kern="1200">
-                    <a:solidFill>
-                      <a:schemeClr val="tx1"/>
-                    </a:solidFill>
-                    <a:latin typeface="+mn-lt"/>
-                    <a:ea typeface="+mn-ea"/>
-                    <a:cs typeface="+mn-cs"/>
-                  </a:defRPr>
-                </a:lvl4pPr>
-                <a:lvl5pPr marL="2057400" indent="-228600" algn="l" defTabSz="914400" rtl="0" eaLnBrk="1" latinLnBrk="0" hangingPunct="1">
-                  <a:lnSpc>
-                    <a:spcPct val="90000"/>
-                  </a:lnSpc>
-                  <a:spcBef>
-                    <a:spcPts val="500"/>
-                  </a:spcBef>
-                  <a:buFont typeface="Arial" panose="020B0604020202020204" pitchFamily="34" charset="0"/>
-                  <a:buChar char="•"/>
-                  <a:defRPr sz="1800" kern="1200">
-                    <a:solidFill>
-                      <a:schemeClr val="tx1"/>
-                    </a:solidFill>
-                    <a:latin typeface="+mn-lt"/>
-                    <a:ea typeface="+mn-ea"/>
-                    <a:cs typeface="+mn-cs"/>
-                  </a:defRPr>
-                </a:lvl5pPr>
-                <a:lvl6pPr marL="2514600" indent="-228600" algn="l" defTabSz="914400" rtl="0" eaLnBrk="1" latinLnBrk="0" hangingPunct="1">
-                  <a:lnSpc>
-                    <a:spcPct val="90000"/>
-                  </a:lnSpc>
-                  <a:spcBef>
-                    <a:spcPts val="500"/>
-                  </a:spcBef>
-                  <a:buFont typeface="Arial" panose="020B0604020202020204" pitchFamily="34" charset="0"/>
-                  <a:buChar char="•"/>
-                  <a:defRPr sz="1800" kern="1200">
-                    <a:solidFill>
-                      <a:schemeClr val="tx1"/>
-                    </a:solidFill>
-                    <a:latin typeface="+mn-lt"/>
-                    <a:ea typeface="+mn-ea"/>
-                    <a:cs typeface="+mn-cs"/>
-                  </a:defRPr>
-                </a:lvl6pPr>
-                <a:lvl7pPr marL="2971800" indent="-228600" algn="l" defTabSz="914400" rtl="0" eaLnBrk="1" latinLnBrk="0" hangingPunct="1">
-                  <a:lnSpc>
-                    <a:spcPct val="90000"/>
-                  </a:lnSpc>
-                  <a:spcBef>
-                    <a:spcPts val="500"/>
-                  </a:spcBef>
-                  <a:buFont typeface="Arial" panose="020B0604020202020204" pitchFamily="34" charset="0"/>
-                  <a:buChar char="•"/>
-                  <a:defRPr sz="1800" kern="1200">
-                    <a:solidFill>
-                      <a:schemeClr val="tx1"/>
-                    </a:solidFill>
-                    <a:latin typeface="+mn-lt"/>
-                    <a:ea typeface="+mn-ea"/>
-                    <a:cs typeface="+mn-cs"/>
-                  </a:defRPr>
-                </a:lvl7pPr>
-                <a:lvl8pPr marL="3429000" indent="-228600" algn="l" defTabSz="914400" rtl="0" eaLnBrk="1" latinLnBrk="0" hangingPunct="1">
-                  <a:lnSpc>
-                    <a:spcPct val="90000"/>
-                  </a:lnSpc>
-                  <a:spcBef>
-                    <a:spcPts val="500"/>
-                  </a:spcBef>
-                  <a:buFont typeface="Arial" panose="020B0604020202020204" pitchFamily="34" charset="0"/>
-                  <a:buChar char="•"/>
-                  <a:defRPr sz="1800" kern="1200">
-                    <a:solidFill>
-                      <a:schemeClr val="tx1"/>
-                    </a:solidFill>
-                    <a:latin typeface="+mn-lt"/>
-                    <a:ea typeface="+mn-ea"/>
-                    <a:cs typeface="+mn-cs"/>
-                  </a:defRPr>
-                </a:lvl8pPr>
-                <a:lvl9pPr marL="3886200" indent="-228600" algn="l" defTabSz="914400" rtl="0" eaLnBrk="1" latinLnBrk="0" hangingPunct="1">
-                  <a:lnSpc>
-                    <a:spcPct val="90000"/>
-                  </a:lnSpc>
-                  <a:spcBef>
-                    <a:spcPts val="500"/>
-                  </a:spcBef>
-                  <a:buFont typeface="Arial" panose="020B0604020202020204" pitchFamily="34" charset="0"/>
-                  <a:buChar char="•"/>
-                  <a:defRPr sz="1800" kern="1200">
-                    <a:solidFill>
-                      <a:schemeClr val="tx1"/>
-                    </a:solidFill>
-                    <a:latin typeface="+mn-lt"/>
-                    <a:ea typeface="+mn-ea"/>
-                    <a:cs typeface="+mn-cs"/>
-                  </a:defRPr>
-                </a:lvl9pPr>
-              </a:lstStyle>
-              <a:p>
-                <a:pPr marL="0" marR="0" lvl="0" indent="-228600" algn="l" defTabSz="914400" rtl="0" eaLnBrk="1" fontAlgn="auto" latinLnBrk="0" hangingPunct="1">
-                  <a:lnSpc>
-                    <a:spcPct val="90000"/>
-                  </a:lnSpc>
-                  <a:spcBef>
-                    <a:spcPts val="1000"/>
-                  </a:spcBef>
-                  <a:spcAft>
-                    <a:spcPts val="0"/>
-                  </a:spcAft>
-                  <a:buClrTx/>
-                  <a:buSzTx/>
-                  <a:buFont typeface="Arial" panose="020B0604020202020204" pitchFamily="34" charset="0"/>
-                  <a:buChar char="•"/>
-                  <a:tabLst/>
-                  <a:defRPr/>
-                </a:pPr>
-                <a:endParaRPr kumimoji="0" lang="en-US" sz="2000" b="0" i="0" u="none" strike="noStrike" kern="1200" cap="none" spc="0" normalizeH="0" baseline="0" noProof="0" dirty="0">
-                  <a:ln>
-                    <a:noFill/>
-                  </a:ln>
-                  <a:solidFill>
-                    <a:prstClr val="black"/>
-                  </a:solidFill>
-                  <a:effectLst/>
-                  <a:uLnTx/>
-                  <a:uFillTx/>
-                  <a:latin typeface="Calibri" panose="020F0502020204030204"/>
-                  <a:ea typeface="+mn-ea"/>
-                  <a:cs typeface="+mn-cs"/>
-                </a:endParaRPr>
-              </a:p>
-              <a:p>
-                <a:pPr marL="0" marR="0" lvl="0" indent="-228600" algn="l" defTabSz="914400" rtl="0" eaLnBrk="1" fontAlgn="auto" latinLnBrk="0" hangingPunct="1">
-                  <a:lnSpc>
-                    <a:spcPct val="90000"/>
-                  </a:lnSpc>
-                  <a:spcBef>
-                    <a:spcPts val="1000"/>
-                  </a:spcBef>
-                  <a:spcAft>
-                    <a:spcPts val="0"/>
-                  </a:spcAft>
-                  <a:buClrTx/>
-                  <a:buSzTx/>
-                  <a:buFont typeface="Arial" panose="020B0604020202020204" pitchFamily="34" charset="0"/>
-                  <a:buChar char="•"/>
-                  <a:tabLst/>
-                  <a:defRPr/>
-                </a:pPr>
-                <a:r>
-                  <a:rPr kumimoji="0" lang="en-US" sz="2400" b="0" i="0" u="none" strike="noStrike" kern="1200" cap="none" spc="0" normalizeH="0" baseline="0" noProof="0" dirty="0">
-                    <a:ln>
-                      <a:noFill/>
-                    </a:ln>
-                    <a:solidFill>
-                      <a:prstClr val="black"/>
-                    </a:solidFill>
-                    <a:effectLst/>
-                    <a:uLnTx/>
-                    <a:uFillTx/>
-                    <a:latin typeface="Calibri" panose="020F0502020204030204"/>
-                    <a:ea typeface="+mn-ea"/>
-                    <a:cs typeface="+mn-cs"/>
-                  </a:rPr>
-                  <a:t>Consider the following data which come from 20 rolls of a six-sided die</a:t>
-                </a:r>
-                <a:endParaRPr kumimoji="0" lang="en-US" sz="2000" b="0" i="0" u="none" strike="noStrike" kern="1200" cap="none" spc="0" normalizeH="0" baseline="0" noProof="0" dirty="0">
-                  <a:ln>
-                    <a:noFill/>
-                  </a:ln>
-                  <a:solidFill>
-                    <a:prstClr val="black"/>
-                  </a:solidFill>
-                  <a:effectLst/>
-                  <a:uLnTx/>
-                  <a:uFillTx/>
-                  <a:latin typeface="Calibri" panose="020F0502020204030204"/>
-                  <a:ea typeface="+mn-ea"/>
-                  <a:cs typeface="+mn-cs"/>
-                </a:endParaRPr>
-              </a:p>
-              <a:p>
-                <a:pPr marL="0" marR="0" lvl="0" indent="0" algn="l" defTabSz="914400" rtl="0" eaLnBrk="1" fontAlgn="auto" latinLnBrk="0" hangingPunct="1">
-                  <a:lnSpc>
-                    <a:spcPct val="90000"/>
-                  </a:lnSpc>
-                  <a:spcBef>
-                    <a:spcPts val="1000"/>
-                  </a:spcBef>
-                  <a:spcAft>
-                    <a:spcPts val="0"/>
-                  </a:spcAft>
-                  <a:buClrTx/>
-                  <a:buSzTx/>
-                  <a:buNone/>
-                  <a:tabLst/>
-                  <a:defRPr/>
-                </a:pPr>
-                <a:endParaRPr kumimoji="0" lang="en-US" sz="2000" b="0" i="0" u="none" strike="noStrike" kern="1200" cap="none" spc="0" normalizeH="0" baseline="0" noProof="0" dirty="0">
-                  <a:ln>
-                    <a:noFill/>
-                  </a:ln>
-                  <a:solidFill>
-                    <a:prstClr val="black"/>
-                  </a:solidFill>
-                  <a:effectLst/>
-                  <a:uLnTx/>
-                  <a:uFillTx/>
-                  <a:latin typeface="Calibri" panose="020F0502020204030204"/>
-                  <a:ea typeface="+mn-ea"/>
-                  <a:cs typeface="+mn-cs"/>
-                </a:endParaRPr>
-              </a:p>
-              <a:p>
-                <a:pPr marL="0" marR="0" lvl="0" indent="0" algn="l" defTabSz="914400" rtl="0" eaLnBrk="1" fontAlgn="auto" latinLnBrk="0" hangingPunct="1">
-                  <a:lnSpc>
-                    <a:spcPct val="90000"/>
-                  </a:lnSpc>
-                  <a:spcBef>
-                    <a:spcPts val="1000"/>
-                  </a:spcBef>
-                  <a:spcAft>
-                    <a:spcPts val="0"/>
-                  </a:spcAft>
-                  <a:buClrTx/>
-                  <a:buSzTx/>
-                  <a:buNone/>
-                  <a:tabLst/>
-                  <a:defRPr/>
-                </a:pPr>
-                <a:r>
-                  <a:rPr kumimoji="0" lang="en-US" sz="2000" b="0" i="0" u="none" strike="noStrike" kern="1200" cap="none" spc="0" normalizeH="0" baseline="0" noProof="0" dirty="0">
-                    <a:ln>
-                      <a:noFill/>
-                    </a:ln>
-                    <a:solidFill>
-                      <a:prstClr val="black"/>
-                    </a:solidFill>
-                    <a:effectLst/>
-                    <a:uLnTx/>
-                    <a:uFillTx/>
-                    <a:latin typeface="Calibri" panose="020F0502020204030204"/>
-                    <a:ea typeface="+mn-ea"/>
-                    <a:cs typeface="+mn-cs"/>
-                  </a:rPr>
-                  <a:t>                                   </a:t>
-                </a:r>
-                <a:r>
-                  <a:rPr kumimoji="0" lang="en-US" sz="2000" b="0" i="0" u="none" strike="noStrike" kern="1200" cap="none" spc="0" normalizeH="0" baseline="0" noProof="0" dirty="0">
-                    <a:ln>
-                      <a:noFill/>
-                    </a:ln>
-                    <a:solidFill>
-                      <a:srgbClr val="0070C0"/>
-                    </a:solidFill>
-                    <a:effectLst/>
-                    <a:uLnTx/>
-                    <a:uFillTx/>
-                    <a:latin typeface="Calibri" panose="020F0502020204030204"/>
-                    <a:ea typeface="+mn-ea"/>
-                    <a:cs typeface="+mn-cs"/>
-                  </a:rPr>
-                  <a:t>lower half </a:t>
-                </a:r>
-                <a:r>
-                  <a:rPr kumimoji="0" lang="en-US" sz="2000" b="0" i="0" u="none" strike="noStrike" kern="1200" cap="none" spc="0" normalizeH="0" baseline="0" noProof="0" dirty="0">
-                    <a:ln>
-                      <a:noFill/>
-                    </a:ln>
-                    <a:solidFill>
-                      <a:prstClr val="black"/>
-                    </a:solidFill>
-                    <a:effectLst/>
-                    <a:uLnTx/>
-                    <a:uFillTx/>
-                    <a:latin typeface="Calibri" panose="020F0502020204030204"/>
-                    <a:ea typeface="+mn-ea"/>
-                    <a:cs typeface="+mn-cs"/>
-                  </a:rPr>
-                  <a:t>                   </a:t>
-                </a:r>
-                <a:r>
-                  <a:rPr kumimoji="0" lang="en-US" sz="2000" b="0" i="0" u="none" strike="noStrike" kern="1200" cap="none" spc="0" normalizeH="0" baseline="0" noProof="0" dirty="0">
-                    <a:ln>
-                      <a:noFill/>
-                    </a:ln>
-                    <a:solidFill>
-                      <a:srgbClr val="00B050"/>
-                    </a:solidFill>
-                    <a:effectLst/>
-                    <a:uLnTx/>
-                    <a:uFillTx/>
-                    <a:latin typeface="Calibri" panose="020F0502020204030204"/>
-                    <a:ea typeface="+mn-ea"/>
-                    <a:cs typeface="+mn-cs"/>
-                  </a:rPr>
-                  <a:t>middle</a:t>
-                </a:r>
-                <a:r>
-                  <a:rPr kumimoji="0" lang="en-US" sz="2000" b="0" i="0" u="none" strike="noStrike" kern="1200" cap="none" spc="0" normalizeH="0" baseline="0" noProof="0" dirty="0">
-                    <a:ln>
-                      <a:noFill/>
-                    </a:ln>
-                    <a:solidFill>
-                      <a:prstClr val="black"/>
-                    </a:solidFill>
-                    <a:effectLst/>
-                    <a:uLnTx/>
-                    <a:uFillTx/>
-                    <a:latin typeface="Calibri" panose="020F0502020204030204"/>
-                    <a:ea typeface="+mn-ea"/>
-                    <a:cs typeface="+mn-cs"/>
-                  </a:rPr>
-                  <a:t>                  </a:t>
-                </a:r>
-                <a:r>
-                  <a:rPr kumimoji="0" lang="en-US" sz="2000" b="0" i="0" u="none" strike="noStrike" kern="1200" cap="none" spc="0" normalizeH="0" baseline="0" noProof="0" dirty="0">
-                    <a:ln>
-                      <a:noFill/>
-                    </a:ln>
-                    <a:solidFill>
-                      <a:srgbClr val="FF0000"/>
-                    </a:solidFill>
-                    <a:effectLst/>
-                    <a:uLnTx/>
-                    <a:uFillTx/>
-                    <a:latin typeface="Calibri" panose="020F0502020204030204"/>
-                    <a:ea typeface="+mn-ea"/>
-                    <a:cs typeface="+mn-cs"/>
-                  </a:rPr>
-                  <a:t>upper half</a:t>
-                </a:r>
-              </a:p>
-              <a:p>
-                <a:pPr marL="0" marR="0" lvl="0" indent="-228600" algn="l" defTabSz="914400" rtl="0" eaLnBrk="1" fontAlgn="auto" latinLnBrk="0" hangingPunct="1">
-                  <a:lnSpc>
-                    <a:spcPct val="90000"/>
-                  </a:lnSpc>
-                  <a:spcBef>
-                    <a:spcPts val="1000"/>
-                  </a:spcBef>
-                  <a:spcAft>
-                    <a:spcPts val="0"/>
-                  </a:spcAft>
-                  <a:buClrTx/>
-                  <a:buSzTx/>
-                  <a:buFont typeface="Arial" panose="020B0604020202020204" pitchFamily="34" charset="0"/>
-                  <a:buChar char="•"/>
-                  <a:tabLst/>
-                  <a:defRPr/>
-                </a:pPr>
-                <a:r>
-                  <a:rPr kumimoji="0" lang="en-US" sz="2400" b="0" i="0" u="none" strike="noStrike" kern="1200" cap="none" spc="0" normalizeH="0" baseline="0" noProof="0" dirty="0">
-                    <a:ln>
-                      <a:noFill/>
-                    </a:ln>
-                    <a:solidFill>
-                      <a:prstClr val="black"/>
-                    </a:solidFill>
-                    <a:effectLst/>
-                    <a:uLnTx/>
-                    <a:uFillTx/>
-                    <a:latin typeface="Calibri" panose="020F0502020204030204"/>
-                    <a:ea typeface="+mn-ea"/>
-                    <a:cs typeface="+mn-cs"/>
-                  </a:rPr>
-                  <a:t>Data = </a:t>
-                </a:r>
-                <a:r>
-                  <a:rPr kumimoji="0" lang="en-US" b="0" i="0" u="none" strike="noStrike" kern="1200" cap="none" spc="0" normalizeH="0" baseline="0" noProof="0" dirty="0">
-                    <a:ln>
-                      <a:noFill/>
-                    </a:ln>
-                    <a:solidFill>
-                      <a:prstClr val="black"/>
-                    </a:solidFill>
-                    <a:effectLst/>
-                    <a:uLnTx/>
-                    <a:uFillTx/>
-                    <a:latin typeface="Calibri" panose="020F0502020204030204"/>
-                    <a:ea typeface="+mn-ea"/>
-                    <a:cs typeface="+mn-cs"/>
-                  </a:rPr>
-                  <a:t>1, 1, 1, 2, </a:t>
-                </a:r>
-                <a:r>
-                  <a:rPr kumimoji="0" lang="en-US" b="1" i="0" u="none" strike="noStrike" kern="1200" cap="none" spc="0" normalizeH="0" baseline="0" noProof="0" dirty="0">
-                    <a:ln>
-                      <a:noFill/>
-                    </a:ln>
-                    <a:solidFill>
-                      <a:srgbClr val="C00000"/>
-                    </a:solidFill>
-                    <a:effectLst/>
-                    <a:uLnTx/>
-                    <a:uFillTx/>
-                    <a:latin typeface="Calibri" panose="020F0502020204030204"/>
-                    <a:ea typeface="+mn-ea"/>
-                    <a:cs typeface="+mn-cs"/>
-                  </a:rPr>
-                  <a:t>2, 2</a:t>
-                </a:r>
-                <a:r>
-                  <a:rPr kumimoji="0" lang="en-US" b="0" i="0" u="none" strike="noStrike" kern="1200" cap="none" spc="0" normalizeH="0" baseline="0" noProof="0" dirty="0">
-                    <a:ln>
-                      <a:noFill/>
-                    </a:ln>
-                    <a:solidFill>
-                      <a:prstClr val="black"/>
-                    </a:solidFill>
-                    <a:effectLst/>
-                    <a:uLnTx/>
-                    <a:uFillTx/>
-                    <a:latin typeface="Calibri" panose="020F0502020204030204"/>
-                    <a:ea typeface="+mn-ea"/>
-                    <a:cs typeface="+mn-cs"/>
-                  </a:rPr>
-                  <a:t>, 2, 2, 2, </a:t>
-                </a:r>
-                <a:r>
-                  <a:rPr kumimoji="0" lang="en-US" b="1" i="0" u="none" strike="noStrike" kern="1200" cap="none" spc="0" normalizeH="0" baseline="0" noProof="0" dirty="0">
-                    <a:ln>
-                      <a:noFill/>
-                    </a:ln>
-                    <a:solidFill>
-                      <a:srgbClr val="C00000"/>
-                    </a:solidFill>
-                    <a:effectLst/>
-                    <a:uLnTx/>
-                    <a:uFillTx/>
-                    <a:latin typeface="Calibri" panose="020F0502020204030204"/>
-                    <a:ea typeface="+mn-ea"/>
-                    <a:cs typeface="+mn-cs"/>
-                  </a:rPr>
-                  <a:t>2, 3</a:t>
-                </a:r>
-                <a:r>
-                  <a:rPr kumimoji="0" lang="en-US" b="0" i="0" u="none" strike="noStrike" kern="1200" cap="none" spc="0" normalizeH="0" baseline="0" noProof="0" dirty="0">
-                    <a:ln>
-                      <a:noFill/>
-                    </a:ln>
-                    <a:solidFill>
-                      <a:prstClr val="black"/>
-                    </a:solidFill>
-                    <a:effectLst/>
-                    <a:uLnTx/>
-                    <a:uFillTx/>
-                    <a:latin typeface="Calibri" panose="020F0502020204030204"/>
-                    <a:ea typeface="+mn-ea"/>
-                    <a:cs typeface="+mn-cs"/>
-                  </a:rPr>
-                  <a:t>, 3, 3, 3, </a:t>
-                </a:r>
-                <a:r>
-                  <a:rPr kumimoji="0" lang="en-US" b="1" i="0" u="none" strike="noStrike" kern="1200" cap="none" spc="0" normalizeH="0" baseline="0" noProof="0" dirty="0">
-                    <a:ln>
-                      <a:noFill/>
-                    </a:ln>
-                    <a:solidFill>
-                      <a:srgbClr val="C00000"/>
-                    </a:solidFill>
-                    <a:effectLst/>
-                    <a:uLnTx/>
-                    <a:uFillTx/>
-                    <a:latin typeface="Calibri" panose="020F0502020204030204"/>
-                    <a:ea typeface="+mn-ea"/>
-                    <a:cs typeface="+mn-cs"/>
-                  </a:rPr>
-                  <a:t>4, 5</a:t>
-                </a:r>
-                <a:r>
-                  <a:rPr kumimoji="0" lang="en-US" b="0" i="0" u="none" strike="noStrike" kern="1200" cap="none" spc="0" normalizeH="0" baseline="0" noProof="0" dirty="0">
-                    <a:ln>
-                      <a:noFill/>
-                    </a:ln>
-                    <a:solidFill>
-                      <a:srgbClr val="FF0000"/>
-                    </a:solidFill>
-                    <a:effectLst/>
-                    <a:uLnTx/>
-                    <a:uFillTx/>
-                    <a:latin typeface="Calibri" panose="020F0502020204030204"/>
-                    <a:ea typeface="+mn-ea"/>
-                    <a:cs typeface="+mn-cs"/>
-                  </a:rPr>
-                  <a:t>,</a:t>
-                </a:r>
-                <a:r>
-                  <a:rPr kumimoji="0" lang="en-US" b="0" i="0" u="none" strike="noStrike" kern="1200" cap="none" spc="0" normalizeH="0" baseline="0" noProof="0" dirty="0">
-                    <a:ln>
-                      <a:noFill/>
-                    </a:ln>
-                    <a:solidFill>
-                      <a:prstClr val="black"/>
-                    </a:solidFill>
-                    <a:effectLst/>
-                    <a:uLnTx/>
-                    <a:uFillTx/>
-                    <a:latin typeface="Calibri" panose="020F0502020204030204"/>
-                    <a:ea typeface="+mn-ea"/>
-                    <a:cs typeface="+mn-cs"/>
-                  </a:rPr>
-                  <a:t> 5, 6, 6, 6</a:t>
-                </a:r>
-              </a:p>
-              <a:p>
-                <a:pPr marL="0" marR="0" lvl="0" indent="-228600" algn="l" defTabSz="914400" rtl="0" eaLnBrk="1" fontAlgn="auto" latinLnBrk="0" hangingPunct="1">
-                  <a:lnSpc>
-                    <a:spcPct val="90000"/>
-                  </a:lnSpc>
-                  <a:spcBef>
-                    <a:spcPts val="1000"/>
-                  </a:spcBef>
-                  <a:spcAft>
-                    <a:spcPts val="0"/>
-                  </a:spcAft>
-                  <a:buClrTx/>
-                  <a:buSzTx/>
-                  <a:buFont typeface="Arial" panose="020B0604020202020204" pitchFamily="34" charset="0"/>
-                  <a:buChar char="•"/>
-                  <a:tabLst/>
-                  <a:defRPr/>
-                </a:pPr>
-                <a:endParaRPr lang="en-US" dirty="0">
-                  <a:solidFill>
-                    <a:prstClr val="black"/>
-                  </a:solidFill>
-                  <a:latin typeface="Calibri" panose="020F0502020204030204"/>
-                </a:endParaRPr>
-              </a:p>
-              <a:p>
-                <a:pPr marL="0" marR="0" lvl="0" indent="0" defTabSz="914400" rtl="0" eaLnBrk="1" fontAlgn="auto" latinLnBrk="0" hangingPunct="1">
-                  <a:lnSpc>
-                    <a:spcPct val="90000"/>
-                  </a:lnSpc>
-                  <a:spcBef>
-                    <a:spcPts val="1000"/>
-                  </a:spcBef>
-                  <a:spcAft>
-                    <a:spcPts val="0"/>
-                  </a:spcAft>
-                  <a:buClrTx/>
-                  <a:buSzTx/>
-                  <a:buNone/>
-                  <a:tabLst/>
-                  <a:defRPr/>
-                </a:pPr>
-                <a:r>
-                  <a:rPr lang="en-US" sz="2400" dirty="0">
-                    <a:solidFill>
-                      <a:srgbClr val="00B050"/>
-                    </a:solidFill>
-                    <a:latin typeface="Calibri" panose="020F0502020204030204"/>
-                  </a:rPr>
-                  <a:t>Q2 = median </a:t>
-                </a:r>
-                <a14:m>
-                  <m:oMath xmlns:m="http://schemas.openxmlformats.org/officeDocument/2006/math">
-                    <m:r>
-                      <a:rPr lang="en-US" sz="2400" b="0" i="1" smtClean="0">
-                        <a:solidFill>
-                          <a:srgbClr val="00B050"/>
-                        </a:solidFill>
-                        <a:latin typeface="Cambria Math" panose="02040503050406030204" pitchFamily="18" charset="0"/>
-                      </a:rPr>
-                      <m:t>=</m:t>
-                    </m:r>
-                    <m:f>
-                      <m:fPr>
-                        <m:ctrlPr>
-                          <a:rPr lang="en-US" sz="2400" b="0" i="1" smtClean="0">
-                            <a:solidFill>
-                              <a:srgbClr val="00B050"/>
-                            </a:solidFill>
-                            <a:latin typeface="Cambria Math" panose="02040503050406030204" pitchFamily="18" charset="0"/>
-                          </a:rPr>
-                        </m:ctrlPr>
-                      </m:fPr>
-                      <m:num>
-                        <m:r>
-                          <a:rPr lang="en-US" sz="2400" b="0" i="1" smtClean="0">
-                            <a:solidFill>
-                              <a:srgbClr val="00B050"/>
-                            </a:solidFill>
-                            <a:latin typeface="Cambria Math" panose="02040503050406030204" pitchFamily="18" charset="0"/>
-                          </a:rPr>
-                          <m:t>2+3</m:t>
-                        </m:r>
-                      </m:num>
-                      <m:den>
-                        <m:r>
-                          <a:rPr lang="en-US" sz="2400" b="0" i="1" smtClean="0">
-                            <a:solidFill>
-                              <a:srgbClr val="00B050"/>
-                            </a:solidFill>
-                            <a:latin typeface="Cambria Math" panose="02040503050406030204" pitchFamily="18" charset="0"/>
-                          </a:rPr>
-                          <m:t>2</m:t>
-                        </m:r>
-                      </m:den>
-                    </m:f>
-                    <m:r>
-                      <a:rPr lang="en-US" sz="2400" b="0" i="1" smtClean="0">
-                        <a:solidFill>
-                          <a:srgbClr val="00B050"/>
-                        </a:solidFill>
-                        <a:latin typeface="Cambria Math" panose="02040503050406030204" pitchFamily="18" charset="0"/>
-                      </a:rPr>
-                      <m:t>=2.5</m:t>
-                    </m:r>
-                  </m:oMath>
-                </a14:m>
-                <a:endParaRPr kumimoji="0" lang="en-US" sz="2400" b="0" i="0" u="none" strike="noStrike" kern="1200" cap="none" spc="0" normalizeH="0" baseline="0" noProof="0" dirty="0">
-                  <a:ln>
-                    <a:noFill/>
-                  </a:ln>
-                  <a:solidFill>
-                    <a:srgbClr val="00B050"/>
-                  </a:solidFill>
-                  <a:effectLst/>
-                  <a:uLnTx/>
-                  <a:uFillTx/>
-                  <a:latin typeface="Calibri" panose="020F0502020204030204"/>
-                </a:endParaRPr>
-              </a:p>
-              <a:p>
-                <a:pPr marL="0" marR="0" lvl="0" indent="0" defTabSz="914400" rtl="0" eaLnBrk="1" fontAlgn="auto" latinLnBrk="0" hangingPunct="1">
-                  <a:lnSpc>
-                    <a:spcPct val="90000"/>
-                  </a:lnSpc>
-                  <a:spcBef>
-                    <a:spcPts val="1000"/>
-                  </a:spcBef>
-                  <a:spcAft>
-                    <a:spcPts val="0"/>
-                  </a:spcAft>
-                  <a:buClrTx/>
-                  <a:buSzTx/>
-                  <a:buNone/>
-                  <a:tabLst/>
-                  <a:defRPr/>
-                </a:pPr>
-                <a:r>
-                  <a:rPr kumimoji="0" lang="en-US" sz="2400" b="0" i="0" u="none" strike="noStrike" kern="1200" cap="none" spc="0" normalizeH="0" baseline="0" noProof="0" dirty="0">
-                    <a:ln>
-                      <a:noFill/>
-                    </a:ln>
-                    <a:solidFill>
-                      <a:srgbClr val="0070C0"/>
-                    </a:solidFill>
-                    <a:effectLst/>
-                    <a:uLnTx/>
-                    <a:uFillTx/>
-                    <a:latin typeface="Calibri" panose="020F0502020204030204"/>
-                  </a:rPr>
-                  <a:t>Q1 = median lower half </a:t>
-                </a:r>
-                <a14:m>
-                  <m:oMath xmlns:m="http://schemas.openxmlformats.org/officeDocument/2006/math">
-                    <m:r>
-                      <a:rPr kumimoji="0" lang="en-US" sz="2400" b="0" i="1" u="none" strike="noStrike" kern="1200" cap="none" spc="0" normalizeH="0" baseline="0" noProof="0" smtClean="0">
-                        <a:ln>
-                          <a:noFill/>
-                        </a:ln>
-                        <a:solidFill>
-                          <a:srgbClr val="0070C0"/>
-                        </a:solidFill>
-                        <a:effectLst/>
-                        <a:uLnTx/>
-                        <a:uFillTx/>
-                        <a:latin typeface="Cambria Math" panose="02040503050406030204" pitchFamily="18" charset="0"/>
-                      </a:rPr>
-                      <m:t>=</m:t>
-                    </m:r>
-                    <m:f>
-                      <m:fPr>
-                        <m:ctrlPr>
-                          <a:rPr kumimoji="0" lang="en-US" sz="2400" b="0" i="1" u="none" strike="noStrike" kern="1200" cap="none" spc="0" normalizeH="0" baseline="0" noProof="0" smtClean="0">
-                            <a:ln>
-                              <a:noFill/>
-                            </a:ln>
-                            <a:solidFill>
-                              <a:srgbClr val="0070C0"/>
-                            </a:solidFill>
-                            <a:effectLst/>
-                            <a:uLnTx/>
-                            <a:uFillTx/>
-                            <a:latin typeface="Cambria Math" panose="02040503050406030204" pitchFamily="18" charset="0"/>
-                          </a:rPr>
-                        </m:ctrlPr>
-                      </m:fPr>
-                      <m:num>
-                        <m:r>
-                          <a:rPr kumimoji="0" lang="en-US" sz="2400" b="0" i="1" u="none" strike="noStrike" kern="1200" cap="none" spc="0" normalizeH="0" baseline="0" noProof="0" smtClean="0">
-                            <a:ln>
-                              <a:noFill/>
-                            </a:ln>
-                            <a:solidFill>
-                              <a:srgbClr val="0070C0"/>
-                            </a:solidFill>
-                            <a:effectLst/>
-                            <a:uLnTx/>
-                            <a:uFillTx/>
-                            <a:latin typeface="Cambria Math" panose="02040503050406030204" pitchFamily="18" charset="0"/>
-                          </a:rPr>
-                          <m:t>2+2</m:t>
-                        </m:r>
-                      </m:num>
-                      <m:den>
-                        <m:r>
-                          <a:rPr kumimoji="0" lang="en-US" sz="2400" b="0" i="1" u="none" strike="noStrike" kern="1200" cap="none" spc="0" normalizeH="0" baseline="0" noProof="0" smtClean="0">
-                            <a:ln>
-                              <a:noFill/>
-                            </a:ln>
-                            <a:solidFill>
-                              <a:srgbClr val="0070C0"/>
-                            </a:solidFill>
-                            <a:effectLst/>
-                            <a:uLnTx/>
-                            <a:uFillTx/>
-                            <a:latin typeface="Cambria Math" panose="02040503050406030204" pitchFamily="18" charset="0"/>
-                          </a:rPr>
-                          <m:t>2</m:t>
-                        </m:r>
-                      </m:den>
-                    </m:f>
-                    <m:r>
-                      <a:rPr kumimoji="0" lang="en-US" sz="2400" b="0" i="1" u="none" strike="noStrike" kern="1200" cap="none" spc="0" normalizeH="0" baseline="0" noProof="0" smtClean="0">
-                        <a:ln>
-                          <a:noFill/>
-                        </a:ln>
-                        <a:solidFill>
-                          <a:srgbClr val="0070C0"/>
-                        </a:solidFill>
-                        <a:effectLst/>
-                        <a:uLnTx/>
-                        <a:uFillTx/>
-                        <a:latin typeface="Cambria Math" panose="02040503050406030204" pitchFamily="18" charset="0"/>
-                      </a:rPr>
-                      <m:t>=2</m:t>
-                    </m:r>
-                  </m:oMath>
-                </a14:m>
-                <a:endParaRPr kumimoji="0" lang="en-US" sz="2400" b="0" i="0" u="none" strike="noStrike" kern="1200" cap="none" spc="0" normalizeH="0" baseline="0" noProof="0" dirty="0">
-                  <a:ln>
-                    <a:noFill/>
-                  </a:ln>
-                  <a:solidFill>
-                    <a:srgbClr val="0070C0"/>
-                  </a:solidFill>
-                  <a:effectLst/>
-                  <a:uLnTx/>
-                  <a:uFillTx/>
-                  <a:latin typeface="Calibri" panose="020F0502020204030204"/>
-                </a:endParaRPr>
-              </a:p>
-              <a:p>
-                <a:pPr marL="0" marR="0" lvl="0" indent="0" defTabSz="914400" rtl="0" eaLnBrk="1" fontAlgn="auto" latinLnBrk="0" hangingPunct="1">
-                  <a:lnSpc>
-                    <a:spcPct val="90000"/>
-                  </a:lnSpc>
-                  <a:spcBef>
-                    <a:spcPts val="1000"/>
-                  </a:spcBef>
-                  <a:spcAft>
-                    <a:spcPts val="0"/>
-                  </a:spcAft>
-                  <a:buClrTx/>
-                  <a:buSzTx/>
-                  <a:buNone/>
-                  <a:tabLst/>
-                  <a:defRPr/>
-                </a:pPr>
-                <a:r>
-                  <a:rPr kumimoji="0" lang="en-US" sz="2400" b="0" i="0" u="none" strike="noStrike" kern="1200" cap="none" spc="0" normalizeH="0" baseline="0" noProof="0" dirty="0">
-                    <a:ln>
-                      <a:noFill/>
-                    </a:ln>
-                    <a:solidFill>
-                      <a:srgbClr val="FF0000"/>
-                    </a:solidFill>
-                    <a:effectLst/>
-                    <a:uLnTx/>
-                    <a:uFillTx/>
-                    <a:latin typeface="Calibri" panose="020F0502020204030204"/>
-                    <a:ea typeface="+mn-ea"/>
-                    <a:cs typeface="+mn-cs"/>
-                  </a:rPr>
-                  <a:t>Q3 = median upper half </a:t>
-                </a:r>
-                <a14:m>
-                  <m:oMath xmlns:m="http://schemas.openxmlformats.org/officeDocument/2006/math">
-                    <m:r>
-                      <a:rPr kumimoji="0" lang="en-US" sz="2400" b="0" i="1" u="none" strike="noStrike" kern="1200" cap="none" spc="0" normalizeH="0" baseline="0" noProof="0" smtClean="0">
-                        <a:ln>
-                          <a:noFill/>
-                        </a:ln>
-                        <a:solidFill>
-                          <a:srgbClr val="FF0000"/>
-                        </a:solidFill>
-                        <a:effectLst/>
-                        <a:uLnTx/>
-                        <a:uFillTx/>
-                        <a:latin typeface="Cambria Math" panose="02040503050406030204" pitchFamily="18" charset="0"/>
-                        <a:ea typeface="+mn-ea"/>
-                        <a:cs typeface="+mn-cs"/>
-                      </a:rPr>
-                      <m:t>=</m:t>
-                    </m:r>
-                    <m:f>
-                      <m:fPr>
-                        <m:ctrlPr>
-                          <a:rPr kumimoji="0" lang="en-US" sz="2400" b="0" i="1" u="none" strike="noStrike" kern="1200" cap="none" spc="0" normalizeH="0" baseline="0" noProof="0" smtClean="0">
-                            <a:ln>
-                              <a:noFill/>
-                            </a:ln>
-                            <a:solidFill>
-                              <a:srgbClr val="FF0000"/>
-                            </a:solidFill>
-                            <a:effectLst/>
-                            <a:uLnTx/>
-                            <a:uFillTx/>
-                            <a:latin typeface="Cambria Math" panose="02040503050406030204" pitchFamily="18" charset="0"/>
-                            <a:ea typeface="+mn-ea"/>
-                            <a:cs typeface="+mn-cs"/>
-                          </a:rPr>
-                        </m:ctrlPr>
-                      </m:fPr>
-                      <m:num>
-                        <m:r>
-                          <a:rPr kumimoji="0" lang="en-US" sz="2400" b="0" i="1" u="none" strike="noStrike" kern="1200" cap="none" spc="0" normalizeH="0" baseline="0" noProof="0" smtClean="0">
-                            <a:ln>
-                              <a:noFill/>
-                            </a:ln>
-                            <a:solidFill>
-                              <a:srgbClr val="FF0000"/>
-                            </a:solidFill>
-                            <a:effectLst/>
-                            <a:uLnTx/>
-                            <a:uFillTx/>
-                            <a:latin typeface="Cambria Math" panose="02040503050406030204" pitchFamily="18" charset="0"/>
-                            <a:ea typeface="+mn-ea"/>
-                            <a:cs typeface="+mn-cs"/>
-                          </a:rPr>
-                          <m:t>4+5</m:t>
-                        </m:r>
-                      </m:num>
-                      <m:den>
-                        <m:r>
-                          <a:rPr kumimoji="0" lang="en-US" sz="2400" b="0" i="1" u="none" strike="noStrike" kern="1200" cap="none" spc="0" normalizeH="0" baseline="0" noProof="0" smtClean="0">
-                            <a:ln>
-                              <a:noFill/>
-                            </a:ln>
-                            <a:solidFill>
-                              <a:srgbClr val="FF0000"/>
-                            </a:solidFill>
-                            <a:effectLst/>
-                            <a:uLnTx/>
-                            <a:uFillTx/>
-                            <a:latin typeface="Cambria Math" panose="02040503050406030204" pitchFamily="18" charset="0"/>
-                            <a:ea typeface="+mn-ea"/>
-                            <a:cs typeface="+mn-cs"/>
-                          </a:rPr>
-                          <m:t>2</m:t>
-                        </m:r>
-                      </m:den>
-                    </m:f>
-                    <m:r>
-                      <a:rPr kumimoji="0" lang="en-US" sz="2400" b="0" i="1" u="none" strike="noStrike" kern="1200" cap="none" spc="0" normalizeH="0" baseline="0" noProof="0" smtClean="0">
-                        <a:ln>
-                          <a:noFill/>
-                        </a:ln>
-                        <a:solidFill>
-                          <a:srgbClr val="FF0000"/>
-                        </a:solidFill>
-                        <a:effectLst/>
-                        <a:uLnTx/>
-                        <a:uFillTx/>
-                        <a:latin typeface="Cambria Math" panose="02040503050406030204" pitchFamily="18" charset="0"/>
-                        <a:ea typeface="+mn-ea"/>
-                        <a:cs typeface="+mn-cs"/>
-                      </a:rPr>
-                      <m:t>=4.5</m:t>
-                    </m:r>
-                  </m:oMath>
-                </a14:m>
-                <a:endParaRPr kumimoji="0" lang="en-US" sz="2400" b="0" i="0" u="none" strike="noStrike" kern="1200" cap="none" spc="0" normalizeH="0" baseline="0" noProof="0" dirty="0">
-                  <a:ln>
-                    <a:noFill/>
-                  </a:ln>
-                  <a:solidFill>
-                    <a:srgbClr val="FF0000"/>
-                  </a:solidFill>
-                  <a:effectLst/>
-                  <a:uLnTx/>
-                  <a:uFillTx/>
-                  <a:latin typeface="Calibri" panose="020F0502020204030204"/>
-                  <a:ea typeface="+mn-ea"/>
-                  <a:cs typeface="+mn-cs"/>
-                </a:endParaRPr>
-              </a:p>
-              <a:p>
-                <a:pPr marL="0" marR="0" lvl="0" indent="0" algn="l" defTabSz="914400" rtl="0" eaLnBrk="1" fontAlgn="auto" latinLnBrk="0" hangingPunct="1">
-                  <a:lnSpc>
-                    <a:spcPct val="90000"/>
-                  </a:lnSpc>
-                  <a:spcBef>
-                    <a:spcPts val="1000"/>
-                  </a:spcBef>
-                  <a:spcAft>
-                    <a:spcPts val="0"/>
-                  </a:spcAft>
-                  <a:buClrTx/>
-                  <a:buSzTx/>
-                  <a:buNone/>
-                  <a:tabLst/>
-                  <a:defRPr/>
-                </a:pPr>
-                <a:endParaRPr kumimoji="0" lang="en-US" sz="2000" b="0" i="0" u="none" strike="noStrike" kern="1200" cap="none" spc="0" normalizeH="0" baseline="0" noProof="0" dirty="0">
-                  <a:ln>
-                    <a:noFill/>
-                  </a:ln>
-                  <a:solidFill>
-                    <a:prstClr val="black"/>
-                  </a:solidFill>
-                  <a:effectLst/>
-                  <a:uLnTx/>
-                  <a:uFillTx/>
-                  <a:latin typeface="Calibri" panose="020F0502020204030204"/>
-                  <a:ea typeface="+mn-ea"/>
-                  <a:cs typeface="+mn-cs"/>
-                </a:endParaRPr>
-              </a:p>
-              <a:p>
-                <a:pPr marL="228600" marR="0" lvl="0" indent="-228600" algn="l" defTabSz="914400" rtl="0" eaLnBrk="1" fontAlgn="auto" latinLnBrk="0" hangingPunct="1">
-                  <a:lnSpc>
-                    <a:spcPct val="90000"/>
-                  </a:lnSpc>
-                  <a:spcBef>
-                    <a:spcPts val="1000"/>
-                  </a:spcBef>
-                  <a:spcAft>
-                    <a:spcPts val="0"/>
-                  </a:spcAft>
-                  <a:buClrTx/>
-                  <a:buSzTx/>
-                  <a:buFont typeface="Arial" panose="020B0604020202020204" pitchFamily="34" charset="0"/>
-                  <a:buChar char="•"/>
-                  <a:tabLst/>
-                  <a:defRPr/>
-                </a:pPr>
-                <a:endParaRPr kumimoji="0" lang="en-US" sz="2000" b="0" i="0" u="none" strike="noStrike" kern="1200" cap="none" spc="0" normalizeH="0" baseline="0" noProof="0" dirty="0">
-                  <a:ln>
-                    <a:noFill/>
-                  </a:ln>
-                  <a:solidFill>
-                    <a:prstClr val="black"/>
-                  </a:solidFill>
-                  <a:effectLst/>
-                  <a:uLnTx/>
-                  <a:uFillTx/>
-                  <a:latin typeface="Calibri" panose="020F0502020204030204"/>
-                  <a:ea typeface="+mn-ea"/>
-                  <a:cs typeface="+mn-cs"/>
-                </a:endParaRPr>
-              </a:p>
-            </p:txBody>
-          </p:sp>
-        </mc:Choice>
-        <mc:Fallback>
-          <p:sp>
-            <p:nvSpPr>
-              <p:cNvPr id="4" name="Content Placeholder 2">
-                <a:extLst>
-                  <a:ext uri="{FF2B5EF4-FFF2-40B4-BE49-F238E27FC236}">
-                    <a16:creationId xmlns:a16="http://schemas.microsoft.com/office/drawing/2014/main" id="{C933D906-CF81-5AD4-2902-D9DD0E0EF8B7}"/>
-                  </a:ext>
-                </a:extLst>
-              </p:cNvPr>
-              <p:cNvSpPr txBox="1">
-                <a:spLocks noRot="1" noChangeAspect="1" noMove="1" noResize="1" noEditPoints="1" noAdjustHandles="1" noChangeArrowheads="1" noChangeShapeType="1" noTextEdit="1"/>
-              </p:cNvSpPr>
-              <p:nvPr/>
-            </p:nvSpPr>
-            <p:spPr>
-              <a:xfrm>
-                <a:off x="838199" y="1411704"/>
-                <a:ext cx="10393219" cy="4795132"/>
-              </a:xfrm>
-              <a:prstGeom prst="rect">
-                <a:avLst/>
-              </a:prstGeom>
-              <a:blipFill>
-                <a:blip r:embed="rId2"/>
-                <a:stretch>
-                  <a:fillRect l="-880"/>
-                </a:stretch>
-              </a:blipFill>
-            </p:spPr>
-            <p:txBody>
-              <a:bodyPr/>
-              <a:lstStyle/>
-              <a:p>
-                <a:r>
-                  <a:rPr lang="en-US">
-                    <a:noFill/>
-                  </a:rPr>
-                  <a:t> </a:t>
-                </a:r>
-              </a:p>
-            </p:txBody>
-          </p:sp>
-        </mc:Fallback>
-      </mc:AlternateContent>
-      <p:sp>
-        <p:nvSpPr>
-          <p:cNvPr id="2" name="Title 1">
-            <a:extLst>
-              <a:ext uri="{FF2B5EF4-FFF2-40B4-BE49-F238E27FC236}">
-                <a16:creationId xmlns:a16="http://schemas.microsoft.com/office/drawing/2014/main" id="{6EA75132-6122-451D-8580-53616DB7E950}"/>
-              </a:ext>
-            </a:extLst>
-          </p:cNvPr>
-          <p:cNvSpPr>
-            <a:spLocks noGrp="1"/>
-          </p:cNvSpPr>
-          <p:nvPr>
-            <p:ph type="title"/>
-          </p:nvPr>
-        </p:nvSpPr>
-        <p:spPr>
-          <a:xfrm>
-            <a:off x="838199" y="461818"/>
-            <a:ext cx="4783697" cy="1067529"/>
-          </a:xfrm>
-        </p:spPr>
-        <p:txBody>
-          <a:bodyPr vert="horz" lIns="91440" tIns="45720" rIns="91440" bIns="45720" rtlCol="0" anchor="b">
-            <a:normAutofit fontScale="90000"/>
-          </a:bodyPr>
-          <a:lstStyle/>
-          <a:p>
-            <a:r>
-              <a:rPr lang="en-US" sz="4000" kern="1200" dirty="0">
-                <a:solidFill>
-                  <a:srgbClr val="1F3864"/>
-                </a:solidFill>
-                <a:latin typeface="+mj-lt"/>
-                <a:ea typeface="+mj-ea"/>
-                <a:cs typeface="+mj-cs"/>
-              </a:rPr>
-              <a:t>Ex. </a:t>
-            </a:r>
-            <a:r>
-              <a:rPr lang="en-US" sz="4000" dirty="0">
-                <a:solidFill>
-                  <a:srgbClr val="1F3864"/>
-                </a:solidFill>
-              </a:rPr>
-              <a:t>Construct a Boxplot</a:t>
-            </a:r>
-            <a:endParaRPr lang="en-US" sz="4000" kern="1200" dirty="0">
-              <a:solidFill>
-                <a:srgbClr val="1F3864"/>
-              </a:solidFill>
-              <a:latin typeface="+mj-lt"/>
-              <a:ea typeface="+mj-ea"/>
-              <a:cs typeface="+mj-cs"/>
-            </a:endParaRPr>
-          </a:p>
-        </p:txBody>
-      </p:sp>
-      <p:sp>
-        <p:nvSpPr>
-          <p:cNvPr id="3" name="Rectangle 2">
-            <a:extLst>
-              <a:ext uri="{FF2B5EF4-FFF2-40B4-BE49-F238E27FC236}">
-                <a16:creationId xmlns:a16="http://schemas.microsoft.com/office/drawing/2014/main" id="{CDA83090-59E8-EFFB-3135-1672E48B6474}"/>
-              </a:ext>
-            </a:extLst>
-          </p:cNvPr>
-          <p:cNvSpPr/>
-          <p:nvPr/>
-        </p:nvSpPr>
-        <p:spPr>
-          <a:xfrm>
-            <a:off x="1939636" y="3066473"/>
-            <a:ext cx="3519055" cy="480291"/>
-          </a:xfrm>
-          <a:prstGeom prst="rect">
-            <a:avLst/>
-          </a:prstGeom>
-          <a:noFill/>
-          <a:ln w="38100">
-            <a:solidFill>
-              <a:srgbClr val="0070C0"/>
-            </a:solidFill>
-          </a:ln>
-        </p:spPr>
-        <p:style>
-          <a:lnRef idx="2">
-            <a:schemeClr val="accent1">
-              <a:shade val="15000"/>
-            </a:schemeClr>
-          </a:lnRef>
-          <a:fillRef idx="1">
-            <a:schemeClr val="accent1"/>
-          </a:fillRef>
-          <a:effectRef idx="0">
-            <a:schemeClr val="accent1"/>
-          </a:effectRef>
-          <a:fontRef idx="minor">
-            <a:schemeClr val="lt1"/>
-          </a:fontRef>
-        </p:style>
-        <p:txBody>
-          <a:bodyPr rtlCol="0" anchor="ctr"/>
-          <a:lstStyle/>
-          <a:p>
-            <a:pPr algn="ctr"/>
-            <a:endParaRPr lang="en-US"/>
-          </a:p>
-        </p:txBody>
-      </p:sp>
-      <p:sp>
-        <p:nvSpPr>
-          <p:cNvPr id="6" name="Rectangle 5">
-            <a:extLst>
-              <a:ext uri="{FF2B5EF4-FFF2-40B4-BE49-F238E27FC236}">
-                <a16:creationId xmlns:a16="http://schemas.microsoft.com/office/drawing/2014/main" id="{BCA39C5B-257E-372D-3412-85E2D621D863}"/>
-              </a:ext>
-            </a:extLst>
-          </p:cNvPr>
-          <p:cNvSpPr/>
-          <p:nvPr/>
-        </p:nvSpPr>
-        <p:spPr>
-          <a:xfrm>
-            <a:off x="5458691" y="3066473"/>
-            <a:ext cx="3519055" cy="480291"/>
-          </a:xfrm>
-          <a:prstGeom prst="rect">
-            <a:avLst/>
-          </a:prstGeom>
-          <a:noFill/>
-          <a:ln w="38100">
-            <a:solidFill>
-              <a:srgbClr val="FF0000"/>
-            </a:solidFill>
-          </a:ln>
-        </p:spPr>
-        <p:style>
-          <a:lnRef idx="2">
-            <a:schemeClr val="accent1">
-              <a:shade val="15000"/>
-            </a:schemeClr>
-          </a:lnRef>
-          <a:fillRef idx="1">
-            <a:schemeClr val="accent1"/>
-          </a:fillRef>
-          <a:effectRef idx="0">
-            <a:schemeClr val="accent1"/>
-          </a:effectRef>
-          <a:fontRef idx="minor">
-            <a:schemeClr val="lt1"/>
-          </a:fontRef>
-        </p:style>
-        <p:txBody>
-          <a:bodyPr rtlCol="0" anchor="ctr"/>
-          <a:lstStyle/>
-          <a:p>
-            <a:pPr algn="ctr"/>
-            <a:endParaRPr lang="en-US"/>
-          </a:p>
-        </p:txBody>
-      </p:sp>
-      <p:sp>
-        <p:nvSpPr>
-          <p:cNvPr id="5" name="Slide Number Placeholder 4">
-            <a:extLst>
-              <a:ext uri="{FF2B5EF4-FFF2-40B4-BE49-F238E27FC236}">
-                <a16:creationId xmlns:a16="http://schemas.microsoft.com/office/drawing/2014/main" id="{986C7B98-5A0C-A4DC-7715-7487860F35ED}"/>
-              </a:ext>
-            </a:extLst>
-          </p:cNvPr>
-          <p:cNvSpPr>
-            <a:spLocks noGrp="1"/>
-          </p:cNvSpPr>
-          <p:nvPr>
-            <p:ph type="sldNum" sz="quarter" idx="12"/>
-          </p:nvPr>
-        </p:nvSpPr>
-        <p:spPr/>
-        <p:txBody>
-          <a:bodyPr/>
-          <a:lstStyle/>
-          <a:p>
-            <a:fld id="{A80A81DD-F10A-4B1C-963A-0ABBB4865886}" type="slidenum">
-              <a:rPr lang="en-US" smtClean="0"/>
-              <a:t>27</a:t>
-            </a:fld>
-            <a:endParaRPr lang="en-US"/>
-          </a:p>
-        </p:txBody>
-      </p:sp>
-    </p:spTree>
-    <p:extLst>
-      <p:ext uri="{BB962C8B-B14F-4D97-AF65-F5344CB8AC3E}">
-        <p14:creationId xmlns:p14="http://schemas.microsoft.com/office/powerpoint/2010/main" val="815618924"/>
-      </p:ext>
-    </p:extLst>
-  </p:cSld>
-  <p:clrMapOvr>
-    <a:masterClrMapping/>
-  </p:clrMapOvr>
-</p:sld>
-</file>
-
-<file path=ppt/slides/slide28.xml><?xml version="1.0" encoding="utf-8"?>
-<p:sld xmlns:a="http://schemas.openxmlformats.org/drawingml/2006/main" xmlns:r="http://schemas.openxmlformats.org/officeDocument/2006/relationships" xmlns:p="http://schemas.openxmlformats.org/presentationml/2006/main">
-  <p:cSld>
-    <p:spTree>
-      <p:nvGrpSpPr>
-        <p:cNvPr id="1" name=""/>
-        <p:cNvGrpSpPr/>
-        <p:nvPr/>
-      </p:nvGrpSpPr>
-      <p:grpSpPr>
-        <a:xfrm>
-          <a:off x="0" y="0"/>
-          <a:ext cx="0" cy="0"/>
-          <a:chOff x="0" y="0"/>
-          <a:chExt cx="0" cy="0"/>
-        </a:xfrm>
-      </p:grpSpPr>
-      <p:sp>
-        <p:nvSpPr>
-          <p:cNvPr id="6" name="Body card">
-            <a:extLst>
-              <a:ext uri="{FF2B5EF4-FFF2-40B4-BE49-F238E27FC236}">
-                <a16:creationId xmlns:a16="http://schemas.microsoft.com/office/drawing/2014/main" id="{CB4BA65E-42BC-C3E0-8EF0-D373FC1C12C5}"/>
-              </a:ext>
-            </a:extLst>
-          </p:cNvPr>
-          <p:cNvSpPr/>
-          <p:nvPr/>
-        </p:nvSpPr>
-        <p:spPr>
-          <a:xfrm>
-            <a:off x="635000" y="1676400"/>
-            <a:ext cx="10922000" cy="2247900"/>
-          </a:xfrm>
-          <a:prstGeom prst="roundRect">
-            <a:avLst>
-              <a:gd name="adj" fmla="val 3000"/>
-            </a:avLst>
-          </a:prstGeom>
-          <a:solidFill>
-            <a:srgbClr val="F2F6FC"/>
-          </a:solidFill>
-          <a:ln w="19050">
-            <a:solidFill>
-              <a:srgbClr val="4472C4"/>
-            </a:solidFill>
-          </a:ln>
-        </p:spPr>
-        <p:style>
-          <a:lnRef idx="2">
-            <a:schemeClr val="accent1">
-              <a:shade val="15000"/>
-            </a:schemeClr>
-          </a:lnRef>
-          <a:fillRef idx="1">
-            <a:schemeClr val="accent1"/>
-          </a:fillRef>
-          <a:effectRef idx="0">
-            <a:schemeClr val="accent1"/>
-          </a:effectRef>
-          <a:fontRef idx="minor">
-            <a:schemeClr val="lt1"/>
-          </a:fontRef>
-        </p:style>
-        <p:txBody>
-          <a:bodyPr rtlCol="0" anchor="ctr"/>
-          <a:lstStyle/>
-          <a:p>
-            <a:pPr algn="ctr"/>
-            <a:endParaRPr lang="en-US"/>
-          </a:p>
-        </p:txBody>
-      </p:sp>
-      <p:sp>
-        <p:nvSpPr>
-          <p:cNvPr id="2" name="Title 1">
-            <a:extLst>
-              <a:ext uri="{FF2B5EF4-FFF2-40B4-BE49-F238E27FC236}">
-                <a16:creationId xmlns:a16="http://schemas.microsoft.com/office/drawing/2014/main" id="{77CDEDB4-D308-EF0A-43A7-3BA893E1819C}"/>
-              </a:ext>
-            </a:extLst>
-          </p:cNvPr>
-          <p:cNvSpPr>
-            <a:spLocks noGrp="1"/>
-          </p:cNvSpPr>
-          <p:nvPr>
-            <p:ph type="title"/>
-          </p:nvPr>
-        </p:nvSpPr>
-        <p:spPr/>
-        <p:txBody>
-          <a:bodyPr/>
-          <a:lstStyle/>
-          <a:p>
-            <a:r>
-              <a:rPr lang="en-US">
-                <a:solidFill>
-                  <a:srgbClr val="1F3864"/>
-                </a:solidFill>
-              </a:rPr>
-              <a:t>Practice: Construct a Boxplot</a:t>
-            </a:r>
-            <a:endParaRPr lang="en-US" dirty="0">
-              <a:solidFill>
-                <a:srgbClr val="1F3864"/>
-              </a:solidFill>
-            </a:endParaRPr>
-          </a:p>
-        </p:txBody>
-      </p:sp>
-      <p:sp>
-        <p:nvSpPr>
-          <p:cNvPr id="3" name="Content Placeholder 2">
-            <a:extLst>
-              <a:ext uri="{FF2B5EF4-FFF2-40B4-BE49-F238E27FC236}">
-                <a16:creationId xmlns:a16="http://schemas.microsoft.com/office/drawing/2014/main" id="{49F843BF-7D1D-9153-A164-BE2AA5E369E2}"/>
-              </a:ext>
-            </a:extLst>
-          </p:cNvPr>
-          <p:cNvSpPr>
-            <a:spLocks noGrp="1"/>
-          </p:cNvSpPr>
-          <p:nvPr>
-            <p:ph idx="1"/>
-          </p:nvPr>
-        </p:nvSpPr>
-        <p:spPr/>
-        <p:txBody>
-          <a:bodyPr/>
-          <a:lstStyle/>
-          <a:p>
-            <a:pPr marL="0" indent="0">
-              <a:buNone/>
-            </a:pPr>
-            <a:r>
-              <a:rPr lang="en-US" dirty="0"/>
-              <a:t>Construct the boxplot for student exam scores</a:t>
-            </a:r>
-          </a:p>
-          <a:p>
-            <a:pPr marL="0" indent="0">
-              <a:buNone/>
-            </a:pPr>
-            <a:endParaRPr lang="en-US" dirty="0"/>
-          </a:p>
-          <a:p>
-            <a:pPr marL="0" indent="0">
-              <a:buNone/>
-            </a:pPr>
-            <a:r>
-              <a:rPr lang="en-US" dirty="0"/>
-              <a:t>Exam Scores 61,61,65,65,66,68,69,73,74,75,76,78,79,90,94</a:t>
-            </a:r>
-          </a:p>
-          <a:p>
-            <a:pPr marL="0" indent="0">
-              <a:buNone/>
-            </a:pPr>
-            <a:endParaRPr lang="en-US" dirty="0"/>
-          </a:p>
-        </p:txBody>
-      </p:sp>
-      <p:sp>
-        <p:nvSpPr>
-          <p:cNvPr id="4" name="Slide Number Placeholder 3">
-            <a:extLst>
-              <a:ext uri="{FF2B5EF4-FFF2-40B4-BE49-F238E27FC236}">
-                <a16:creationId xmlns:a16="http://schemas.microsoft.com/office/drawing/2014/main" id="{13554BA3-3EE4-E355-6CEC-1440F70977B6}"/>
-              </a:ext>
-            </a:extLst>
-          </p:cNvPr>
-          <p:cNvSpPr>
-            <a:spLocks noGrp="1"/>
-          </p:cNvSpPr>
-          <p:nvPr>
-            <p:ph type="sldNum" sz="quarter" idx="12"/>
-          </p:nvPr>
-        </p:nvSpPr>
-        <p:spPr/>
-        <p:txBody>
-          <a:bodyPr/>
-          <a:lstStyle/>
-          <a:p>
-            <a:fld id="{A80A81DD-F10A-4B1C-963A-0ABBB4865886}" type="slidenum">
-              <a:rPr lang="en-US" smtClean="0"/>
-              <a:t>28</a:t>
-            </a:fld>
-            <a:endParaRPr lang="en-US"/>
-          </a:p>
-        </p:txBody>
-      </p:sp>
-      <p:sp>
-        <p:nvSpPr>
-          <p:cNvPr id="5" name="Title rule">
-            <a:extLst>
-              <a:ext uri="{FF2B5EF4-FFF2-40B4-BE49-F238E27FC236}">
-                <a16:creationId xmlns:a16="http://schemas.microsoft.com/office/drawing/2014/main" id="{3C8EF96B-2D5B-6F64-9249-6A4C511401A7}"/>
-              </a:ext>
-            </a:extLst>
-          </p:cNvPr>
-          <p:cNvSpPr/>
-          <p:nvPr/>
-        </p:nvSpPr>
-        <p:spPr>
-          <a:xfrm>
-            <a:off x="838200" y="1600200"/>
-            <a:ext cx="10515600" cy="38100"/>
-          </a:xfrm>
-          <a:prstGeom prst="rect">
-            <a:avLst/>
-          </a:prstGeom>
-          <a:solidFill>
-            <a:srgbClr val="4472C4"/>
-          </a:solidFill>
-          <a:ln w="12700" cap="flat" cmpd="sng" algn="ctr">
-            <a:noFill/>
-            <a:prstDash val="solid"/>
-            <a:miter lim="800000"/>
-          </a:ln>
-          <a:effectLst/>
-          <a:extLst>
-            <a:ext uri="{91240B29-F687-4F45-9708-019B960494DF}">
-              <a14:hiddenLine xmlns:a14="http://schemas.microsoft.com/office/drawing/2010/main" w="12700" cap="flat" cmpd="sng" algn="ctr">
-                <a:solidFill>
-                  <a:schemeClr val="accent1">
-                    <a:shade val="15000"/>
-                  </a:schemeClr>
-                </a:solidFill>
-                <a:prstDash val="solid"/>
-                <a:miter lim="800000"/>
-              </a14:hiddenLine>
-            </a:ext>
-          </a:extLst>
-        </p:spPr>
-        <p:style>
-          <a:lnRef idx="2">
-            <a:schemeClr val="accent1">
-              <a:shade val="15000"/>
-            </a:schemeClr>
-          </a:lnRef>
-          <a:fillRef idx="1">
-            <a:schemeClr val="accent1"/>
-          </a:fillRef>
-          <a:effectRef idx="0">
-            <a:schemeClr val="accent1"/>
-          </a:effectRef>
-          <a:fontRef idx="minor">
-            <a:schemeClr val="lt1"/>
-          </a:fontRef>
-        </p:style>
-        <p:txBody>
-          <a:bodyPr rtlCol="0" anchor="ctr"/>
-          <a:lstStyle/>
-          <a:p>
-            <a:pPr algn="ctr"/>
-            <a:endParaRPr lang="en-US"/>
-          </a:p>
-        </p:txBody>
-      </p:sp>
-    </p:spTree>
-    <p:extLst>
-      <p:ext uri="{BB962C8B-B14F-4D97-AF65-F5344CB8AC3E}">
-        <p14:creationId xmlns:p14="http://schemas.microsoft.com/office/powerpoint/2010/main" val="2460109712"/>
-      </p:ext>
-    </p:extLst>
-  </p:cSld>
-  <p:clrMapOvr>
-    <a:masterClrMapping/>
-  </p:clrMapOvr>
-</p:sld>
-</file>
-
-<file path=ppt/slides/slide29.xml><?xml version="1.0" encoding="utf-8"?>
-<p:sld xmlns:a="http://schemas.openxmlformats.org/drawingml/2006/main" xmlns:r="http://schemas.openxmlformats.org/officeDocument/2006/relationships" xmlns:p="http://schemas.openxmlformats.org/presentationml/2006/main">
-  <p:cSld>
-    <p:spTree>
-      <p:nvGrpSpPr>
-        <p:cNvPr id="1" name=""/>
-        <p:cNvGrpSpPr/>
-        <p:nvPr/>
-      </p:nvGrpSpPr>
-      <p:grpSpPr>
-        <a:xfrm>
-          <a:off x="0" y="0"/>
-          <a:ext cx="0" cy="0"/>
-          <a:chOff x="0" y="0"/>
-          <a:chExt cx="0" cy="0"/>
-        </a:xfrm>
-      </p:grpSpPr>
-      <p:sp>
-        <p:nvSpPr>
-          <p:cNvPr id="6" name="Body card">
-            <a:extLst>
-              <a:ext uri="{FF2B5EF4-FFF2-40B4-BE49-F238E27FC236}">
-                <a16:creationId xmlns:a16="http://schemas.microsoft.com/office/drawing/2014/main" id="{CC926376-94AB-9179-7369-7C7C6CDBBBFE}"/>
-              </a:ext>
-            </a:extLst>
-          </p:cNvPr>
-          <p:cNvSpPr/>
-          <p:nvPr/>
-        </p:nvSpPr>
-        <p:spPr>
-          <a:xfrm>
-            <a:off x="635000" y="1676400"/>
-            <a:ext cx="10922000" cy="3263900"/>
-          </a:xfrm>
-          <a:prstGeom prst="roundRect">
-            <a:avLst>
-              <a:gd name="adj" fmla="val 3000"/>
-            </a:avLst>
-          </a:prstGeom>
-          <a:solidFill>
-            <a:srgbClr val="F2F6FC"/>
-          </a:solidFill>
-          <a:ln w="19050">
-            <a:solidFill>
-              <a:srgbClr val="4472C4"/>
-            </a:solidFill>
-          </a:ln>
-        </p:spPr>
-        <p:style>
-          <a:lnRef idx="2">
-            <a:schemeClr val="accent1">
-              <a:shade val="15000"/>
-            </a:schemeClr>
-          </a:lnRef>
-          <a:fillRef idx="1">
-            <a:schemeClr val="accent1"/>
-          </a:fillRef>
-          <a:effectRef idx="0">
-            <a:schemeClr val="accent1"/>
-          </a:effectRef>
-          <a:fontRef idx="minor">
-            <a:schemeClr val="lt1"/>
-          </a:fontRef>
-        </p:style>
-        <p:txBody>
-          <a:bodyPr rtlCol="0" anchor="ctr"/>
-          <a:lstStyle/>
-          <a:p>
-            <a:pPr algn="ctr"/>
-            <a:endParaRPr lang="en-US"/>
-          </a:p>
-        </p:txBody>
-      </p:sp>
-      <p:sp>
-        <p:nvSpPr>
-          <p:cNvPr id="2" name="Title 1">
-            <a:extLst>
-              <a:ext uri="{FF2B5EF4-FFF2-40B4-BE49-F238E27FC236}">
-                <a16:creationId xmlns:a16="http://schemas.microsoft.com/office/drawing/2014/main" id="{9C6B69AC-9E45-9EA9-B899-B3797D5B7216}"/>
-              </a:ext>
-            </a:extLst>
-          </p:cNvPr>
-          <p:cNvSpPr>
-            <a:spLocks noGrp="1"/>
-          </p:cNvSpPr>
-          <p:nvPr>
-            <p:ph type="title"/>
-          </p:nvPr>
-        </p:nvSpPr>
-        <p:spPr/>
-        <p:txBody>
-          <a:bodyPr/>
-          <a:lstStyle/>
-          <a:p>
-            <a:r>
-              <a:rPr lang="en-US" sz="4400" kern="1200" dirty="0">
-                <a:solidFill>
-                  <a:srgbClr val="1F3864"/>
-                </a:solidFill>
-                <a:latin typeface="+mj-lt"/>
-                <a:ea typeface="+mj-ea"/>
-                <a:cs typeface="+mj-cs"/>
-              </a:rPr>
-              <a:t>Ex2. </a:t>
-            </a:r>
-            <a:r>
-              <a:rPr lang="en-US" sz="4400" dirty="0">
-                <a:solidFill>
-                  <a:srgbClr val="1F3864"/>
-                </a:solidFill>
-              </a:rPr>
-              <a:t>Construct a Boxplot</a:t>
-            </a:r>
-            <a:endParaRPr lang="en-US" dirty="0">
-              <a:solidFill>
-                <a:srgbClr val="1F3864"/>
-              </a:solidFill>
-            </a:endParaRPr>
-          </a:p>
-        </p:txBody>
-      </p:sp>
-      <p:sp>
-        <p:nvSpPr>
-          <p:cNvPr id="3" name="Content Placeholder 2">
-            <a:extLst>
-              <a:ext uri="{FF2B5EF4-FFF2-40B4-BE49-F238E27FC236}">
-                <a16:creationId xmlns:a16="http://schemas.microsoft.com/office/drawing/2014/main" id="{FC49D6F1-D1E4-EA2F-1694-74768E613E89}"/>
-              </a:ext>
-            </a:extLst>
-          </p:cNvPr>
-          <p:cNvSpPr>
-            <a:spLocks noGrp="1"/>
-          </p:cNvSpPr>
-          <p:nvPr>
-            <p:ph idx="1"/>
-          </p:nvPr>
-        </p:nvSpPr>
-        <p:spPr/>
-        <p:txBody>
-          <a:bodyPr/>
-          <a:lstStyle/>
-          <a:p>
-            <a:pPr marL="0" indent="0">
-              <a:buNone/>
-            </a:pPr>
-            <a:r>
-              <a:rPr lang="en-US" dirty="0"/>
-              <a:t>Consider the following 12 observations of a quantitative variable X</a:t>
-            </a:r>
-          </a:p>
-          <a:p>
-            <a:pPr marL="0" indent="0">
-              <a:buNone/>
-            </a:pPr>
-            <a:r>
-              <a:rPr lang="en-US" dirty="0"/>
-              <a:t>X = { -5.7, -2.6, -1.5, -1.3, -0.4, 0.2, 1.5, 2.2, 2.3, 2.6, 2.9, 10.4 }</a:t>
-            </a:r>
-          </a:p>
-          <a:p>
-            <a:pPr marL="0" indent="0">
-              <a:buNone/>
-            </a:pPr>
-            <a:endParaRPr lang="en-US" dirty="0"/>
-          </a:p>
-          <a:p>
-            <a:pPr marL="0" indent="0">
-              <a:buNone/>
-            </a:pPr>
-            <a:r>
-              <a:rPr lang="en-US" dirty="0"/>
-              <a:t>Compute the 5 number summary and draw a boxplot</a:t>
-            </a:r>
-          </a:p>
-          <a:p>
-            <a:pPr marL="0" indent="0">
-              <a:buNone/>
-            </a:pPr>
-            <a:endParaRPr lang="en-US" dirty="0"/>
-          </a:p>
-          <a:p>
-            <a:pPr marL="0" indent="0">
-              <a:buNone/>
-            </a:pPr>
-            <a:r>
-              <a:rPr lang="en-US" dirty="0"/>
-              <a:t>Compare the IQR with the range</a:t>
-            </a:r>
-          </a:p>
-        </p:txBody>
-      </p:sp>
-      <p:sp>
-        <p:nvSpPr>
-          <p:cNvPr id="4" name="Slide Number Placeholder 3">
-            <a:extLst>
-              <a:ext uri="{FF2B5EF4-FFF2-40B4-BE49-F238E27FC236}">
-                <a16:creationId xmlns:a16="http://schemas.microsoft.com/office/drawing/2014/main" id="{4C126FC2-D9C8-EF57-1C53-B6A7F00F7C10}"/>
-              </a:ext>
-            </a:extLst>
-          </p:cNvPr>
-          <p:cNvSpPr>
-            <a:spLocks noGrp="1"/>
-          </p:cNvSpPr>
-          <p:nvPr>
-            <p:ph type="sldNum" sz="quarter" idx="12"/>
-          </p:nvPr>
-        </p:nvSpPr>
-        <p:spPr/>
-        <p:txBody>
-          <a:bodyPr/>
-          <a:lstStyle/>
-          <a:p>
-            <a:fld id="{A80A81DD-F10A-4B1C-963A-0ABBB4865886}" type="slidenum">
-              <a:rPr lang="en-US" smtClean="0"/>
-              <a:t>29</a:t>
-            </a:fld>
-            <a:endParaRPr lang="en-US"/>
-          </a:p>
-        </p:txBody>
-      </p:sp>
-      <p:sp>
-        <p:nvSpPr>
-          <p:cNvPr id="5" name="Title rule">
-            <a:extLst>
-              <a:ext uri="{FF2B5EF4-FFF2-40B4-BE49-F238E27FC236}">
-                <a16:creationId xmlns:a16="http://schemas.microsoft.com/office/drawing/2014/main" id="{3CE34886-97D6-4A80-E40A-362CCC47BE2B}"/>
-              </a:ext>
-            </a:extLst>
-          </p:cNvPr>
-          <p:cNvSpPr/>
-          <p:nvPr/>
-        </p:nvSpPr>
-        <p:spPr>
-          <a:xfrm>
-            <a:off x="838200" y="1600200"/>
-            <a:ext cx="10515600" cy="38100"/>
-          </a:xfrm>
-          <a:prstGeom prst="rect">
-            <a:avLst/>
-          </a:prstGeom>
-          <a:solidFill>
-            <a:srgbClr val="4472C4"/>
-          </a:solidFill>
-          <a:ln w="12700" cap="flat" cmpd="sng" algn="ctr">
-            <a:noFill/>
-            <a:prstDash val="solid"/>
-            <a:miter lim="800000"/>
-          </a:ln>
-          <a:effectLst/>
-          <a:extLst>
-            <a:ext uri="{91240B29-F687-4F45-9708-019B960494DF}">
-              <a14:hiddenLine xmlns:a14="http://schemas.microsoft.com/office/drawing/2010/main" w="12700" cap="flat" cmpd="sng" algn="ctr">
-                <a:solidFill>
-                  <a:schemeClr val="accent1">
-                    <a:shade val="15000"/>
-                  </a:schemeClr>
-                </a:solidFill>
-                <a:prstDash val="solid"/>
-                <a:miter lim="800000"/>
-              </a14:hiddenLine>
-            </a:ext>
-          </a:extLst>
-        </p:spPr>
-        <p:style>
-          <a:lnRef idx="2">
-            <a:schemeClr val="accent1">
-              <a:shade val="15000"/>
-            </a:schemeClr>
-          </a:lnRef>
-          <a:fillRef idx="1">
-            <a:schemeClr val="accent1"/>
-          </a:fillRef>
-          <a:effectRef idx="0">
-            <a:schemeClr val="accent1"/>
-          </a:effectRef>
-          <a:fontRef idx="minor">
-            <a:schemeClr val="lt1"/>
-          </a:fontRef>
-        </p:style>
-        <p:txBody>
-          <a:bodyPr rtlCol="0" anchor="ctr"/>
-          <a:lstStyle/>
-          <a:p>
-            <a:pPr algn="ctr"/>
-            <a:endParaRPr lang="en-US"/>
-          </a:p>
-        </p:txBody>
-      </p:sp>
-    </p:spTree>
-    <p:extLst>
-      <p:ext uri="{BB962C8B-B14F-4D97-AF65-F5344CB8AC3E}">
-        <p14:creationId xmlns:p14="http://schemas.microsoft.com/office/powerpoint/2010/main" val="2450354495"/>
-      </p:ext>
-    </p:extLst>
-  </p:cSld>
-  <p:clrMapOvr>
-    <a:masterClrMapping/>
-  </p:clrMapOvr>
-</p:sld>
-</file>
-
 <file path=ppt/slides/slide3.xml><?xml version="1.0" encoding="utf-8"?>
 <p:sld xmlns:a="http://schemas.openxmlformats.org/drawingml/2006/main" xmlns:r="http://schemas.openxmlformats.org/officeDocument/2006/relationships" xmlns:p="http://schemas.openxmlformats.org/presentationml/2006/main">
   <p:cSld>
@@ -15368,3982 +12065,6 @@
 </p:sld>
 </file>
 
-<file path=ppt/slides/slide30.xml><?xml version="1.0" encoding="utf-8"?>
-<p:sld xmlns:a="http://schemas.openxmlformats.org/drawingml/2006/main" xmlns:r="http://schemas.openxmlformats.org/officeDocument/2006/relationships" xmlns:p="http://schemas.openxmlformats.org/presentationml/2006/main">
-  <p:cSld>
-    <p:spTree>
-      <p:nvGrpSpPr>
-        <p:cNvPr id="1" name=""/>
-        <p:cNvGrpSpPr/>
-        <p:nvPr/>
-      </p:nvGrpSpPr>
-      <p:grpSpPr>
-        <a:xfrm>
-          <a:off x="0" y="0"/>
-          <a:ext cx="0" cy="0"/>
-          <a:chOff x="0" y="0"/>
-          <a:chExt cx="0" cy="0"/>
-        </a:xfrm>
-      </p:grpSpPr>
-      <p:sp>
-        <p:nvSpPr>
-          <p:cNvPr id="6" name="Body card">
-            <a:extLst>
-              <a:ext uri="{FF2B5EF4-FFF2-40B4-BE49-F238E27FC236}">
-                <a16:creationId xmlns:a16="http://schemas.microsoft.com/office/drawing/2014/main" id="{2BAC071F-BA2C-5E2E-0CAD-1A176EFD288F}"/>
-              </a:ext>
-            </a:extLst>
-          </p:cNvPr>
-          <p:cNvSpPr/>
-          <p:nvPr/>
-        </p:nvSpPr>
-        <p:spPr>
-          <a:xfrm>
-            <a:off x="635000" y="1676400"/>
-            <a:ext cx="10922000" cy="4749800"/>
-          </a:xfrm>
-          <a:prstGeom prst="roundRect">
-            <a:avLst>
-              <a:gd name="adj" fmla="val 3000"/>
-            </a:avLst>
-          </a:prstGeom>
-          <a:solidFill>
-            <a:srgbClr val="F2F6FC"/>
-          </a:solidFill>
-          <a:ln w="19050">
-            <a:solidFill>
-              <a:srgbClr val="4472C4"/>
-            </a:solidFill>
-          </a:ln>
-        </p:spPr>
-        <p:style>
-          <a:lnRef idx="2">
-            <a:schemeClr val="accent1">
-              <a:shade val="15000"/>
-            </a:schemeClr>
-          </a:lnRef>
-          <a:fillRef idx="1">
-            <a:schemeClr val="accent1"/>
-          </a:fillRef>
-          <a:effectRef idx="0">
-            <a:schemeClr val="accent1"/>
-          </a:effectRef>
-          <a:fontRef idx="minor">
-            <a:schemeClr val="lt1"/>
-          </a:fontRef>
-        </p:style>
-        <p:txBody>
-          <a:bodyPr rtlCol="0" anchor="ctr"/>
-          <a:lstStyle/>
-          <a:p>
-            <a:pPr algn="ctr"/>
-            <a:endParaRPr lang="en-US"/>
-          </a:p>
-        </p:txBody>
-      </p:sp>
-      <p:sp>
-        <p:nvSpPr>
-          <p:cNvPr id="2" name="Title 1">
-            <a:extLst>
-              <a:ext uri="{FF2B5EF4-FFF2-40B4-BE49-F238E27FC236}">
-                <a16:creationId xmlns:a16="http://schemas.microsoft.com/office/drawing/2014/main" id="{1E74CF04-6A9A-C024-DDD4-4EA11F99DAD9}"/>
-              </a:ext>
-            </a:extLst>
-          </p:cNvPr>
-          <p:cNvSpPr>
-            <a:spLocks noGrp="1"/>
-          </p:cNvSpPr>
-          <p:nvPr>
-            <p:ph type="title"/>
-          </p:nvPr>
-        </p:nvSpPr>
-        <p:spPr/>
-        <p:txBody>
-          <a:bodyPr/>
-          <a:lstStyle/>
-          <a:p>
-            <a:r>
-              <a:rPr lang="en-US">
-                <a:solidFill>
-                  <a:srgbClr val="1F3864"/>
-                </a:solidFill>
-              </a:rPr>
-              <a:t>Measures of Spread: Deviation</a:t>
-            </a:r>
-            <a:endParaRPr lang="en-US" dirty="0">
-              <a:solidFill>
-                <a:srgbClr val="1F3864"/>
-              </a:solidFill>
-            </a:endParaRPr>
-          </a:p>
-        </p:txBody>
-      </p:sp>
-      <mc:AlternateContent xmlns:mc="http://schemas.openxmlformats.org/markup-compatibility/2006">
-        <mc:Choice xmlns:a14="http://schemas.microsoft.com/office/drawing/2010/main" Requires="a14">
-          <p:sp>
-            <p:nvSpPr>
-              <p:cNvPr id="3" name="Content Placeholder 2">
-                <a:extLst>
-                  <a:ext uri="{FF2B5EF4-FFF2-40B4-BE49-F238E27FC236}">
-                    <a16:creationId xmlns:a16="http://schemas.microsoft.com/office/drawing/2014/main" id="{30F7291A-45D9-8440-5889-A0D10595CB60}"/>
-                  </a:ext>
-                </a:extLst>
-              </p:cNvPr>
-              <p:cNvSpPr>
-                <a:spLocks noGrp="1"/>
-              </p:cNvSpPr>
-              <p:nvPr>
-                <p:ph idx="1"/>
-              </p:nvPr>
-            </p:nvSpPr>
-            <p:spPr>
-              <a:xfrm>
-                <a:off x="838200" y="1825625"/>
-                <a:ext cx="10267950" cy="4351338"/>
-              </a:xfrm>
-            </p:spPr>
-            <p:txBody>
-              <a:bodyPr>
-                <a:normAutofit/>
-              </a:bodyPr>
-              <a:lstStyle/>
-              <a:p>
-                <a:r>
-                  <a:rPr lang="en-US" dirty="0"/>
-                  <a:t>A better measure of variability that uses </a:t>
-                </a:r>
-                <a:r>
-                  <a:rPr lang="en-US" i="1" dirty="0"/>
-                  <a:t>all</a:t>
-                </a:r>
-                <a:r>
-                  <a:rPr lang="en-US" dirty="0"/>
-                  <a:t> the data is based on </a:t>
-                </a:r>
-                <a:r>
-                  <a:rPr lang="en-US" b="1" dirty="0">
-                    <a:solidFill>
-                      <a:srgbClr val="C00000"/>
-                    </a:solidFill>
-                  </a:rPr>
-                  <a:t>deviations</a:t>
-                </a:r>
-                <a:endParaRPr lang="en-US" dirty="0">
-                  <a:solidFill>
-                    <a:srgbClr val="C00000"/>
-                  </a:solidFill>
-                </a:endParaRPr>
-              </a:p>
-              <a:p>
-                <a:endParaRPr lang="en-US" dirty="0"/>
-              </a:p>
-              <a:p>
-                <a:r>
-                  <a:rPr lang="en-US" b="1" dirty="0">
-                    <a:solidFill>
-                      <a:srgbClr val="C00000"/>
-                    </a:solidFill>
-                  </a:rPr>
-                  <a:t>deviations</a:t>
-                </a:r>
-                <a:r>
-                  <a:rPr lang="en-US" dirty="0"/>
-                  <a:t> are the </a:t>
-                </a:r>
-                <a:r>
-                  <a:rPr lang="en-US" u="sng" dirty="0"/>
-                  <a:t>distances</a:t>
-                </a:r>
-                <a:r>
-                  <a:rPr lang="en-US" dirty="0"/>
-                  <a:t> of each value from the mean of the data:</a:t>
-                </a:r>
-              </a:p>
-              <a:p>
-                <a:pPr marL="914400" lvl="2" indent="0">
-                  <a:buNone/>
-                </a:pPr>
-                <a:r>
-                  <a:rPr lang="en-US" sz="2400" b="0" dirty="0"/>
-                  <a:t>Deviation of an observation</a:t>
-                </a:r>
-                <a14:m>
-                  <m:oMath xmlns:m="http://schemas.openxmlformats.org/officeDocument/2006/math">
-                    <m:r>
-                      <a:rPr lang="en-US" sz="2400" b="0" i="1" smtClean="0">
-                        <a:latin typeface="Cambria Math" panose="02040503050406030204" pitchFamily="18" charset="0"/>
-                      </a:rPr>
-                      <m:t> </m:t>
-                    </m:r>
-                    <m:sSub>
-                      <m:sSubPr>
-                        <m:ctrlPr>
-                          <a:rPr lang="en-US" sz="2400" b="0" i="1" smtClean="0">
-                            <a:latin typeface="Cambria Math" panose="02040503050406030204" pitchFamily="18" charset="0"/>
-                          </a:rPr>
-                        </m:ctrlPr>
-                      </m:sSubPr>
-                      <m:e>
-                        <m:r>
-                          <a:rPr lang="en-US" sz="2400" b="0" i="1" smtClean="0">
-                            <a:latin typeface="Cambria Math" panose="02040503050406030204" pitchFamily="18" charset="0"/>
-                          </a:rPr>
-                          <m:t>𝑥</m:t>
-                        </m:r>
-                      </m:e>
-                      <m:sub>
-                        <m:r>
-                          <a:rPr lang="en-US" sz="2400" b="0" i="1" smtClean="0">
-                            <a:latin typeface="Cambria Math" panose="02040503050406030204" pitchFamily="18" charset="0"/>
-                          </a:rPr>
-                          <m:t>𝑖</m:t>
-                        </m:r>
-                      </m:sub>
-                    </m:sSub>
-                    <m:r>
-                      <a:rPr lang="en-US" sz="2400" b="0" i="1" smtClean="0">
-                        <a:latin typeface="Cambria Math" panose="02040503050406030204" pitchFamily="18" charset="0"/>
-                      </a:rPr>
-                      <m:t>=(</m:t>
-                    </m:r>
-                    <m:sSub>
-                      <m:sSubPr>
-                        <m:ctrlPr>
-                          <a:rPr lang="en-US" sz="2400" b="0" i="1" smtClean="0">
-                            <a:latin typeface="Cambria Math" panose="02040503050406030204" pitchFamily="18" charset="0"/>
-                          </a:rPr>
-                        </m:ctrlPr>
-                      </m:sSubPr>
-                      <m:e>
-                        <m:r>
-                          <a:rPr lang="en-US" sz="2400" b="0" i="1" smtClean="0">
-                            <a:latin typeface="Cambria Math" panose="02040503050406030204" pitchFamily="18" charset="0"/>
-                          </a:rPr>
-                          <m:t>𝑥</m:t>
-                        </m:r>
-                      </m:e>
-                      <m:sub>
-                        <m:r>
-                          <a:rPr lang="en-US" sz="2400" b="0" i="1" smtClean="0">
-                            <a:latin typeface="Cambria Math" panose="02040503050406030204" pitchFamily="18" charset="0"/>
-                          </a:rPr>
-                          <m:t>𝑖</m:t>
-                        </m:r>
-                      </m:sub>
-                    </m:sSub>
-                    <m:r>
-                      <a:rPr lang="en-US" sz="2400" b="0" i="1" smtClean="0">
-                        <a:latin typeface="Cambria Math" panose="02040503050406030204" pitchFamily="18" charset="0"/>
-                      </a:rPr>
-                      <m:t> −</m:t>
-                    </m:r>
-                    <m:acc>
-                      <m:accPr>
-                        <m:chr m:val="̅"/>
-                        <m:ctrlPr>
-                          <a:rPr lang="en-US" sz="2400" b="0" i="1" smtClean="0">
-                            <a:latin typeface="Cambria Math" panose="02040503050406030204" pitchFamily="18" charset="0"/>
-                          </a:rPr>
-                        </m:ctrlPr>
-                      </m:accPr>
-                      <m:e>
-                        <m:r>
-                          <a:rPr lang="en-US" sz="2400" b="0" i="1" smtClean="0">
-                            <a:latin typeface="Cambria Math" panose="02040503050406030204" pitchFamily="18" charset="0"/>
-                          </a:rPr>
-                          <m:t>𝑥</m:t>
-                        </m:r>
-                      </m:e>
-                    </m:acc>
-                    <m:r>
-                      <a:rPr lang="en-US" sz="2400" b="0" i="1" smtClean="0">
-                        <a:latin typeface="Cambria Math" panose="02040503050406030204" pitchFamily="18" charset="0"/>
-                      </a:rPr>
-                      <m:t>)</m:t>
-                    </m:r>
-                  </m:oMath>
-                </a14:m>
-                <a:endParaRPr lang="en-US" sz="2400" dirty="0"/>
-              </a:p>
-              <a:p>
-                <a:pPr marL="914400" lvl="2" indent="0">
-                  <a:buNone/>
-                </a:pPr>
-                <a:endParaRPr lang="en-US" dirty="0"/>
-              </a:p>
-              <a:p>
-                <a:r>
-                  <a:rPr lang="en-US" dirty="0"/>
-                  <a:t>Every observation will have a deviation from the mean</a:t>
-                </a:r>
-              </a:p>
-              <a:p>
-                <a:endParaRPr lang="en-US" dirty="0"/>
-              </a:p>
-              <a:p>
-                <a:endParaRPr lang="en-US" dirty="0"/>
-              </a:p>
-              <a:p>
-                <a:endParaRPr lang="en-US" dirty="0"/>
-              </a:p>
-              <a:p>
-                <a:endParaRPr lang="en-US" dirty="0"/>
-              </a:p>
-            </p:txBody>
-          </p:sp>
-        </mc:Choice>
-        <mc:Fallback>
-          <p:sp>
-            <p:nvSpPr>
-              <p:cNvPr id="3" name="Content Placeholder 2">
-                <a:extLst>
-                  <a:ext uri="{FF2B5EF4-FFF2-40B4-BE49-F238E27FC236}">
-                    <a16:creationId xmlns:a16="http://schemas.microsoft.com/office/drawing/2014/main" id="{30F7291A-45D9-8440-5889-A0D10595CB60}"/>
-                  </a:ext>
-                </a:extLst>
-              </p:cNvPr>
-              <p:cNvSpPr>
-                <a:spLocks noGrp="1" noRot="1" noChangeAspect="1" noMove="1" noResize="1" noEditPoints="1" noAdjustHandles="1" noChangeArrowheads="1" noChangeShapeType="1" noTextEdit="1"/>
-              </p:cNvSpPr>
-              <p:nvPr>
-                <p:ph idx="1"/>
-              </p:nvPr>
-            </p:nvSpPr>
-            <p:spPr>
-              <a:xfrm>
-                <a:off x="838200" y="1825625"/>
-                <a:ext cx="10267950" cy="4351338"/>
-              </a:xfrm>
-              <a:blipFill>
-                <a:blip r:embed="rId2"/>
-                <a:stretch>
-                  <a:fillRect l="-1069" t="-2241"/>
-                </a:stretch>
-              </a:blipFill>
-            </p:spPr>
-            <p:txBody>
-              <a:bodyPr/>
-              <a:lstStyle/>
-              <a:p>
-                <a:r>
-                  <a:rPr lang="en-US">
-                    <a:noFill/>
-                  </a:rPr>
-                  <a:t> </a:t>
-                </a:r>
-              </a:p>
-            </p:txBody>
-          </p:sp>
-        </mc:Fallback>
-      </mc:AlternateContent>
-      <p:sp>
-        <p:nvSpPr>
-          <p:cNvPr id="4" name="Slide Number Placeholder 3">
-            <a:extLst>
-              <a:ext uri="{FF2B5EF4-FFF2-40B4-BE49-F238E27FC236}">
-                <a16:creationId xmlns:a16="http://schemas.microsoft.com/office/drawing/2014/main" id="{D8EC464D-2F8C-3618-EE3E-5E66E88619B0}"/>
-              </a:ext>
-            </a:extLst>
-          </p:cNvPr>
-          <p:cNvSpPr>
-            <a:spLocks noGrp="1"/>
-          </p:cNvSpPr>
-          <p:nvPr>
-            <p:ph type="sldNum" sz="quarter" idx="12"/>
-          </p:nvPr>
-        </p:nvSpPr>
-        <p:spPr/>
-        <p:txBody>
-          <a:bodyPr/>
-          <a:lstStyle/>
-          <a:p>
-            <a:fld id="{A80A81DD-F10A-4B1C-963A-0ABBB4865886}" type="slidenum">
-              <a:rPr lang="en-US" smtClean="0"/>
-              <a:t>30</a:t>
-            </a:fld>
-            <a:endParaRPr lang="en-US"/>
-          </a:p>
-        </p:txBody>
-      </p:sp>
-      <p:sp>
-        <p:nvSpPr>
-          <p:cNvPr id="5" name="Title rule">
-            <a:extLst>
-              <a:ext uri="{FF2B5EF4-FFF2-40B4-BE49-F238E27FC236}">
-                <a16:creationId xmlns:a16="http://schemas.microsoft.com/office/drawing/2014/main" id="{6BA83F57-FB71-D7DE-CCA6-B27182313D0D}"/>
-              </a:ext>
-            </a:extLst>
-          </p:cNvPr>
-          <p:cNvSpPr/>
-          <p:nvPr/>
-        </p:nvSpPr>
-        <p:spPr>
-          <a:xfrm>
-            <a:off x="838200" y="1600200"/>
-            <a:ext cx="10515600" cy="38100"/>
-          </a:xfrm>
-          <a:prstGeom prst="rect">
-            <a:avLst/>
-          </a:prstGeom>
-          <a:solidFill>
-            <a:srgbClr val="4472C4"/>
-          </a:solidFill>
-          <a:ln w="12700" cap="flat" cmpd="sng" algn="ctr">
-            <a:noFill/>
-            <a:prstDash val="solid"/>
-            <a:miter lim="800000"/>
-          </a:ln>
-          <a:effectLst/>
-          <a:extLst>
-            <a:ext uri="{91240B29-F687-4F45-9708-019B960494DF}">
-              <a14:hiddenLine xmlns:a14="http://schemas.microsoft.com/office/drawing/2010/main" w="12700" cap="flat" cmpd="sng" algn="ctr">
-                <a:solidFill>
-                  <a:schemeClr val="accent1">
-                    <a:shade val="15000"/>
-                  </a:schemeClr>
-                </a:solidFill>
-                <a:prstDash val="solid"/>
-                <a:miter lim="800000"/>
-              </a14:hiddenLine>
-            </a:ext>
-          </a:extLst>
-        </p:spPr>
-        <p:style>
-          <a:lnRef idx="2">
-            <a:schemeClr val="accent1">
-              <a:shade val="15000"/>
-            </a:schemeClr>
-          </a:lnRef>
-          <a:fillRef idx="1">
-            <a:schemeClr val="accent1"/>
-          </a:fillRef>
-          <a:effectRef idx="0">
-            <a:schemeClr val="accent1"/>
-          </a:effectRef>
-          <a:fontRef idx="minor">
-            <a:schemeClr val="lt1"/>
-          </a:fontRef>
-        </p:style>
-        <p:txBody>
-          <a:bodyPr rtlCol="0" anchor="ctr"/>
-          <a:lstStyle/>
-          <a:p>
-            <a:pPr algn="ctr"/>
-            <a:endParaRPr lang="en-US"/>
-          </a:p>
-        </p:txBody>
-      </p:sp>
-    </p:spTree>
-    <p:extLst>
-      <p:ext uri="{BB962C8B-B14F-4D97-AF65-F5344CB8AC3E}">
-        <p14:creationId xmlns:p14="http://schemas.microsoft.com/office/powerpoint/2010/main" val="3444028199"/>
-      </p:ext>
-    </p:extLst>
-  </p:cSld>
-  <p:clrMapOvr>
-    <a:masterClrMapping/>
-  </p:clrMapOvr>
-</p:sld>
-</file>
-
-<file path=ppt/slides/slide31.xml><?xml version="1.0" encoding="utf-8"?>
-<p:sld xmlns:a="http://schemas.openxmlformats.org/drawingml/2006/main" xmlns:r="http://schemas.openxmlformats.org/officeDocument/2006/relationships" xmlns:p="http://schemas.openxmlformats.org/presentationml/2006/main">
-  <p:cSld>
-    <p:spTree>
-      <p:nvGrpSpPr>
-        <p:cNvPr id="1" name=""/>
-        <p:cNvGrpSpPr/>
-        <p:nvPr/>
-      </p:nvGrpSpPr>
-      <p:grpSpPr>
-        <a:xfrm>
-          <a:off x="0" y="0"/>
-          <a:ext cx="0" cy="0"/>
-          <a:chOff x="0" y="0"/>
-          <a:chExt cx="0" cy="0"/>
-        </a:xfrm>
-      </p:grpSpPr>
-      <p:pic>
-        <p:nvPicPr>
-          <p:cNvPr id="7" name="Picture 6">
-            <a:extLst>
-              <a:ext uri="{FF2B5EF4-FFF2-40B4-BE49-F238E27FC236}">
-                <a16:creationId xmlns:a16="http://schemas.microsoft.com/office/drawing/2014/main" id="{0AD4BAC8-DF07-082E-EBA7-3A6128B34D84}"/>
-              </a:ext>
-            </a:extLst>
-          </p:cNvPr>
-          <p:cNvPicPr>
-            <a:picLocks noChangeAspect="1"/>
-          </p:cNvPicPr>
-          <p:nvPr/>
-        </p:nvPicPr>
-        <p:blipFill>
-          <a:blip r:embed="rId2"/>
-          <a:stretch>
-            <a:fillRect/>
-          </a:stretch>
-        </p:blipFill>
-        <p:spPr>
-          <a:xfrm>
-            <a:off x="838200" y="748882"/>
-            <a:ext cx="10306050" cy="5743993"/>
-          </a:xfrm>
-          <a:prstGeom prst="rect">
-            <a:avLst/>
-          </a:prstGeom>
-        </p:spPr>
-      </p:pic>
-      <p:sp>
-        <p:nvSpPr>
-          <p:cNvPr id="14" name="TextBox 13">
-            <a:extLst>
-              <a:ext uri="{FF2B5EF4-FFF2-40B4-BE49-F238E27FC236}">
-                <a16:creationId xmlns:a16="http://schemas.microsoft.com/office/drawing/2014/main" id="{2256D99A-7249-27F8-2F8D-EA0FC4B870BA}"/>
-              </a:ext>
-            </a:extLst>
-          </p:cNvPr>
-          <p:cNvSpPr txBox="1"/>
-          <p:nvPr/>
-        </p:nvSpPr>
-        <p:spPr>
-          <a:xfrm>
-            <a:off x="8899976" y="538404"/>
-            <a:ext cx="2632900" cy="400110"/>
-          </a:xfrm>
-          <a:prstGeom prst="rect">
-            <a:avLst/>
-          </a:prstGeom>
-          <a:noFill/>
-        </p:spPr>
-        <p:txBody>
-          <a:bodyPr wrap="none" rtlCol="0">
-            <a:spAutoFit/>
-          </a:bodyPr>
-          <a:lstStyle/>
-          <a:p>
-            <a:r>
-              <a:rPr lang="en-US" sz="2000" b="1" dirty="0">
-                <a:solidFill>
-                  <a:srgbClr val="0070C0"/>
-                </a:solidFill>
-              </a:rPr>
-              <a:t>Rice </a:t>
-            </a:r>
-            <a:r>
-              <a:rPr lang="en-US" sz="2000" b="1" dirty="0" err="1">
-                <a:solidFill>
-                  <a:srgbClr val="0070C0"/>
-                </a:solidFill>
-              </a:rPr>
-              <a:t>Krispes</a:t>
-            </a:r>
-            <a:r>
-              <a:rPr lang="en-US" sz="2000" b="1" dirty="0">
-                <a:solidFill>
-                  <a:srgbClr val="0070C0"/>
-                </a:solidFill>
-              </a:rPr>
-              <a:t> = 340 (mg)</a:t>
-            </a:r>
-          </a:p>
-        </p:txBody>
-      </p:sp>
-      <p:sp>
-        <p:nvSpPr>
-          <p:cNvPr id="15" name="TextBox 14">
-            <a:extLst>
-              <a:ext uri="{FF2B5EF4-FFF2-40B4-BE49-F238E27FC236}">
-                <a16:creationId xmlns:a16="http://schemas.microsoft.com/office/drawing/2014/main" id="{358554AD-23CC-6BD4-2F40-8A6ED06437AB}"/>
-              </a:ext>
-            </a:extLst>
-          </p:cNvPr>
-          <p:cNvSpPr txBox="1"/>
-          <p:nvPr/>
-        </p:nvSpPr>
-        <p:spPr>
-          <a:xfrm>
-            <a:off x="4998805" y="443992"/>
-            <a:ext cx="1984839" cy="400110"/>
-          </a:xfrm>
-          <a:prstGeom prst="rect">
-            <a:avLst/>
-          </a:prstGeom>
-          <a:noFill/>
-        </p:spPr>
-        <p:txBody>
-          <a:bodyPr wrap="none" rtlCol="0">
-            <a:spAutoFit/>
-          </a:bodyPr>
-          <a:lstStyle/>
-          <a:p>
-            <a:r>
-              <a:rPr lang="en-US" sz="2000" b="1" dirty="0">
-                <a:solidFill>
-                  <a:srgbClr val="FF0000"/>
-                </a:solidFill>
-              </a:rPr>
-              <a:t>Mean = 167 (mg)</a:t>
-            </a:r>
-          </a:p>
-        </p:txBody>
-      </p:sp>
-      <p:sp>
-        <p:nvSpPr>
-          <p:cNvPr id="16" name="Right Brace 15">
-            <a:extLst>
-              <a:ext uri="{FF2B5EF4-FFF2-40B4-BE49-F238E27FC236}">
-                <a16:creationId xmlns:a16="http://schemas.microsoft.com/office/drawing/2014/main" id="{A4E7E84C-0911-1392-D0D5-DA31D45F4D32}"/>
-              </a:ext>
-            </a:extLst>
-          </p:cNvPr>
-          <p:cNvSpPr/>
-          <p:nvPr/>
-        </p:nvSpPr>
-        <p:spPr>
-          <a:xfrm rot="16200000">
-            <a:off x="8100087" y="738701"/>
-            <a:ext cx="249796" cy="4257966"/>
-          </a:xfrm>
-          <a:prstGeom prst="rightBrace">
-            <a:avLst/>
-          </a:prstGeom>
-          <a:ln w="38100">
-            <a:solidFill>
-              <a:schemeClr val="tx1"/>
-            </a:solidFill>
-          </a:ln>
-        </p:spPr>
-        <p:style>
-          <a:lnRef idx="1">
-            <a:schemeClr val="accent1"/>
-          </a:lnRef>
-          <a:fillRef idx="0">
-            <a:schemeClr val="accent1"/>
-          </a:fillRef>
-          <a:effectRef idx="0">
-            <a:schemeClr val="accent1"/>
-          </a:effectRef>
-          <a:fontRef idx="minor">
-            <a:schemeClr val="tx1"/>
-          </a:fontRef>
-        </p:style>
-        <p:txBody>
-          <a:bodyPr rtlCol="0" anchor="ctr"/>
-          <a:lstStyle/>
-          <a:p>
-            <a:pPr algn="ctr"/>
-            <a:endParaRPr lang="en-US"/>
-          </a:p>
-        </p:txBody>
-      </p:sp>
-      <p:cxnSp>
-        <p:nvCxnSpPr>
-          <p:cNvPr id="17" name="Straight Arrow Connector 16">
-            <a:extLst>
-              <a:ext uri="{FF2B5EF4-FFF2-40B4-BE49-F238E27FC236}">
-                <a16:creationId xmlns:a16="http://schemas.microsoft.com/office/drawing/2014/main" id="{60572141-56E1-D65C-762A-8EB6762F1B7E}"/>
-              </a:ext>
-            </a:extLst>
-          </p:cNvPr>
-          <p:cNvCxnSpPr>
-            <a:cxnSpLocks/>
-          </p:cNvCxnSpPr>
-          <p:nvPr/>
-        </p:nvCxnSpPr>
-        <p:spPr>
-          <a:xfrm>
-            <a:off x="10420350" y="844102"/>
-            <a:ext cx="0" cy="4503175"/>
-          </a:xfrm>
-          <a:prstGeom prst="straightConnector1">
-            <a:avLst/>
-          </a:prstGeom>
-          <a:ln w="76200">
-            <a:solidFill>
-              <a:srgbClr val="0070C0"/>
-            </a:solidFill>
-            <a:tailEnd type="triangle"/>
-          </a:ln>
-        </p:spPr>
-        <p:style>
-          <a:lnRef idx="1">
-            <a:schemeClr val="accent1"/>
-          </a:lnRef>
-          <a:fillRef idx="0">
-            <a:schemeClr val="accent1"/>
-          </a:fillRef>
-          <a:effectRef idx="0">
-            <a:schemeClr val="accent1"/>
-          </a:effectRef>
-          <a:fontRef idx="minor">
-            <a:schemeClr val="tx1"/>
-          </a:fontRef>
-        </p:style>
-      </p:cxnSp>
-      <mc:AlternateContent xmlns:mc="http://schemas.openxmlformats.org/markup-compatibility/2006" xmlns:a14="http://schemas.microsoft.com/office/drawing/2010/main">
-        <mc:Choice Requires="a14">
-          <p:sp>
-            <p:nvSpPr>
-              <p:cNvPr id="20" name="TextBox 19">
-                <a:extLst>
-                  <a:ext uri="{FF2B5EF4-FFF2-40B4-BE49-F238E27FC236}">
-                    <a16:creationId xmlns:a16="http://schemas.microsoft.com/office/drawing/2014/main" id="{D9182893-F575-370F-93FD-AABD46DB5B34}"/>
-                  </a:ext>
-                </a:extLst>
-              </p:cNvPr>
-              <p:cNvSpPr txBox="1"/>
-              <p:nvPr/>
-            </p:nvSpPr>
-            <p:spPr>
-              <a:xfrm>
-                <a:off x="7328629" y="2282563"/>
-                <a:ext cx="2072682" cy="307777"/>
-              </a:xfrm>
-              <a:prstGeom prst="rect">
-                <a:avLst/>
-              </a:prstGeom>
-              <a:noFill/>
-            </p:spPr>
-            <p:txBody>
-              <a:bodyPr wrap="none" lIns="0" tIns="0" rIns="0" bIns="0" rtlCol="0">
-                <a:spAutoFit/>
-              </a:bodyPr>
-              <a:lstStyle/>
-              <a:p>
-                <a:pPr/>
-                <a14:m>
-                  <m:oMathPara xmlns:m="http://schemas.openxmlformats.org/officeDocument/2006/math">
-                    <m:oMath>
-                      <m:r>
-                        <a:rPr lang="en-US" sz="2000" b="0" i="1" smtClean="0">
-                          <a:latin typeface="Cambria Math" panose="02040503050406030204" pitchFamily="18" charset="0"/>
-                        </a:rPr>
-                        <m:t>340 −167=</m:t>
-                      </m:r>
-                      <m:r>
-                        <a:rPr lang="en-US" sz="2000" b="1" i="1" smtClean="0">
-                          <a:latin typeface="Cambria Math" panose="02040503050406030204" pitchFamily="18" charset="0"/>
-                        </a:rPr>
-                        <m:t>𝟏𝟕𝟑</m:t>
-                      </m:r>
-                    </m:oMath>
-                  </m:oMathPara>
-                </a14:m>
-                <a:endParaRPr lang="en-US" b="1" dirty="0"/>
-              </a:p>
-            </p:txBody>
-          </p:sp>
-        </mc:Choice>
-        <mc:Fallback xmlns="">
-          <p:sp>
-            <p:nvSpPr>
-              <p:cNvPr id="20" name="TextBox 19">
-                <a:extLst>
-                  <a:ext uri="{FF2B5EF4-FFF2-40B4-BE49-F238E27FC236}">
-                    <a16:creationId xmlns:a16="http://schemas.microsoft.com/office/drawing/2014/main" id="{D9182893-F575-370F-93FD-AABD46DB5B34}"/>
-                  </a:ext>
-                </a:extLst>
-              </p:cNvPr>
-              <p:cNvSpPr txBox="1">
-                <a:spLocks noRot="1" noChangeAspect="1" noMove="1" noResize="1" noEditPoints="1" noAdjustHandles="1" noChangeArrowheads="1" noChangeShapeType="1" noTextEdit="1"/>
-              </p:cNvSpPr>
-              <p:nvPr/>
-            </p:nvSpPr>
-            <p:spPr>
-              <a:xfrm>
-                <a:off x="7328629" y="2282563"/>
-                <a:ext cx="2072682" cy="307777"/>
-              </a:xfrm>
-              <a:prstGeom prst="rect">
-                <a:avLst/>
-              </a:prstGeom>
-              <a:blipFill>
-                <a:blip r:embed="rId3"/>
-                <a:stretch>
-                  <a:fillRect l="-2353" r="-2647" b="-5882"/>
-                </a:stretch>
-              </a:blipFill>
-            </p:spPr>
-            <p:txBody>
-              <a:bodyPr/>
-              <a:lstStyle/>
-              <a:p>
-                <a:r>
-                  <a:rPr lang="en-US">
-                    <a:noFill/>
-                  </a:rPr>
-                  <a:t> </a:t>
-                </a:r>
-              </a:p>
-            </p:txBody>
-          </p:sp>
-        </mc:Fallback>
-      </mc:AlternateContent>
-      <p:cxnSp>
-        <p:nvCxnSpPr>
-          <p:cNvPr id="21" name="Straight Arrow Connector 20">
-            <a:extLst>
-              <a:ext uri="{FF2B5EF4-FFF2-40B4-BE49-F238E27FC236}">
-                <a16:creationId xmlns:a16="http://schemas.microsoft.com/office/drawing/2014/main" id="{37A10761-3E76-A720-4A01-BCEED23A554E}"/>
-              </a:ext>
-            </a:extLst>
-          </p:cNvPr>
-          <p:cNvCxnSpPr>
-            <a:cxnSpLocks/>
-          </p:cNvCxnSpPr>
-          <p:nvPr/>
-        </p:nvCxnSpPr>
-        <p:spPr>
-          <a:xfrm>
-            <a:off x="1816678" y="844102"/>
-            <a:ext cx="0" cy="4503175"/>
-          </a:xfrm>
-          <a:prstGeom prst="straightConnector1">
-            <a:avLst/>
-          </a:prstGeom>
-          <a:ln w="76200">
-            <a:solidFill>
-              <a:srgbClr val="00B050"/>
-            </a:solidFill>
-            <a:tailEnd type="triangle"/>
-          </a:ln>
-        </p:spPr>
-        <p:style>
-          <a:lnRef idx="1">
-            <a:schemeClr val="accent1"/>
-          </a:lnRef>
-          <a:fillRef idx="0">
-            <a:schemeClr val="accent1"/>
-          </a:fillRef>
-          <a:effectRef idx="0">
-            <a:schemeClr val="accent1"/>
-          </a:effectRef>
-          <a:fontRef idx="minor">
-            <a:schemeClr val="tx1"/>
-          </a:fontRef>
-        </p:style>
-      </p:cxnSp>
-      <p:sp>
-        <p:nvSpPr>
-          <p:cNvPr id="22" name="TextBox 21">
-            <a:extLst>
-              <a:ext uri="{FF2B5EF4-FFF2-40B4-BE49-F238E27FC236}">
-                <a16:creationId xmlns:a16="http://schemas.microsoft.com/office/drawing/2014/main" id="{7C28DDED-55BC-DD33-5745-B9634F33AA7B}"/>
-              </a:ext>
-            </a:extLst>
-          </p:cNvPr>
-          <p:cNvSpPr txBox="1"/>
-          <p:nvPr/>
-        </p:nvSpPr>
-        <p:spPr>
-          <a:xfrm>
-            <a:off x="378598" y="338349"/>
-            <a:ext cx="3319820" cy="400110"/>
-          </a:xfrm>
-          <a:prstGeom prst="rect">
-            <a:avLst/>
-          </a:prstGeom>
-          <a:noFill/>
-        </p:spPr>
-        <p:txBody>
-          <a:bodyPr wrap="none" rtlCol="0">
-            <a:spAutoFit/>
-          </a:bodyPr>
-          <a:lstStyle/>
-          <a:p>
-            <a:r>
-              <a:rPr lang="en-US" sz="2000" b="1" dirty="0">
-                <a:solidFill>
-                  <a:srgbClr val="00B050"/>
-                </a:solidFill>
-              </a:rPr>
-              <a:t>Frosted Mini Wheats = 0 (mg)</a:t>
-            </a:r>
-          </a:p>
-        </p:txBody>
-      </p:sp>
-      <p:sp>
-        <p:nvSpPr>
-          <p:cNvPr id="23" name="Right Brace 22">
-            <a:extLst>
-              <a:ext uri="{FF2B5EF4-FFF2-40B4-BE49-F238E27FC236}">
-                <a16:creationId xmlns:a16="http://schemas.microsoft.com/office/drawing/2014/main" id="{F14E752A-1AFD-2EE1-5241-D58BCCB24693}"/>
-              </a:ext>
-            </a:extLst>
-          </p:cNvPr>
-          <p:cNvSpPr/>
-          <p:nvPr/>
-        </p:nvSpPr>
-        <p:spPr>
-          <a:xfrm rot="16200000">
-            <a:off x="3787077" y="-99858"/>
-            <a:ext cx="239373" cy="4168922"/>
-          </a:xfrm>
-          <a:prstGeom prst="rightBrace">
-            <a:avLst/>
-          </a:prstGeom>
-          <a:ln w="38100">
-            <a:solidFill>
-              <a:schemeClr val="tx1"/>
-            </a:solidFill>
-          </a:ln>
-        </p:spPr>
-        <p:style>
-          <a:lnRef idx="1">
-            <a:schemeClr val="accent1"/>
-          </a:lnRef>
-          <a:fillRef idx="0">
-            <a:schemeClr val="accent1"/>
-          </a:fillRef>
-          <a:effectRef idx="0">
-            <a:schemeClr val="accent1"/>
-          </a:effectRef>
-          <a:fontRef idx="minor">
-            <a:schemeClr val="tx1"/>
-          </a:fontRef>
-        </p:style>
-        <p:txBody>
-          <a:bodyPr rtlCol="0" anchor="ctr"/>
-          <a:lstStyle/>
-          <a:p>
-            <a:pPr algn="ctr"/>
-            <a:endParaRPr lang="en-US"/>
-          </a:p>
-        </p:txBody>
-      </p:sp>
-      <mc:AlternateContent xmlns:mc="http://schemas.openxmlformats.org/markup-compatibility/2006" xmlns:a14="http://schemas.microsoft.com/office/drawing/2010/main">
-        <mc:Choice Requires="a14">
-          <p:sp>
-            <p:nvSpPr>
-              <p:cNvPr id="24" name="TextBox 23">
-                <a:extLst>
-                  <a:ext uri="{FF2B5EF4-FFF2-40B4-BE49-F238E27FC236}">
-                    <a16:creationId xmlns:a16="http://schemas.microsoft.com/office/drawing/2014/main" id="{A4312EA1-A247-DCFB-9E28-98A481EE5EBD}"/>
-                  </a:ext>
-                </a:extLst>
-              </p:cNvPr>
-              <p:cNvSpPr txBox="1"/>
-              <p:nvPr/>
-            </p:nvSpPr>
-            <p:spPr>
-              <a:xfrm>
-                <a:off x="3084520" y="1485666"/>
-                <a:ext cx="1979709" cy="307777"/>
-              </a:xfrm>
-              <a:prstGeom prst="rect">
-                <a:avLst/>
-              </a:prstGeom>
-              <a:noFill/>
-            </p:spPr>
-            <p:txBody>
-              <a:bodyPr wrap="none" lIns="0" tIns="0" rIns="0" bIns="0" rtlCol="0">
-                <a:spAutoFit/>
-              </a:bodyPr>
-              <a:lstStyle/>
-              <a:p>
-                <a:pPr/>
-                <a14:m>
-                  <m:oMathPara xmlns:m="http://schemas.openxmlformats.org/officeDocument/2006/math">
-                    <m:oMath>
-                      <m:r>
-                        <a:rPr lang="en-US" sz="2000" b="0" i="1" smtClean="0">
-                          <a:latin typeface="Cambria Math" panose="02040503050406030204" pitchFamily="18" charset="0"/>
-                        </a:rPr>
-                        <m:t>0 −167=</m:t>
-                      </m:r>
-                      <m:r>
-                        <a:rPr lang="en-US" sz="2000" b="1" i="1" smtClean="0">
-                          <a:latin typeface="Cambria Math" panose="02040503050406030204" pitchFamily="18" charset="0"/>
-                        </a:rPr>
-                        <m:t>−</m:t>
-                      </m:r>
-                      <m:r>
-                        <a:rPr lang="en-US" sz="2000" b="1" i="1" smtClean="0">
-                          <a:latin typeface="Cambria Math" panose="02040503050406030204" pitchFamily="18" charset="0"/>
-                        </a:rPr>
-                        <m:t>𝟏𝟔𝟕</m:t>
-                      </m:r>
-                    </m:oMath>
-                  </m:oMathPara>
-                </a14:m>
-                <a:endParaRPr lang="en-US" b="1" dirty="0"/>
-              </a:p>
-            </p:txBody>
-          </p:sp>
-        </mc:Choice>
-        <mc:Fallback xmlns="">
-          <p:sp>
-            <p:nvSpPr>
-              <p:cNvPr id="24" name="TextBox 23">
-                <a:extLst>
-                  <a:ext uri="{FF2B5EF4-FFF2-40B4-BE49-F238E27FC236}">
-                    <a16:creationId xmlns:a16="http://schemas.microsoft.com/office/drawing/2014/main" id="{A4312EA1-A247-DCFB-9E28-98A481EE5EBD}"/>
-                  </a:ext>
-                </a:extLst>
-              </p:cNvPr>
-              <p:cNvSpPr txBox="1">
-                <a:spLocks noRot="1" noChangeAspect="1" noMove="1" noResize="1" noEditPoints="1" noAdjustHandles="1" noChangeArrowheads="1" noChangeShapeType="1" noTextEdit="1"/>
-              </p:cNvSpPr>
-              <p:nvPr/>
-            </p:nvSpPr>
-            <p:spPr>
-              <a:xfrm>
-                <a:off x="3084520" y="1485666"/>
-                <a:ext cx="1979709" cy="307777"/>
-              </a:xfrm>
-              <a:prstGeom prst="rect">
-                <a:avLst/>
-              </a:prstGeom>
-              <a:blipFill>
-                <a:blip r:embed="rId4"/>
-                <a:stretch>
-                  <a:fillRect l="-2769" r="-2154" b="-6000"/>
-                </a:stretch>
-              </a:blipFill>
-            </p:spPr>
-            <p:txBody>
-              <a:bodyPr/>
-              <a:lstStyle/>
-              <a:p>
-                <a:r>
-                  <a:rPr lang="en-US">
-                    <a:noFill/>
-                  </a:rPr>
-                  <a:t> </a:t>
-                </a:r>
-              </a:p>
-            </p:txBody>
-          </p:sp>
-        </mc:Fallback>
-      </mc:AlternateContent>
-      <p:sp>
-        <p:nvSpPr>
-          <p:cNvPr id="2" name="Slide Number Placeholder 1">
-            <a:extLst>
-              <a:ext uri="{FF2B5EF4-FFF2-40B4-BE49-F238E27FC236}">
-                <a16:creationId xmlns:a16="http://schemas.microsoft.com/office/drawing/2014/main" id="{5E1622FF-13C1-B17C-CD0D-D92F5A2438BA}"/>
-              </a:ext>
-            </a:extLst>
-          </p:cNvPr>
-          <p:cNvSpPr>
-            <a:spLocks noGrp="1"/>
-          </p:cNvSpPr>
-          <p:nvPr>
-            <p:ph type="sldNum" sz="quarter" idx="12"/>
-          </p:nvPr>
-        </p:nvSpPr>
-        <p:spPr/>
-        <p:txBody>
-          <a:bodyPr/>
-          <a:lstStyle/>
-          <a:p>
-            <a:fld id="{A80A81DD-F10A-4B1C-963A-0ABBB4865886}" type="slidenum">
-              <a:rPr lang="en-US" smtClean="0"/>
-              <a:t>31</a:t>
-            </a:fld>
-            <a:endParaRPr lang="en-US"/>
-          </a:p>
-        </p:txBody>
-      </p:sp>
-    </p:spTree>
-    <p:extLst>
-      <p:ext uri="{BB962C8B-B14F-4D97-AF65-F5344CB8AC3E}">
-        <p14:creationId xmlns:p14="http://schemas.microsoft.com/office/powerpoint/2010/main" val="4153340645"/>
-      </p:ext>
-    </p:extLst>
-  </p:cSld>
-  <p:clrMapOvr>
-    <a:masterClrMapping/>
-  </p:clrMapOvr>
-</p:sld>
-</file>
-
-<file path=ppt/slides/slide32.xml><?xml version="1.0" encoding="utf-8"?>
-<p:sld xmlns:a="http://schemas.openxmlformats.org/drawingml/2006/main" xmlns:r="http://schemas.openxmlformats.org/officeDocument/2006/relationships" xmlns:p="http://schemas.openxmlformats.org/presentationml/2006/main">
-  <p:cSld>
-    <p:spTree>
-      <p:nvGrpSpPr>
-        <p:cNvPr id="1" name=""/>
-        <p:cNvGrpSpPr/>
-        <p:nvPr/>
-      </p:nvGrpSpPr>
-      <p:grpSpPr>
-        <a:xfrm>
-          <a:off x="0" y="0"/>
-          <a:ext cx="0" cy="0"/>
-          <a:chOff x="0" y="0"/>
-          <a:chExt cx="0" cy="0"/>
-        </a:xfrm>
-      </p:grpSpPr>
-      <p:sp>
-        <p:nvSpPr>
-          <p:cNvPr id="6" name="Body card">
-            <a:extLst>
-              <a:ext uri="{FF2B5EF4-FFF2-40B4-BE49-F238E27FC236}">
-                <a16:creationId xmlns:a16="http://schemas.microsoft.com/office/drawing/2014/main" id="{ADA239E0-422E-62C2-D03D-DCFDFA55E2C8}"/>
-              </a:ext>
-            </a:extLst>
-          </p:cNvPr>
-          <p:cNvSpPr/>
-          <p:nvPr/>
-        </p:nvSpPr>
-        <p:spPr>
-          <a:xfrm>
-            <a:off x="635000" y="1676400"/>
-            <a:ext cx="10922000" cy="4368800"/>
-          </a:xfrm>
-          <a:prstGeom prst="roundRect">
-            <a:avLst>
-              <a:gd name="adj" fmla="val 3000"/>
-            </a:avLst>
-          </a:prstGeom>
-          <a:solidFill>
-            <a:srgbClr val="F2F6FC"/>
-          </a:solidFill>
-          <a:ln w="19050">
-            <a:solidFill>
-              <a:srgbClr val="4472C4"/>
-            </a:solidFill>
-          </a:ln>
-        </p:spPr>
-        <p:style>
-          <a:lnRef idx="2">
-            <a:schemeClr val="accent1">
-              <a:shade val="15000"/>
-            </a:schemeClr>
-          </a:lnRef>
-          <a:fillRef idx="1">
-            <a:schemeClr val="accent1"/>
-          </a:fillRef>
-          <a:effectRef idx="0">
-            <a:schemeClr val="accent1"/>
-          </a:effectRef>
-          <a:fontRef idx="minor">
-            <a:schemeClr val="lt1"/>
-          </a:fontRef>
-        </p:style>
-        <p:txBody>
-          <a:bodyPr rtlCol="0" anchor="ctr"/>
-          <a:lstStyle/>
-          <a:p>
-            <a:pPr algn="ctr"/>
-            <a:endParaRPr lang="en-US"/>
-          </a:p>
-        </p:txBody>
-      </p:sp>
-      <p:sp>
-        <p:nvSpPr>
-          <p:cNvPr id="2" name="Title 1">
-            <a:extLst>
-              <a:ext uri="{FF2B5EF4-FFF2-40B4-BE49-F238E27FC236}">
-                <a16:creationId xmlns:a16="http://schemas.microsoft.com/office/drawing/2014/main" id="{F3D51D9B-D3D0-4DD3-432B-B05376CC17A0}"/>
-              </a:ext>
-            </a:extLst>
-          </p:cNvPr>
-          <p:cNvSpPr>
-            <a:spLocks noGrp="1"/>
-          </p:cNvSpPr>
-          <p:nvPr>
-            <p:ph type="title"/>
-          </p:nvPr>
-        </p:nvSpPr>
-        <p:spPr/>
-        <p:txBody>
-          <a:bodyPr/>
-          <a:lstStyle/>
-          <a:p>
-            <a:r>
-              <a:rPr lang="en-US" dirty="0">
-                <a:solidFill>
-                  <a:srgbClr val="1F3864"/>
-                </a:solidFill>
-              </a:rPr>
-              <a:t>Measures of Spread: Variance</a:t>
-            </a:r>
-          </a:p>
-        </p:txBody>
-      </p:sp>
-      <mc:AlternateContent xmlns:mc="http://schemas.openxmlformats.org/markup-compatibility/2006">
-        <mc:Choice xmlns:a14="http://schemas.microsoft.com/office/drawing/2010/main" Requires="a14">
-          <p:sp>
-            <p:nvSpPr>
-              <p:cNvPr id="3" name="Content Placeholder 2">
-                <a:extLst>
-                  <a:ext uri="{FF2B5EF4-FFF2-40B4-BE49-F238E27FC236}">
-                    <a16:creationId xmlns:a16="http://schemas.microsoft.com/office/drawing/2014/main" id="{9824D4B1-FB15-A405-14E1-A713E04E3964}"/>
-                  </a:ext>
-                </a:extLst>
-              </p:cNvPr>
-              <p:cNvSpPr>
-                <a:spLocks noGrp="1"/>
-              </p:cNvSpPr>
-              <p:nvPr>
-                <p:ph idx="1"/>
-              </p:nvPr>
-            </p:nvSpPr>
-            <p:spPr/>
-            <p:txBody>
-              <a:bodyPr>
-                <a:normAutofit fontScale="92500" lnSpcReduction="20000"/>
-              </a:bodyPr>
-              <a:lstStyle/>
-              <a:p>
-                <a:r>
-                  <a:rPr lang="en-US" dirty="0"/>
-                  <a:t>The sum of all deviations is zero.  </a:t>
-                </a:r>
-                <a14:m>
-                  <m:oMath xmlns:m="http://schemas.openxmlformats.org/officeDocument/2006/math">
-                    <m:nary>
-                      <m:naryPr>
-                        <m:chr m:val="∑"/>
-                        <m:ctrlPr>
-                          <a:rPr lang="en-US" b="0" i="1" smtClean="0">
-                            <a:latin typeface="Cambria Math" panose="02040503050406030204" pitchFamily="18" charset="0"/>
-                          </a:rPr>
-                        </m:ctrlPr>
-                      </m:naryPr>
-                      <m:sub>
-                        <m:r>
-                          <m:rPr>
-                            <m:brk m:alnAt="23"/>
-                          </m:rPr>
-                          <a:rPr lang="en-US" b="0" i="1" smtClean="0">
-                            <a:latin typeface="Cambria Math" panose="02040503050406030204" pitchFamily="18" charset="0"/>
-                          </a:rPr>
-                          <m:t>𝑖</m:t>
-                        </m:r>
-                        <m:r>
-                          <a:rPr lang="en-US" b="0" i="1" smtClean="0">
-                            <a:latin typeface="Cambria Math" panose="02040503050406030204" pitchFamily="18" charset="0"/>
-                          </a:rPr>
-                          <m:t>=1</m:t>
-                        </m:r>
-                      </m:sub>
-                      <m:sup>
-                        <m:r>
-                          <a:rPr lang="en-US" b="0" i="1" smtClean="0">
-                            <a:latin typeface="Cambria Math" panose="02040503050406030204" pitchFamily="18" charset="0"/>
-                          </a:rPr>
-                          <m:t>𝑛</m:t>
-                        </m:r>
-                      </m:sup>
-                      <m:e>
-                        <m:r>
-                          <a:rPr lang="en-US" b="0" i="1" smtClean="0">
-                            <a:latin typeface="Cambria Math" panose="02040503050406030204" pitchFamily="18" charset="0"/>
-                          </a:rPr>
-                          <m:t>(</m:t>
-                        </m:r>
-                        <m:sSub>
-                          <m:sSubPr>
-                            <m:ctrlPr>
-                              <a:rPr lang="en-US" b="0" i="1" smtClean="0">
-                                <a:latin typeface="Cambria Math" panose="02040503050406030204" pitchFamily="18" charset="0"/>
-                              </a:rPr>
-                            </m:ctrlPr>
-                          </m:sSubPr>
-                          <m:e>
-                            <m:r>
-                              <a:rPr lang="en-US" b="0" i="1" smtClean="0">
-                                <a:latin typeface="Cambria Math" panose="02040503050406030204" pitchFamily="18" charset="0"/>
-                              </a:rPr>
-                              <m:t>𝑥</m:t>
-                            </m:r>
-                          </m:e>
-                          <m:sub>
-                            <m:r>
-                              <a:rPr lang="en-US" b="0" i="1" smtClean="0">
-                                <a:latin typeface="Cambria Math" panose="02040503050406030204" pitchFamily="18" charset="0"/>
-                              </a:rPr>
-                              <m:t>𝑖</m:t>
-                            </m:r>
-                          </m:sub>
-                        </m:sSub>
-                        <m:r>
-                          <a:rPr lang="en-US" b="0" i="1" smtClean="0">
-                            <a:latin typeface="Cambria Math" panose="02040503050406030204" pitchFamily="18" charset="0"/>
-                          </a:rPr>
-                          <m:t> − </m:t>
-                        </m:r>
-                        <m:acc>
-                          <m:accPr>
-                            <m:chr m:val="̅"/>
-                            <m:ctrlPr>
-                              <a:rPr lang="en-US" b="0" i="1" smtClean="0">
-                                <a:latin typeface="Cambria Math" panose="02040503050406030204" pitchFamily="18" charset="0"/>
-                              </a:rPr>
-                            </m:ctrlPr>
-                          </m:accPr>
-                          <m:e>
-                            <m:r>
-                              <a:rPr lang="en-US" b="0" i="1" smtClean="0">
-                                <a:latin typeface="Cambria Math" panose="02040503050406030204" pitchFamily="18" charset="0"/>
-                              </a:rPr>
-                              <m:t>𝑥</m:t>
-                            </m:r>
-                          </m:e>
-                        </m:acc>
-                        <m:r>
-                          <a:rPr lang="en-US" b="0" i="1" smtClean="0">
-                            <a:latin typeface="Cambria Math" panose="02040503050406030204" pitchFamily="18" charset="0"/>
-                          </a:rPr>
-                          <m:t>)</m:t>
-                        </m:r>
-                      </m:e>
-                    </m:nary>
-                    <m:r>
-                      <a:rPr lang="en-US" b="0" i="1" smtClean="0">
-                        <a:latin typeface="Cambria Math" panose="02040503050406030204" pitchFamily="18" charset="0"/>
-                      </a:rPr>
-                      <m:t>=</m:t>
-                    </m:r>
-                    <m:r>
-                      <a:rPr lang="en-US" b="0" i="1" smtClean="0">
-                        <a:latin typeface="Cambria Math" panose="02040503050406030204" pitchFamily="18" charset="0"/>
-                        <a:ea typeface="Cambria Math" panose="02040503050406030204" pitchFamily="18" charset="0"/>
-                      </a:rPr>
-                      <m:t>0</m:t>
-                    </m:r>
-                  </m:oMath>
-                </a14:m>
-                <a:endParaRPr lang="en-US" dirty="0"/>
-              </a:p>
-              <a:p>
-                <a:endParaRPr lang="en-US" dirty="0"/>
-              </a:p>
-              <a:p>
-                <a:r>
-                  <a:rPr lang="en-US" dirty="0"/>
-                  <a:t>We typically use either the </a:t>
-                </a:r>
-                <a:r>
-                  <a:rPr lang="en-US" b="1" dirty="0">
-                    <a:solidFill>
-                      <a:srgbClr val="C00000"/>
-                    </a:solidFill>
-                  </a:rPr>
-                  <a:t>squared deviations</a:t>
-                </a:r>
-                <a:r>
-                  <a:rPr lang="en-US" dirty="0"/>
-                  <a:t> or their </a:t>
-                </a:r>
-                <a:r>
-                  <a:rPr lang="en-US" b="1" dirty="0">
-                    <a:solidFill>
-                      <a:srgbClr val="C00000"/>
-                    </a:solidFill>
-                  </a:rPr>
-                  <a:t>absolute value</a:t>
-                </a:r>
-              </a:p>
-              <a:p>
-                <a:pPr marL="914400" lvl="2" indent="0">
-                  <a:buNone/>
-                </a:pPr>
-                <a:r>
-                  <a:rPr lang="en-US" sz="2400" dirty="0"/>
-                  <a:t>Squared deviation of an observation </a:t>
-                </a:r>
-                <a14:m>
-                  <m:oMath xmlns:m="http://schemas.openxmlformats.org/officeDocument/2006/math">
-                    <m:sSub>
-                      <m:sSubPr>
-                        <m:ctrlPr>
-                          <a:rPr lang="en-US" sz="2400" b="0" i="1" smtClean="0">
-                            <a:latin typeface="Cambria Math" panose="02040503050406030204" pitchFamily="18" charset="0"/>
-                          </a:rPr>
-                        </m:ctrlPr>
-                      </m:sSubPr>
-                      <m:e>
-                        <m:r>
-                          <a:rPr lang="en-US" sz="2400" b="0" i="1" smtClean="0">
-                            <a:latin typeface="Cambria Math" panose="02040503050406030204" pitchFamily="18" charset="0"/>
-                          </a:rPr>
-                          <m:t>𝑥</m:t>
-                        </m:r>
-                      </m:e>
-                      <m:sub>
-                        <m:r>
-                          <a:rPr lang="en-US" sz="2400" b="0" i="1" smtClean="0">
-                            <a:latin typeface="Cambria Math" panose="02040503050406030204" pitchFamily="18" charset="0"/>
-                          </a:rPr>
-                          <m:t>𝑖</m:t>
-                        </m:r>
-                      </m:sub>
-                    </m:sSub>
-                    <m:r>
-                      <a:rPr lang="en-US" sz="2400" b="0" i="1" smtClean="0">
-                        <a:latin typeface="Cambria Math" panose="02040503050406030204" pitchFamily="18" charset="0"/>
-                      </a:rPr>
-                      <m:t>= </m:t>
-                    </m:r>
-                    <m:sSup>
-                      <m:sSupPr>
-                        <m:ctrlPr>
-                          <a:rPr lang="en-US" sz="2400" i="1" smtClean="0">
-                            <a:latin typeface="Cambria Math" panose="02040503050406030204" pitchFamily="18" charset="0"/>
-                          </a:rPr>
-                        </m:ctrlPr>
-                      </m:sSupPr>
-                      <m:e>
-                        <m:d>
-                          <m:dPr>
-                            <m:ctrlPr>
-                              <a:rPr lang="en-US" sz="2400" b="0" i="1" smtClean="0">
-                                <a:latin typeface="Cambria Math" panose="02040503050406030204" pitchFamily="18" charset="0"/>
-                              </a:rPr>
-                            </m:ctrlPr>
-                          </m:dPr>
-                          <m:e>
-                            <m:sSub>
-                              <m:sSubPr>
-                                <m:ctrlPr>
-                                  <a:rPr lang="en-US" sz="2400" b="0" i="1" smtClean="0">
-                                    <a:latin typeface="Cambria Math" panose="02040503050406030204" pitchFamily="18" charset="0"/>
-                                  </a:rPr>
-                                </m:ctrlPr>
-                              </m:sSubPr>
-                              <m:e>
-                                <m:r>
-                                  <a:rPr lang="en-US" sz="2400" b="0" i="1" smtClean="0">
-                                    <a:latin typeface="Cambria Math" panose="02040503050406030204" pitchFamily="18" charset="0"/>
-                                  </a:rPr>
-                                  <m:t>𝑥</m:t>
-                                </m:r>
-                              </m:e>
-                              <m:sub>
-                                <m:r>
-                                  <a:rPr lang="en-US" sz="2400" b="0" i="1" smtClean="0">
-                                    <a:latin typeface="Cambria Math" panose="02040503050406030204" pitchFamily="18" charset="0"/>
-                                  </a:rPr>
-                                  <m:t>𝑖</m:t>
-                                </m:r>
-                              </m:sub>
-                            </m:sSub>
-                            <m:r>
-                              <a:rPr lang="en-US" sz="2400" b="0" i="1" smtClean="0">
-                                <a:latin typeface="Cambria Math" panose="02040503050406030204" pitchFamily="18" charset="0"/>
-                              </a:rPr>
-                              <m:t>− </m:t>
-                            </m:r>
-                            <m:acc>
-                              <m:accPr>
-                                <m:chr m:val="̅"/>
-                                <m:ctrlPr>
-                                  <a:rPr lang="en-US" sz="2400" b="0" i="1" smtClean="0">
-                                    <a:latin typeface="Cambria Math" panose="02040503050406030204" pitchFamily="18" charset="0"/>
-                                  </a:rPr>
-                                </m:ctrlPr>
-                              </m:accPr>
-                              <m:e>
-                                <m:r>
-                                  <a:rPr lang="en-US" sz="2400" b="0" i="1" smtClean="0">
-                                    <a:latin typeface="Cambria Math" panose="02040503050406030204" pitchFamily="18" charset="0"/>
-                                  </a:rPr>
-                                  <m:t>𝑥</m:t>
-                                </m:r>
-                              </m:e>
-                            </m:acc>
-                          </m:e>
-                        </m:d>
-                      </m:e>
-                      <m:sup>
-                        <m:r>
-                          <a:rPr lang="en-US" sz="2400" b="0" i="1" smtClean="0">
-                            <a:latin typeface="Cambria Math" panose="02040503050406030204" pitchFamily="18" charset="0"/>
-                          </a:rPr>
-                          <m:t>2</m:t>
-                        </m:r>
-                      </m:sup>
-                    </m:sSup>
-                  </m:oMath>
-                </a14:m>
-                <a:endParaRPr lang="en-US" dirty="0"/>
-              </a:p>
-              <a:p>
-                <a:pPr marL="914400" lvl="2" indent="0">
-                  <a:buNone/>
-                </a:pPr>
-                <a:endParaRPr lang="en-US" dirty="0"/>
-              </a:p>
-              <a:p>
-                <a:r>
-                  <a:rPr lang="en-US" dirty="0"/>
-                  <a:t>The </a:t>
-                </a:r>
-                <a:r>
-                  <a:rPr lang="en-US" b="1" dirty="0">
-                    <a:solidFill>
-                      <a:srgbClr val="C00000"/>
-                    </a:solidFill>
-                  </a:rPr>
-                  <a:t>Variance </a:t>
-                </a:r>
-                <a:r>
-                  <a:rPr lang="en-US" dirty="0"/>
-                  <a:t>of a distribution is the </a:t>
-                </a:r>
-                <a:r>
-                  <a:rPr lang="en-US" u="sng" dirty="0"/>
-                  <a:t>average</a:t>
-                </a:r>
-                <a:r>
-                  <a:rPr lang="en-US" dirty="0"/>
-                  <a:t> squared deviation from the mean</a:t>
-                </a:r>
-              </a:p>
-              <a:p>
-                <a:pPr marL="1828800" lvl="4" indent="0">
-                  <a:buNone/>
-                </a:pPr>
-                <a14:m>
-                  <m:oMathPara xmlns:m="http://schemas.openxmlformats.org/officeDocument/2006/math">
-                    <m:oMath>
-                      <m:sSup>
-                        <m:sSupPr>
-                          <m:ctrlPr>
-                            <a:rPr lang="en-US" sz="2400" i="1" smtClean="0">
-                              <a:latin typeface="Cambria Math" panose="02040503050406030204" pitchFamily="18" charset="0"/>
-                            </a:rPr>
-                          </m:ctrlPr>
-                        </m:sSupPr>
-                        <m:e>
-                          <m:r>
-                            <a:rPr lang="en-US" sz="2400" i="1" smtClean="0">
-                              <a:latin typeface="Cambria Math" panose="02040503050406030204" pitchFamily="18" charset="0"/>
-                            </a:rPr>
-                            <m:t>𝑆</m:t>
-                          </m:r>
-                        </m:e>
-                        <m:sup>
-                          <m:r>
-                            <a:rPr lang="en-US" sz="2400" i="1" smtClean="0">
-                              <a:latin typeface="Cambria Math" panose="02040503050406030204" pitchFamily="18" charset="0"/>
-                            </a:rPr>
-                            <m:t>2</m:t>
-                          </m:r>
-                        </m:sup>
-                      </m:sSup>
-                      <m:r>
-                        <a:rPr lang="en-US" sz="2400" i="1" smtClean="0">
-                          <a:latin typeface="Cambria Math" panose="02040503050406030204" pitchFamily="18" charset="0"/>
-                        </a:rPr>
-                        <m:t>=</m:t>
-                      </m:r>
-                      <m:f>
-                        <m:fPr>
-                          <m:ctrlPr>
-                            <a:rPr lang="en-US" sz="2400" i="1" smtClean="0">
-                              <a:latin typeface="Cambria Math" panose="02040503050406030204" pitchFamily="18" charset="0"/>
-                            </a:rPr>
-                          </m:ctrlPr>
-                        </m:fPr>
-                        <m:num>
-                          <m:r>
-                            <a:rPr lang="en-US" sz="2400" i="1" smtClean="0">
-                              <a:latin typeface="Cambria Math" panose="02040503050406030204" pitchFamily="18" charset="0"/>
-                            </a:rPr>
-                            <m:t>1</m:t>
-                          </m:r>
-                        </m:num>
-                        <m:den>
-                          <m:r>
-                            <a:rPr lang="en-US" sz="2400" i="1" smtClean="0">
-                              <a:latin typeface="Cambria Math" panose="02040503050406030204" pitchFamily="18" charset="0"/>
-                            </a:rPr>
-                            <m:t>𝑛</m:t>
-                          </m:r>
-                          <m:r>
-                            <a:rPr lang="en-US" sz="2400" i="1" smtClean="0">
-                              <a:latin typeface="Cambria Math" panose="02040503050406030204" pitchFamily="18" charset="0"/>
-                            </a:rPr>
-                            <m:t>−1</m:t>
-                          </m:r>
-                        </m:den>
-                      </m:f>
-                      <m:nary>
-                        <m:naryPr>
-                          <m:chr m:val="∑"/>
-                          <m:limLoc m:val="undOvr"/>
-                          <m:grow m:val="on"/>
-                          <m:ctrlPr>
-                            <a:rPr lang="en-US" sz="2400" i="1" smtClean="0">
-                              <a:latin typeface="Cambria Math" panose="02040503050406030204" pitchFamily="18" charset="0"/>
-                            </a:rPr>
-                          </m:ctrlPr>
-                        </m:naryPr>
-                        <m:sub>
-                          <m:r>
-                            <a:rPr lang="en-US" sz="2400" i="1" smtClean="0">
-                              <a:latin typeface="Cambria Math" panose="02040503050406030204" pitchFamily="18" charset="0"/>
-                            </a:rPr>
-                            <m:t>𝑖</m:t>
-                          </m:r>
-                          <m:r>
-                            <a:rPr lang="en-US" sz="2400" i="1" smtClean="0">
-                              <a:latin typeface="Cambria Math" panose="02040503050406030204" pitchFamily="18" charset="0"/>
-                            </a:rPr>
-                            <m:t>=1</m:t>
-                          </m:r>
-                        </m:sub>
-                        <m:sup>
-                          <m:r>
-                            <a:rPr lang="en-US" sz="2400" i="1" smtClean="0">
-                              <a:latin typeface="Cambria Math" panose="02040503050406030204" pitchFamily="18" charset="0"/>
-                            </a:rPr>
-                            <m:t>𝑛</m:t>
-                          </m:r>
-                        </m:sup>
-                        <m:e>
-                          <m:sSup>
-                            <m:sSupPr>
-                              <m:ctrlPr>
-                                <a:rPr lang="en-US" sz="2400" i="1" smtClean="0">
-                                  <a:solidFill>
-                                    <a:srgbClr val="836967"/>
-                                  </a:solidFill>
-                                  <a:latin typeface="Cambria Math" panose="02040503050406030204" pitchFamily="18" charset="0"/>
-                                </a:rPr>
-                              </m:ctrlPr>
-                            </m:sSupPr>
-                            <m:e>
-                              <m:d>
-                                <m:dPr>
-                                  <m:ctrlPr>
-                                    <a:rPr lang="en-US" sz="2400" i="1" smtClean="0">
-                                      <a:latin typeface="Cambria Math" panose="02040503050406030204" pitchFamily="18" charset="0"/>
-                                    </a:rPr>
-                                  </m:ctrlPr>
-                                </m:dPr>
-                                <m:e>
-                                  <m:sSub>
-                                    <m:sSubPr>
-                                      <m:ctrlPr>
-                                        <a:rPr lang="en-US" sz="2400" i="1" smtClean="0">
-                                          <a:latin typeface="Cambria Math" panose="02040503050406030204" pitchFamily="18" charset="0"/>
-                                        </a:rPr>
-                                      </m:ctrlPr>
-                                    </m:sSubPr>
-                                    <m:e>
-                                      <m:r>
-                                        <a:rPr lang="en-US" sz="2400" i="1" smtClean="0">
-                                          <a:latin typeface="Cambria Math" panose="02040503050406030204" pitchFamily="18" charset="0"/>
-                                        </a:rPr>
-                                        <m:t>𝑥</m:t>
-                                      </m:r>
-                                    </m:e>
-                                    <m:sub>
-                                      <m:r>
-                                        <a:rPr lang="en-US" sz="2400" i="1" smtClean="0">
-                                          <a:latin typeface="Cambria Math" panose="02040503050406030204" pitchFamily="18" charset="0"/>
-                                        </a:rPr>
-                                        <m:t>𝑖</m:t>
-                                      </m:r>
-                                    </m:sub>
-                                  </m:sSub>
-                                  <m:r>
-                                    <a:rPr lang="en-US" sz="2400" i="1" smtClean="0">
-                                      <a:latin typeface="Cambria Math" panose="02040503050406030204" pitchFamily="18" charset="0"/>
-                                    </a:rPr>
-                                    <m:t>−</m:t>
-                                  </m:r>
-                                  <m:acc>
-                                    <m:accPr>
-                                      <m:chr m:val="̅"/>
-                                      <m:ctrlPr>
-                                        <a:rPr lang="en-US" sz="2400" i="1" smtClean="0">
-                                          <a:latin typeface="Cambria Math" panose="02040503050406030204" pitchFamily="18" charset="0"/>
-                                        </a:rPr>
-                                      </m:ctrlPr>
-                                    </m:accPr>
-                                    <m:e>
-                                      <m:r>
-                                        <a:rPr lang="en-US" sz="2400" i="1" smtClean="0">
-                                          <a:latin typeface="Cambria Math" panose="02040503050406030204" pitchFamily="18" charset="0"/>
-                                        </a:rPr>
-                                        <m:t>𝑥</m:t>
-                                      </m:r>
-                                    </m:e>
-                                  </m:acc>
-                                </m:e>
-                              </m:d>
-                            </m:e>
-                            <m:sup>
-                              <m:r>
-                                <a:rPr lang="en-US" sz="2400" i="1" smtClean="0">
-                                  <a:latin typeface="Cambria Math" panose="02040503050406030204" pitchFamily="18" charset="0"/>
-                                </a:rPr>
-                                <m:t>2</m:t>
-                              </m:r>
-                            </m:sup>
-                          </m:sSup>
-                        </m:e>
-                      </m:nary>
-                    </m:oMath>
-                  </m:oMathPara>
-                </a14:m>
-                <a:endParaRPr lang="en-US" sz="2400" i="1" dirty="0">
-                  <a:latin typeface="Cambria Math" panose="02040503050406030204" pitchFamily="18" charset="0"/>
-                </a:endParaRPr>
-              </a:p>
-              <a:p>
-                <a:pPr marL="0" indent="0">
-                  <a:buNone/>
-                </a:pPr>
-                <a:endParaRPr lang="en-US" sz="2600" dirty="0"/>
-              </a:p>
-              <a:p>
-                <a:r>
-                  <a:rPr lang="en-US" sz="2600" dirty="0"/>
-                  <a:t>The sum </a:t>
-                </a:r>
-                <a14:m>
-                  <m:oMath xmlns:m="http://schemas.openxmlformats.org/officeDocument/2006/math">
-                    <m:nary>
-                      <m:naryPr>
-                        <m:chr m:val="∑"/>
-                        <m:limLoc m:val="undOvr"/>
-                        <m:grow m:val="on"/>
-                        <m:ctrlPr>
-                          <a:rPr lang="en-US" sz="2600" i="1" smtClean="0">
-                            <a:latin typeface="Cambria Math" panose="02040503050406030204" pitchFamily="18" charset="0"/>
-                          </a:rPr>
-                        </m:ctrlPr>
-                      </m:naryPr>
-                      <m:sub>
-                        <m:r>
-                          <a:rPr lang="en-US" sz="2600" i="1" smtClean="0">
-                            <a:latin typeface="Cambria Math" panose="02040503050406030204" pitchFamily="18" charset="0"/>
-                          </a:rPr>
-                          <m:t>𝑖</m:t>
-                        </m:r>
-                        <m:r>
-                          <a:rPr lang="en-US" sz="2600" i="1" smtClean="0">
-                            <a:latin typeface="Cambria Math" panose="02040503050406030204" pitchFamily="18" charset="0"/>
-                          </a:rPr>
-                          <m:t>=1</m:t>
-                        </m:r>
-                      </m:sub>
-                      <m:sup>
-                        <m:r>
-                          <a:rPr lang="en-US" sz="2600" i="1" smtClean="0">
-                            <a:latin typeface="Cambria Math" panose="02040503050406030204" pitchFamily="18" charset="0"/>
-                          </a:rPr>
-                          <m:t>𝑛</m:t>
-                        </m:r>
-                      </m:sup>
-                      <m:e>
-                        <m:sSup>
-                          <m:sSupPr>
-                            <m:ctrlPr>
-                              <a:rPr lang="en-US" sz="2600" i="1" smtClean="0">
-                                <a:solidFill>
-                                  <a:srgbClr val="836967"/>
-                                </a:solidFill>
-                                <a:latin typeface="Cambria Math" panose="02040503050406030204" pitchFamily="18" charset="0"/>
-                              </a:rPr>
-                            </m:ctrlPr>
-                          </m:sSupPr>
-                          <m:e>
-                            <m:d>
-                              <m:dPr>
-                                <m:ctrlPr>
-                                  <a:rPr lang="en-US" sz="2600" i="1" smtClean="0">
-                                    <a:latin typeface="Cambria Math" panose="02040503050406030204" pitchFamily="18" charset="0"/>
-                                  </a:rPr>
-                                </m:ctrlPr>
-                              </m:dPr>
-                              <m:e>
-                                <m:sSub>
-                                  <m:sSubPr>
-                                    <m:ctrlPr>
-                                      <a:rPr lang="en-US" sz="2600" i="1" smtClean="0">
-                                        <a:latin typeface="Cambria Math" panose="02040503050406030204" pitchFamily="18" charset="0"/>
-                                      </a:rPr>
-                                    </m:ctrlPr>
-                                  </m:sSubPr>
-                                  <m:e>
-                                    <m:r>
-                                      <a:rPr lang="en-US" sz="2600" i="1" smtClean="0">
-                                        <a:latin typeface="Cambria Math" panose="02040503050406030204" pitchFamily="18" charset="0"/>
-                                      </a:rPr>
-                                      <m:t>𝑥</m:t>
-                                    </m:r>
-                                  </m:e>
-                                  <m:sub>
-                                    <m:r>
-                                      <a:rPr lang="en-US" sz="2600" i="1" smtClean="0">
-                                        <a:latin typeface="Cambria Math" panose="02040503050406030204" pitchFamily="18" charset="0"/>
-                                      </a:rPr>
-                                      <m:t>𝑖</m:t>
-                                    </m:r>
-                                  </m:sub>
-                                </m:sSub>
-                                <m:r>
-                                  <a:rPr lang="en-US" sz="2600" i="1" smtClean="0">
-                                    <a:latin typeface="Cambria Math" panose="02040503050406030204" pitchFamily="18" charset="0"/>
-                                  </a:rPr>
-                                  <m:t>−</m:t>
-                                </m:r>
-                                <m:acc>
-                                  <m:accPr>
-                                    <m:chr m:val="̅"/>
-                                    <m:ctrlPr>
-                                      <a:rPr lang="en-US" sz="2600" i="1" smtClean="0">
-                                        <a:latin typeface="Cambria Math" panose="02040503050406030204" pitchFamily="18" charset="0"/>
-                                      </a:rPr>
-                                    </m:ctrlPr>
-                                  </m:accPr>
-                                  <m:e>
-                                    <m:r>
-                                      <a:rPr lang="en-US" sz="2600" i="1" smtClean="0">
-                                        <a:latin typeface="Cambria Math" panose="02040503050406030204" pitchFamily="18" charset="0"/>
-                                      </a:rPr>
-                                      <m:t>𝑥</m:t>
-                                    </m:r>
-                                  </m:e>
-                                </m:acc>
-                              </m:e>
-                            </m:d>
-                          </m:e>
-                          <m:sup>
-                            <m:r>
-                              <a:rPr lang="en-US" sz="2600" i="1" smtClean="0">
-                                <a:latin typeface="Cambria Math" panose="02040503050406030204" pitchFamily="18" charset="0"/>
-                              </a:rPr>
-                              <m:t>2</m:t>
-                            </m:r>
-                          </m:sup>
-                        </m:sSup>
-                      </m:e>
-                    </m:nary>
-                  </m:oMath>
-                </a14:m>
-                <a:r>
-                  <a:rPr lang="en-US" sz="2600" dirty="0"/>
-                  <a:t> is called the sum of squares</a:t>
-                </a:r>
-              </a:p>
-            </p:txBody>
-          </p:sp>
-        </mc:Choice>
-        <mc:Fallback>
-          <p:sp>
-            <p:nvSpPr>
-              <p:cNvPr id="3" name="Content Placeholder 2">
-                <a:extLst>
-                  <a:ext uri="{FF2B5EF4-FFF2-40B4-BE49-F238E27FC236}">
-                    <a16:creationId xmlns:a16="http://schemas.microsoft.com/office/drawing/2014/main" id="{9824D4B1-FB15-A405-14E1-A713E04E3964}"/>
-                  </a:ext>
-                </a:extLst>
-              </p:cNvPr>
-              <p:cNvSpPr>
-                <a:spLocks noGrp="1" noRot="1" noChangeAspect="1" noMove="1" noResize="1" noEditPoints="1" noAdjustHandles="1" noChangeArrowheads="1" noChangeShapeType="1" noTextEdit="1"/>
-              </p:cNvSpPr>
-              <p:nvPr>
-                <p:ph idx="1"/>
-              </p:nvPr>
-            </p:nvSpPr>
-            <p:spPr>
-              <a:blipFill>
-                <a:blip r:embed="rId2"/>
-                <a:stretch>
-                  <a:fillRect l="-928" t="-3501"/>
-                </a:stretch>
-              </a:blipFill>
-            </p:spPr>
-            <p:txBody>
-              <a:bodyPr/>
-              <a:lstStyle/>
-              <a:p>
-                <a:r>
-                  <a:rPr lang="en-US">
-                    <a:noFill/>
-                  </a:rPr>
-                  <a:t> </a:t>
-                </a:r>
-              </a:p>
-            </p:txBody>
-          </p:sp>
-        </mc:Fallback>
-      </mc:AlternateContent>
-      <p:sp>
-        <p:nvSpPr>
-          <p:cNvPr id="4" name="Slide Number Placeholder 3">
-            <a:extLst>
-              <a:ext uri="{FF2B5EF4-FFF2-40B4-BE49-F238E27FC236}">
-                <a16:creationId xmlns:a16="http://schemas.microsoft.com/office/drawing/2014/main" id="{30A80644-5A7D-5117-2E8F-7FDCB0896244}"/>
-              </a:ext>
-            </a:extLst>
-          </p:cNvPr>
-          <p:cNvSpPr>
-            <a:spLocks noGrp="1"/>
-          </p:cNvSpPr>
-          <p:nvPr>
-            <p:ph type="sldNum" sz="quarter" idx="12"/>
-          </p:nvPr>
-        </p:nvSpPr>
-        <p:spPr/>
-        <p:txBody>
-          <a:bodyPr/>
-          <a:lstStyle/>
-          <a:p>
-            <a:fld id="{A80A81DD-F10A-4B1C-963A-0ABBB4865886}" type="slidenum">
-              <a:rPr lang="en-US" smtClean="0"/>
-              <a:t>32</a:t>
-            </a:fld>
-            <a:endParaRPr lang="en-US"/>
-          </a:p>
-        </p:txBody>
-      </p:sp>
-      <p:sp>
-        <p:nvSpPr>
-          <p:cNvPr id="5" name="Title rule">
-            <a:extLst>
-              <a:ext uri="{FF2B5EF4-FFF2-40B4-BE49-F238E27FC236}">
-                <a16:creationId xmlns:a16="http://schemas.microsoft.com/office/drawing/2014/main" id="{23D7432A-DD44-AE9D-5929-8975DDC7167A}"/>
-              </a:ext>
-            </a:extLst>
-          </p:cNvPr>
-          <p:cNvSpPr/>
-          <p:nvPr/>
-        </p:nvSpPr>
-        <p:spPr>
-          <a:xfrm>
-            <a:off x="838200" y="1600200"/>
-            <a:ext cx="10515600" cy="38100"/>
-          </a:xfrm>
-          <a:prstGeom prst="rect">
-            <a:avLst/>
-          </a:prstGeom>
-          <a:solidFill>
-            <a:srgbClr val="4472C4"/>
-          </a:solidFill>
-          <a:ln w="12700" cap="flat" cmpd="sng" algn="ctr">
-            <a:noFill/>
-            <a:prstDash val="solid"/>
-            <a:miter lim="800000"/>
-          </a:ln>
-          <a:effectLst/>
-          <a:extLst>
-            <a:ext uri="{91240B29-F687-4F45-9708-019B960494DF}">
-              <a14:hiddenLine xmlns:a14="http://schemas.microsoft.com/office/drawing/2010/main" w="12700" cap="flat" cmpd="sng" algn="ctr">
-                <a:solidFill>
-                  <a:schemeClr val="accent1">
-                    <a:shade val="15000"/>
-                  </a:schemeClr>
-                </a:solidFill>
-                <a:prstDash val="solid"/>
-                <a:miter lim="800000"/>
-              </a14:hiddenLine>
-            </a:ext>
-          </a:extLst>
-        </p:spPr>
-        <p:style>
-          <a:lnRef idx="2">
-            <a:schemeClr val="accent1">
-              <a:shade val="15000"/>
-            </a:schemeClr>
-          </a:lnRef>
-          <a:fillRef idx="1">
-            <a:schemeClr val="accent1"/>
-          </a:fillRef>
-          <a:effectRef idx="0">
-            <a:schemeClr val="accent1"/>
-          </a:effectRef>
-          <a:fontRef idx="minor">
-            <a:schemeClr val="lt1"/>
-          </a:fontRef>
-        </p:style>
-        <p:txBody>
-          <a:bodyPr rtlCol="0" anchor="ctr"/>
-          <a:lstStyle/>
-          <a:p>
-            <a:pPr algn="ctr"/>
-            <a:endParaRPr lang="en-US"/>
-          </a:p>
-        </p:txBody>
-      </p:sp>
-    </p:spTree>
-    <p:extLst>
-      <p:ext uri="{BB962C8B-B14F-4D97-AF65-F5344CB8AC3E}">
-        <p14:creationId xmlns:p14="http://schemas.microsoft.com/office/powerpoint/2010/main" val="1350088637"/>
-      </p:ext>
-    </p:extLst>
-  </p:cSld>
-  <p:clrMapOvr>
-    <a:masterClrMapping/>
-  </p:clrMapOvr>
-</p:sld>
-</file>
-
-<file path=ppt/slides/slide33.xml><?xml version="1.0" encoding="utf-8"?>
-<p:sld xmlns:a="http://schemas.openxmlformats.org/drawingml/2006/main" xmlns:r="http://schemas.openxmlformats.org/officeDocument/2006/relationships" xmlns:p="http://schemas.openxmlformats.org/presentationml/2006/main">
-  <p:cSld>
-    <p:spTree>
-      <p:nvGrpSpPr>
-        <p:cNvPr id="1" name=""/>
-        <p:cNvGrpSpPr/>
-        <p:nvPr/>
-      </p:nvGrpSpPr>
-      <p:grpSpPr>
-        <a:xfrm>
-          <a:off x="0" y="0"/>
-          <a:ext cx="0" cy="0"/>
-          <a:chOff x="0" y="0"/>
-          <a:chExt cx="0" cy="0"/>
-        </a:xfrm>
-      </p:grpSpPr>
-      <p:sp>
-        <p:nvSpPr>
-          <p:cNvPr id="5" name="Body card">
-            <a:extLst>
-              <a:ext uri="{FF2B5EF4-FFF2-40B4-BE49-F238E27FC236}">
-                <a16:creationId xmlns:a16="http://schemas.microsoft.com/office/drawing/2014/main" id="{32716F67-54E6-4EF2-C210-3CB90EEDFEBB}"/>
-              </a:ext>
-            </a:extLst>
-          </p:cNvPr>
-          <p:cNvSpPr/>
-          <p:nvPr/>
-        </p:nvSpPr>
-        <p:spPr>
-          <a:xfrm>
-            <a:off x="635000" y="1397000"/>
-            <a:ext cx="10922000" cy="5029200"/>
-          </a:xfrm>
-          <a:prstGeom prst="roundRect">
-            <a:avLst>
-              <a:gd name="adj" fmla="val 3000"/>
-            </a:avLst>
-          </a:prstGeom>
-          <a:solidFill>
-            <a:srgbClr val="F2F6FC"/>
-          </a:solidFill>
-          <a:ln w="19050">
-            <a:solidFill>
-              <a:srgbClr val="4472C4"/>
-            </a:solidFill>
-          </a:ln>
-        </p:spPr>
-        <p:style>
-          <a:lnRef idx="2">
-            <a:schemeClr val="accent1">
-              <a:shade val="15000"/>
-            </a:schemeClr>
-          </a:lnRef>
-          <a:fillRef idx="1">
-            <a:schemeClr val="accent1"/>
-          </a:fillRef>
-          <a:effectRef idx="0">
-            <a:schemeClr val="accent1"/>
-          </a:effectRef>
-          <a:fontRef idx="minor">
-            <a:schemeClr val="lt1"/>
-          </a:fontRef>
-        </p:style>
-        <p:txBody>
-          <a:bodyPr rtlCol="0" anchor="ctr"/>
-          <a:lstStyle/>
-          <a:p>
-            <a:pPr algn="ctr"/>
-            <a:endParaRPr lang="en-US"/>
-          </a:p>
-        </p:txBody>
-      </p:sp>
-      <p:sp>
-        <p:nvSpPr>
-          <p:cNvPr id="2" name="Title 1">
-            <a:extLst>
-              <a:ext uri="{FF2B5EF4-FFF2-40B4-BE49-F238E27FC236}">
-                <a16:creationId xmlns:a16="http://schemas.microsoft.com/office/drawing/2014/main" id="{03759E61-7A67-5D11-4320-1B5FFC9226BE}"/>
-              </a:ext>
-            </a:extLst>
-          </p:cNvPr>
-          <p:cNvSpPr>
-            <a:spLocks noGrp="1"/>
-          </p:cNvSpPr>
-          <p:nvPr>
-            <p:ph type="title"/>
-          </p:nvPr>
-        </p:nvSpPr>
-        <p:spPr>
-          <a:xfrm>
-            <a:off x="838200" y="368300"/>
-            <a:ext cx="10515600" cy="1320800"/>
-          </a:xfrm>
-        </p:spPr>
-        <p:txBody>
-          <a:bodyPr/>
-          <a:lstStyle/>
-          <a:p>
-            <a:r>
-              <a:rPr lang="en-US" dirty="0">
-                <a:solidFill>
-                  <a:srgbClr val="1F3864"/>
-                </a:solidFill>
-              </a:rPr>
-              <a:t>Measures of Spread: Standard Deviation</a:t>
-            </a:r>
-          </a:p>
-        </p:txBody>
-      </p:sp>
-      <mc:AlternateContent xmlns:mc="http://schemas.openxmlformats.org/markup-compatibility/2006">
-        <mc:Choice xmlns:a14="http://schemas.microsoft.com/office/drawing/2010/main" Requires="a14">
-          <p:sp>
-            <p:nvSpPr>
-              <p:cNvPr id="3" name="Content Placeholder 2">
-                <a:extLst>
-                  <a:ext uri="{FF2B5EF4-FFF2-40B4-BE49-F238E27FC236}">
-                    <a16:creationId xmlns:a16="http://schemas.microsoft.com/office/drawing/2014/main" id="{F801D609-D493-78C3-4B57-D24A155F0AAF}"/>
-                  </a:ext>
-                </a:extLst>
-              </p:cNvPr>
-              <p:cNvSpPr>
-                <a:spLocks noGrp="1"/>
-              </p:cNvSpPr>
-              <p:nvPr>
-                <p:ph idx="1"/>
-              </p:nvPr>
-            </p:nvSpPr>
-            <p:spPr>
-              <a:xfrm>
-                <a:off x="838200" y="1548533"/>
-                <a:ext cx="10515600" cy="4935393"/>
-              </a:xfrm>
-            </p:spPr>
-            <p:txBody>
-              <a:bodyPr>
-                <a:normAutofit fontScale="85000" lnSpcReduction="20000"/>
-              </a:bodyPr>
-              <a:lstStyle/>
-              <a:p>
-                <a:r>
-                  <a:rPr lang="en-US" dirty="0"/>
-                  <a:t>Since the variance uses the squared deviation, we usually take its square root called the </a:t>
-                </a:r>
-                <a:r>
-                  <a:rPr lang="en-US" b="1" dirty="0">
-                    <a:solidFill>
-                      <a:srgbClr val="C00000"/>
-                    </a:solidFill>
-                  </a:rPr>
-                  <a:t>standard deviation</a:t>
-                </a:r>
-              </a:p>
-              <a:p>
-                <a:endParaRPr lang="en-US" b="1" dirty="0">
-                  <a:solidFill>
-                    <a:srgbClr val="C00000"/>
-                  </a:solidFill>
-                </a:endParaRPr>
-              </a:p>
-              <a:p>
-                <a:pPr marL="914400" lvl="2" indent="0">
-                  <a:buNone/>
-                </a:pPr>
-                <a14:m>
-                  <m:oMathPara xmlns:m="http://schemas.openxmlformats.org/officeDocument/2006/math">
-                    <m:oMath>
-                      <m:r>
-                        <a:rPr lang="en-US" sz="2400" b="0" i="1" smtClean="0">
-                          <a:latin typeface="Cambria Math" panose="02040503050406030204" pitchFamily="18" charset="0"/>
-                        </a:rPr>
-                        <m:t>𝑠</m:t>
-                      </m:r>
-                      <m:r>
-                        <a:rPr lang="en-US" sz="2400" b="0" i="1" smtClean="0">
-                          <a:latin typeface="Cambria Math" panose="02040503050406030204" pitchFamily="18" charset="0"/>
-                        </a:rPr>
-                        <m:t>=</m:t>
-                      </m:r>
-                      <m:rad>
-                        <m:radPr>
-                          <m:degHide m:val="on"/>
-                          <m:ctrlPr>
-                            <a:rPr lang="en-US" sz="2400" b="0" i="1" smtClean="0">
-                              <a:latin typeface="Cambria Math" panose="02040503050406030204" pitchFamily="18" charset="0"/>
-                            </a:rPr>
-                          </m:ctrlPr>
-                        </m:radPr>
-                        <m:deg/>
-                        <m:e>
-                          <m:f>
-                            <m:fPr>
-                              <m:ctrlPr>
-                                <a:rPr lang="en-US" sz="2400" b="0" i="1" smtClean="0">
-                                  <a:latin typeface="Cambria Math" panose="02040503050406030204" pitchFamily="18" charset="0"/>
-                                </a:rPr>
-                              </m:ctrlPr>
-                            </m:fPr>
-                            <m:num>
-                              <m:r>
-                                <a:rPr lang="en-US" sz="2400" b="0" i="1" smtClean="0">
-                                  <a:latin typeface="Cambria Math" panose="02040503050406030204" pitchFamily="18" charset="0"/>
-                                </a:rPr>
-                                <m:t>1</m:t>
-                              </m:r>
-                            </m:num>
-                            <m:den>
-                              <m:r>
-                                <a:rPr lang="en-US" sz="2400" b="0" i="1" smtClean="0">
-                                  <a:latin typeface="Cambria Math" panose="02040503050406030204" pitchFamily="18" charset="0"/>
-                                </a:rPr>
-                                <m:t>𝑛</m:t>
-                              </m:r>
-                              <m:r>
-                                <a:rPr lang="en-US" sz="2400" b="0" i="1" smtClean="0">
-                                  <a:latin typeface="Cambria Math" panose="02040503050406030204" pitchFamily="18" charset="0"/>
-                                </a:rPr>
-                                <m:t>−1</m:t>
-                              </m:r>
-                            </m:den>
-                          </m:f>
-                          <m:nary>
-                            <m:naryPr>
-                              <m:chr m:val="∑"/>
-                              <m:ctrlPr>
-                                <a:rPr lang="en-US" sz="2400" b="0" i="1" smtClean="0">
-                                  <a:latin typeface="Cambria Math" panose="02040503050406030204" pitchFamily="18" charset="0"/>
-                                </a:rPr>
-                              </m:ctrlPr>
-                            </m:naryPr>
-                            <m:sub>
-                              <m:r>
-                                <a:rPr lang="en-US" sz="2400" b="0" i="1" smtClean="0">
-                                  <a:latin typeface="Cambria Math" panose="02040503050406030204" pitchFamily="18" charset="0"/>
-                                </a:rPr>
-                                <m:t>𝑖</m:t>
-                              </m:r>
-                              <m:r>
-                                <a:rPr lang="en-US" sz="2400" b="0" i="1" smtClean="0">
-                                  <a:latin typeface="Cambria Math" panose="02040503050406030204" pitchFamily="18" charset="0"/>
-                                </a:rPr>
-                                <m:t>=1</m:t>
-                              </m:r>
-                            </m:sub>
-                            <m:sup>
-                              <m:r>
-                                <a:rPr lang="en-US" sz="2400" b="0" i="1" smtClean="0">
-                                  <a:latin typeface="Cambria Math" panose="02040503050406030204" pitchFamily="18" charset="0"/>
-                                </a:rPr>
-                                <m:t>𝑛</m:t>
-                              </m:r>
-                            </m:sup>
-                            <m:e>
-                              <m:sSup>
-                                <m:sSupPr>
-                                  <m:ctrlPr>
-                                    <a:rPr lang="en-US" sz="2400" b="0" i="1" smtClean="0">
-                                      <a:latin typeface="Cambria Math" panose="02040503050406030204" pitchFamily="18" charset="0"/>
-                                    </a:rPr>
-                                  </m:ctrlPr>
-                                </m:sSupPr>
-                                <m:e>
-                                  <m:d>
-                                    <m:dPr>
-                                      <m:ctrlPr>
-                                        <a:rPr lang="en-US" sz="2400" b="0" i="1" smtClean="0">
-                                          <a:latin typeface="Cambria Math" panose="02040503050406030204" pitchFamily="18" charset="0"/>
-                                        </a:rPr>
-                                      </m:ctrlPr>
-                                    </m:dPr>
-                                    <m:e>
-                                      <m:sSub>
-                                        <m:sSubPr>
-                                          <m:ctrlPr>
-                                            <a:rPr lang="en-US" sz="2400" b="0" i="1" smtClean="0">
-                                              <a:latin typeface="Cambria Math" panose="02040503050406030204" pitchFamily="18" charset="0"/>
-                                            </a:rPr>
-                                          </m:ctrlPr>
-                                        </m:sSubPr>
-                                        <m:e>
-                                          <m:r>
-                                            <a:rPr lang="en-US" sz="2400" b="0" i="1" smtClean="0">
-                                              <a:latin typeface="Cambria Math" panose="02040503050406030204" pitchFamily="18" charset="0"/>
-                                            </a:rPr>
-                                            <m:t>𝑥</m:t>
-                                          </m:r>
-                                        </m:e>
-                                        <m:sub>
-                                          <m:r>
-                                            <a:rPr lang="en-US" sz="2400" b="0" i="1" smtClean="0">
-                                              <a:latin typeface="Cambria Math" panose="02040503050406030204" pitchFamily="18" charset="0"/>
-                                            </a:rPr>
-                                            <m:t>𝑖</m:t>
-                                          </m:r>
-                                        </m:sub>
-                                      </m:sSub>
-                                      <m:r>
-                                        <a:rPr lang="en-US" sz="2400" b="0" i="1" smtClean="0">
-                                          <a:latin typeface="Cambria Math" panose="02040503050406030204" pitchFamily="18" charset="0"/>
-                                        </a:rPr>
-                                        <m:t>−</m:t>
-                                      </m:r>
-                                      <m:acc>
-                                        <m:accPr>
-                                          <m:chr m:val="̅"/>
-                                          <m:ctrlPr>
-                                            <a:rPr lang="en-US" sz="2400" b="0" i="1" smtClean="0">
-                                              <a:latin typeface="Cambria Math" panose="02040503050406030204" pitchFamily="18" charset="0"/>
-                                            </a:rPr>
-                                          </m:ctrlPr>
-                                        </m:accPr>
-                                        <m:e>
-                                          <m:r>
-                                            <a:rPr lang="en-US" sz="2400" b="0" i="1" smtClean="0">
-                                              <a:latin typeface="Cambria Math" panose="02040503050406030204" pitchFamily="18" charset="0"/>
-                                            </a:rPr>
-                                            <m:t>𝑥</m:t>
-                                          </m:r>
-                                        </m:e>
-                                      </m:acc>
-                                    </m:e>
-                                  </m:d>
-                                </m:e>
-                                <m:sup>
-                                  <m:r>
-                                    <a:rPr lang="en-US" sz="2400" b="0" i="1" smtClean="0">
-                                      <a:latin typeface="Cambria Math" panose="02040503050406030204" pitchFamily="18" charset="0"/>
-                                    </a:rPr>
-                                    <m:t>2</m:t>
-                                  </m:r>
-                                </m:sup>
-                              </m:sSup>
-                            </m:e>
-                          </m:nary>
-                          <m:r>
-                            <a:rPr lang="en-US" sz="2400" b="0" i="1" smtClean="0">
-                              <a:latin typeface="Cambria Math" panose="02040503050406030204" pitchFamily="18" charset="0"/>
-                            </a:rPr>
-                            <m:t> </m:t>
-                          </m:r>
-                        </m:e>
-                      </m:rad>
-                    </m:oMath>
-                  </m:oMathPara>
-                </a14:m>
-                <a:endParaRPr lang="en-US" sz="2400" dirty="0"/>
-              </a:p>
-              <a:p>
-                <a:endParaRPr lang="en-US" dirty="0"/>
-              </a:p>
-              <a:p>
-                <a:r>
-                  <a:rPr lang="en-US" dirty="0"/>
-                  <a:t>The standard deviation represents (roughly) the average distance of an observation from the mean </a:t>
-                </a:r>
-              </a:p>
-              <a:p>
-                <a:endParaRPr lang="en-US" dirty="0"/>
-              </a:p>
-              <a:p>
-                <a:r>
-                  <a:rPr lang="en-US" dirty="0"/>
-                  <a:t>The greater </a:t>
-                </a:r>
-                <a14:m>
-                  <m:oMath xmlns:m="http://schemas.openxmlformats.org/officeDocument/2006/math">
-                    <m:r>
-                      <a:rPr lang="en-US" b="0" i="1" smtClean="0">
-                        <a:latin typeface="Cambria Math" panose="02040503050406030204" pitchFamily="18" charset="0"/>
-                      </a:rPr>
-                      <m:t>𝑠</m:t>
-                    </m:r>
-                  </m:oMath>
-                </a14:m>
-                <a:r>
-                  <a:rPr lang="en-US" dirty="0"/>
-                  <a:t> is the greater the variability in the data is</a:t>
-                </a:r>
-              </a:p>
-              <a:p>
-                <a:endParaRPr lang="en-US" dirty="0"/>
-              </a:p>
-              <a:p>
-                <a:r>
-                  <a:rPr lang="en-US" dirty="0"/>
-                  <a:t>We denote the population parameter for the variance and standard deviation using </a:t>
-                </a:r>
-                <a14:m>
-                  <m:oMath xmlns:m="http://schemas.openxmlformats.org/officeDocument/2006/math">
-                    <m:r>
-                      <a:rPr lang="en-US" b="0" i="1" smtClean="0">
-                        <a:latin typeface="Cambria Math" panose="02040503050406030204" pitchFamily="18" charset="0"/>
-                      </a:rPr>
-                      <m:t>𝜎</m:t>
-                    </m:r>
-                  </m:oMath>
-                </a14:m>
-                <a:r>
-                  <a:rPr lang="en-US" dirty="0"/>
-                  <a:t> for </a:t>
-                </a:r>
-                <a14:m>
-                  <m:oMath xmlns:m="http://schemas.openxmlformats.org/officeDocument/2006/math">
-                    <m:r>
-                      <a:rPr lang="en-US" b="0" i="1" smtClean="0">
-                        <a:latin typeface="Cambria Math" panose="02040503050406030204" pitchFamily="18" charset="0"/>
-                      </a:rPr>
-                      <m:t>𝑠</m:t>
-                    </m:r>
-                  </m:oMath>
-                </a14:m>
-                <a:r>
-                  <a:rPr lang="en-US" dirty="0"/>
-                  <a:t> and </a:t>
-                </a:r>
-                <a14:m>
-                  <m:oMath xmlns:m="http://schemas.openxmlformats.org/officeDocument/2006/math">
-                    <m:sSup>
-                      <m:sSupPr>
-                        <m:ctrlPr>
-                          <a:rPr lang="en-US" b="0" i="1" smtClean="0">
-                            <a:latin typeface="Cambria Math" panose="02040503050406030204" pitchFamily="18" charset="0"/>
-                          </a:rPr>
-                        </m:ctrlPr>
-                      </m:sSupPr>
-                      <m:e>
-                        <m:r>
-                          <a:rPr lang="en-US" b="0" i="1" smtClean="0">
-                            <a:latin typeface="Cambria Math" panose="02040503050406030204" pitchFamily="18" charset="0"/>
-                          </a:rPr>
-                          <m:t>𝜎</m:t>
-                        </m:r>
-                      </m:e>
-                      <m:sup>
-                        <m:r>
-                          <a:rPr lang="en-US" b="0" i="1" smtClean="0">
-                            <a:latin typeface="Cambria Math" panose="02040503050406030204" pitchFamily="18" charset="0"/>
-                          </a:rPr>
-                          <m:t>2</m:t>
-                        </m:r>
-                      </m:sup>
-                    </m:sSup>
-                  </m:oMath>
-                </a14:m>
-                <a:r>
-                  <a:rPr lang="en-US" dirty="0"/>
-                  <a:t> for </a:t>
-                </a:r>
-                <a14:m>
-                  <m:oMath xmlns:m="http://schemas.openxmlformats.org/officeDocument/2006/math">
-                    <m:sSup>
-                      <m:sSupPr>
-                        <m:ctrlPr>
-                          <a:rPr lang="en-US" b="0" i="1" smtClean="0">
-                            <a:latin typeface="Cambria Math" panose="02040503050406030204" pitchFamily="18" charset="0"/>
-                          </a:rPr>
-                        </m:ctrlPr>
-                      </m:sSupPr>
-                      <m:e>
-                        <m:r>
-                          <a:rPr lang="en-US" b="0" i="1" smtClean="0">
-                            <a:latin typeface="Cambria Math" panose="02040503050406030204" pitchFamily="18" charset="0"/>
-                          </a:rPr>
-                          <m:t>𝑠</m:t>
-                        </m:r>
-                      </m:e>
-                      <m:sup>
-                        <m:r>
-                          <a:rPr lang="en-US" b="0" i="1" smtClean="0">
-                            <a:latin typeface="Cambria Math" panose="02040503050406030204" pitchFamily="18" charset="0"/>
-                          </a:rPr>
-                          <m:t>2</m:t>
-                        </m:r>
-                      </m:sup>
-                    </m:sSup>
-                  </m:oMath>
-                </a14:m>
-                <a:endParaRPr lang="en-US" dirty="0"/>
-              </a:p>
-            </p:txBody>
-          </p:sp>
-        </mc:Choice>
-        <mc:Fallback>
-          <p:sp>
-            <p:nvSpPr>
-              <p:cNvPr id="3" name="Content Placeholder 2">
-                <a:extLst>
-                  <a:ext uri="{FF2B5EF4-FFF2-40B4-BE49-F238E27FC236}">
-                    <a16:creationId xmlns:a16="http://schemas.microsoft.com/office/drawing/2014/main" id="{F801D609-D493-78C3-4B57-D24A155F0AAF}"/>
-                  </a:ext>
-                </a:extLst>
-              </p:cNvPr>
-              <p:cNvSpPr>
-                <a:spLocks noGrp="1" noRot="1" noChangeAspect="1" noMove="1" noResize="1" noEditPoints="1" noAdjustHandles="1" noChangeArrowheads="1" noChangeShapeType="1" noTextEdit="1"/>
-              </p:cNvSpPr>
-              <p:nvPr>
-                <p:ph idx="1"/>
-              </p:nvPr>
-            </p:nvSpPr>
-            <p:spPr>
-              <a:xfrm>
-                <a:off x="838200" y="1548533"/>
-                <a:ext cx="10515600" cy="4935393"/>
-              </a:xfrm>
-              <a:blipFill>
-                <a:blip r:embed="rId2"/>
-                <a:stretch>
-                  <a:fillRect l="-812" t="-2840" b="-1605"/>
-                </a:stretch>
-              </a:blipFill>
-            </p:spPr>
-            <p:txBody>
-              <a:bodyPr/>
-              <a:lstStyle/>
-              <a:p>
-                <a:r>
-                  <a:rPr lang="en-US">
-                    <a:noFill/>
-                  </a:rPr>
-                  <a:t> </a:t>
-                </a:r>
-              </a:p>
-            </p:txBody>
-          </p:sp>
-        </mc:Fallback>
-      </mc:AlternateContent>
-      <p:sp>
-        <p:nvSpPr>
-          <p:cNvPr id="4" name="Slide Number Placeholder 3">
-            <a:extLst>
-              <a:ext uri="{FF2B5EF4-FFF2-40B4-BE49-F238E27FC236}">
-                <a16:creationId xmlns:a16="http://schemas.microsoft.com/office/drawing/2014/main" id="{0379AC86-B215-32AD-CECC-47522CC450F0}"/>
-              </a:ext>
-            </a:extLst>
-          </p:cNvPr>
-          <p:cNvSpPr>
-            <a:spLocks noGrp="1"/>
-          </p:cNvSpPr>
-          <p:nvPr>
-            <p:ph type="sldNum" sz="quarter" idx="12"/>
-          </p:nvPr>
-        </p:nvSpPr>
-        <p:spPr/>
-        <p:txBody>
-          <a:bodyPr/>
-          <a:lstStyle/>
-          <a:p>
-            <a:fld id="{A80A81DD-F10A-4B1C-963A-0ABBB4865886}" type="slidenum">
-              <a:rPr lang="en-US" smtClean="0"/>
-              <a:t>33</a:t>
-            </a:fld>
-            <a:endParaRPr lang="en-US"/>
-          </a:p>
-        </p:txBody>
-      </p:sp>
-    </p:spTree>
-    <p:extLst>
-      <p:ext uri="{BB962C8B-B14F-4D97-AF65-F5344CB8AC3E}">
-        <p14:creationId xmlns:p14="http://schemas.microsoft.com/office/powerpoint/2010/main" val="3453358537"/>
-      </p:ext>
-    </p:extLst>
-  </p:cSld>
-  <p:clrMapOvr>
-    <a:masterClrMapping/>
-  </p:clrMapOvr>
-</p:sld>
-</file>
-
-<file path=ppt/slides/slide34.xml><?xml version="1.0" encoding="utf-8"?>
-<p:sld xmlns:a="http://schemas.openxmlformats.org/drawingml/2006/main" xmlns:r="http://schemas.openxmlformats.org/officeDocument/2006/relationships" xmlns:p="http://schemas.openxmlformats.org/presentationml/2006/main">
-  <p:cSld>
-    <p:spTree>
-      <p:nvGrpSpPr>
-        <p:cNvPr id="1" name=""/>
-        <p:cNvGrpSpPr/>
-        <p:nvPr/>
-      </p:nvGrpSpPr>
-      <p:grpSpPr>
-        <a:xfrm>
-          <a:off x="0" y="0"/>
-          <a:ext cx="0" cy="0"/>
-          <a:chOff x="0" y="0"/>
-          <a:chExt cx="0" cy="0"/>
-        </a:xfrm>
-      </p:grpSpPr>
-      <p:sp>
-        <p:nvSpPr>
-          <p:cNvPr id="6" name="Body card">
-            <a:extLst>
-              <a:ext uri="{FF2B5EF4-FFF2-40B4-BE49-F238E27FC236}">
-                <a16:creationId xmlns:a16="http://schemas.microsoft.com/office/drawing/2014/main" id="{7E7EEE50-9936-2C88-2AE4-3B761902A19A}"/>
-              </a:ext>
-            </a:extLst>
-          </p:cNvPr>
-          <p:cNvSpPr/>
-          <p:nvPr/>
-        </p:nvSpPr>
-        <p:spPr>
-          <a:xfrm>
-            <a:off x="635000" y="1676400"/>
-            <a:ext cx="10922000" cy="4229100"/>
-          </a:xfrm>
-          <a:prstGeom prst="roundRect">
-            <a:avLst>
-              <a:gd name="adj" fmla="val 3000"/>
-            </a:avLst>
-          </a:prstGeom>
-          <a:solidFill>
-            <a:srgbClr val="F2F6FC"/>
-          </a:solidFill>
-          <a:ln w="19050">
-            <a:solidFill>
-              <a:srgbClr val="4472C4"/>
-            </a:solidFill>
-          </a:ln>
-        </p:spPr>
-        <p:style>
-          <a:lnRef idx="2">
-            <a:schemeClr val="accent1">
-              <a:shade val="15000"/>
-            </a:schemeClr>
-          </a:lnRef>
-          <a:fillRef idx="1">
-            <a:schemeClr val="accent1"/>
-          </a:fillRef>
-          <a:effectRef idx="0">
-            <a:schemeClr val="accent1"/>
-          </a:effectRef>
-          <a:fontRef idx="minor">
-            <a:schemeClr val="lt1"/>
-          </a:fontRef>
-        </p:style>
-        <p:txBody>
-          <a:bodyPr rtlCol="0" anchor="ctr"/>
-          <a:lstStyle/>
-          <a:p>
-            <a:pPr algn="ctr"/>
-            <a:endParaRPr lang="en-US"/>
-          </a:p>
-        </p:txBody>
-      </p:sp>
-      <mc:AlternateContent xmlns:mc="http://schemas.openxmlformats.org/markup-compatibility/2006">
-        <mc:Choice xmlns:a14="http://schemas.microsoft.com/office/drawing/2010/main" Requires="a14">
-          <p:sp>
-            <p:nvSpPr>
-              <p:cNvPr id="2" name="Title 1">
-                <a:extLst>
-                  <a:ext uri="{FF2B5EF4-FFF2-40B4-BE49-F238E27FC236}">
-                    <a16:creationId xmlns:a16="http://schemas.microsoft.com/office/drawing/2014/main" id="{1DD5E1B0-DD07-8EDA-1858-2D2EA2B4B384}"/>
-                  </a:ext>
-                </a:extLst>
-              </p:cNvPr>
-              <p:cNvSpPr>
-                <a:spLocks noGrp="1"/>
-              </p:cNvSpPr>
-              <p:nvPr>
-                <p:ph type="title"/>
-              </p:nvPr>
-            </p:nvSpPr>
-            <p:spPr/>
-            <p:txBody>
-              <a:bodyPr/>
-              <a:lstStyle/>
-              <a:p>
-                <a:r>
-                  <a:rPr lang="en-US" dirty="0">
-                    <a:solidFill>
-                      <a:srgbClr val="1F3864"/>
-                    </a:solidFill>
-                  </a:rPr>
-                  <a:t>Why divide by </a:t>
-                </a:r>
-                <a14:m>
-                  <m:oMath xmlns:m="http://schemas.openxmlformats.org/officeDocument/2006/math">
-                    <m:r>
-                      <a:rPr lang="en-US" b="0" i="1" smtClean="0">
-                        <a:solidFill>
-                          <a:srgbClr val="1F3864"/>
-                        </a:solidFill>
-                        <a:latin typeface="Cambria Math" panose="02040503050406030204" pitchFamily="18" charset="0"/>
-                      </a:rPr>
-                      <m:t>𝑛</m:t>
-                    </m:r>
-                    <m:r>
-                      <a:rPr lang="en-US" b="0" i="1" smtClean="0">
-                        <a:solidFill>
-                          <a:srgbClr val="1F3864"/>
-                        </a:solidFill>
-                        <a:latin typeface="Cambria Math" panose="02040503050406030204" pitchFamily="18" charset="0"/>
-                      </a:rPr>
-                      <m:t>−1</m:t>
-                    </m:r>
-                  </m:oMath>
-                </a14:m>
-                <a:r>
-                  <a:rPr lang="en-US" dirty="0">
-                    <a:solidFill>
-                      <a:srgbClr val="1F3864"/>
-                    </a:solidFill>
-                  </a:rPr>
-                  <a:t> ?</a:t>
-                </a:r>
-              </a:p>
-            </p:txBody>
-          </p:sp>
-        </mc:Choice>
-        <mc:Fallback>
-          <p:sp>
-            <p:nvSpPr>
-              <p:cNvPr id="2" name="Title 1">
-                <a:extLst>
-                  <a:ext uri="{FF2B5EF4-FFF2-40B4-BE49-F238E27FC236}">
-                    <a16:creationId xmlns:a16="http://schemas.microsoft.com/office/drawing/2014/main" id="{1DD5E1B0-DD07-8EDA-1858-2D2EA2B4B384}"/>
-                  </a:ext>
-                </a:extLst>
-              </p:cNvPr>
-              <p:cNvSpPr>
-                <a:spLocks noGrp="1" noRot="1" noChangeAspect="1" noMove="1" noResize="1" noEditPoints="1" noAdjustHandles="1" noChangeArrowheads="1" noChangeShapeType="1" noTextEdit="1"/>
-              </p:cNvSpPr>
-              <p:nvPr>
-                <p:ph type="title"/>
-              </p:nvPr>
-            </p:nvSpPr>
-            <p:spPr>
-              <a:blipFill>
-                <a:blip r:embed="rId2"/>
-                <a:stretch>
-                  <a:fillRect l="-2377"/>
-                </a:stretch>
-              </a:blipFill>
-            </p:spPr>
-            <p:txBody>
-              <a:bodyPr/>
-              <a:lstStyle/>
-              <a:p>
-                <a:r>
-                  <a:rPr lang="en-US">
-                    <a:noFill/>
-                  </a:rPr>
-                  <a:t> </a:t>
-                </a:r>
-              </a:p>
-            </p:txBody>
-          </p:sp>
-        </mc:Fallback>
-      </mc:AlternateContent>
-      <mc:AlternateContent xmlns:mc="http://schemas.openxmlformats.org/markup-compatibility/2006" xmlns:a14="http://schemas.microsoft.com/office/drawing/2010/main">
-        <mc:Choice Requires="a14">
-          <p:sp>
-            <p:nvSpPr>
-              <p:cNvPr id="3" name="Content Placeholder 2">
-                <a:extLst>
-                  <a:ext uri="{FF2B5EF4-FFF2-40B4-BE49-F238E27FC236}">
-                    <a16:creationId xmlns:a16="http://schemas.microsoft.com/office/drawing/2014/main" id="{51A4BF34-A2FA-6993-0CE4-3573B865FE8F}"/>
-                  </a:ext>
-                </a:extLst>
-              </p:cNvPr>
-              <p:cNvSpPr>
-                <a:spLocks noGrp="1"/>
-              </p:cNvSpPr>
-              <p:nvPr>
-                <p:ph idx="1"/>
-              </p:nvPr>
-            </p:nvSpPr>
-            <p:spPr/>
-            <p:txBody>
-              <a:bodyPr>
-                <a:normAutofit lnSpcReduction="10000"/>
-              </a:bodyPr>
-              <a:lstStyle/>
-              <a:p>
-                <a:r>
-                  <a:rPr lang="en-US" dirty="0"/>
-                  <a:t>We divide by </a:t>
-                </a:r>
-                <a14:m>
-                  <m:oMath xmlns:m="http://schemas.openxmlformats.org/officeDocument/2006/math">
-                    <m:r>
-                      <a:rPr lang="en-US" b="0" i="1" smtClean="0">
-                        <a:latin typeface="Cambria Math" panose="02040503050406030204" pitchFamily="18" charset="0"/>
-                      </a:rPr>
-                      <m:t>𝑛</m:t>
-                    </m:r>
-                    <m:r>
-                      <a:rPr lang="en-US" b="0" i="1" smtClean="0">
-                        <a:latin typeface="Cambria Math" panose="02040503050406030204" pitchFamily="18" charset="0"/>
-                      </a:rPr>
-                      <m:t>−1</m:t>
-                    </m:r>
-                  </m:oMath>
-                </a14:m>
-                <a:r>
-                  <a:rPr lang="en-US" dirty="0"/>
-                  <a:t> because we have only </a:t>
-                </a:r>
-                <a14:m>
-                  <m:oMath xmlns:m="http://schemas.openxmlformats.org/officeDocument/2006/math">
-                    <m:r>
-                      <a:rPr lang="en-US" b="0" i="1" smtClean="0">
-                        <a:latin typeface="Cambria Math" panose="02040503050406030204" pitchFamily="18" charset="0"/>
-                      </a:rPr>
-                      <m:t>𝑛</m:t>
-                    </m:r>
-                    <m:r>
-                      <a:rPr lang="en-US" b="0" i="1" smtClean="0">
-                        <a:latin typeface="Cambria Math" panose="02040503050406030204" pitchFamily="18" charset="0"/>
-                      </a:rPr>
-                      <m:t>−1 </m:t>
-                    </m:r>
-                  </m:oMath>
-                </a14:m>
-                <a:r>
-                  <a:rPr lang="en-US" dirty="0"/>
-                  <a:t>pieces of independent information for </a:t>
-                </a:r>
-                <a14:m>
-                  <m:oMath xmlns:m="http://schemas.openxmlformats.org/officeDocument/2006/math">
-                    <m:sSup>
-                      <m:sSupPr>
-                        <m:ctrlPr>
-                          <a:rPr lang="en-US" b="0" i="1" smtClean="0">
-                            <a:latin typeface="Cambria Math" panose="02040503050406030204" pitchFamily="18" charset="0"/>
-                          </a:rPr>
-                        </m:ctrlPr>
-                      </m:sSupPr>
-                      <m:e>
-                        <m:r>
-                          <a:rPr lang="en-US" b="0" i="1" smtClean="0">
-                            <a:latin typeface="Cambria Math" panose="02040503050406030204" pitchFamily="18" charset="0"/>
-                          </a:rPr>
-                          <m:t>𝑠</m:t>
-                        </m:r>
-                      </m:e>
-                      <m:sup>
-                        <m:r>
-                          <a:rPr lang="en-US" b="0" i="1" smtClean="0">
-                            <a:latin typeface="Cambria Math" panose="02040503050406030204" pitchFamily="18" charset="0"/>
-                          </a:rPr>
-                          <m:t>2</m:t>
-                        </m:r>
-                      </m:sup>
-                    </m:sSup>
-                  </m:oMath>
-                </a14:m>
-                <a:r>
-                  <a:rPr lang="en-US" dirty="0"/>
-                  <a:t> </a:t>
-                </a:r>
-              </a:p>
-              <a:p>
-                <a:endParaRPr lang="en-US" dirty="0"/>
-              </a:p>
-              <a:p>
-                <a:r>
-                  <a:rPr lang="en-US" dirty="0"/>
-                  <a:t>Since the sum of the deviations must add to zero, then if we know the first </a:t>
-                </a:r>
-                <a14:m>
-                  <m:oMath xmlns:m="http://schemas.openxmlformats.org/officeDocument/2006/math">
-                    <m:r>
-                      <a:rPr lang="en-US" b="0" i="1" smtClean="0">
-                        <a:latin typeface="Cambria Math" panose="02040503050406030204" pitchFamily="18" charset="0"/>
-                      </a:rPr>
-                      <m:t>𝑛</m:t>
-                    </m:r>
-                    <m:r>
-                      <a:rPr lang="en-US" b="0" i="1" smtClean="0">
-                        <a:latin typeface="Cambria Math" panose="02040503050406030204" pitchFamily="18" charset="0"/>
-                      </a:rPr>
-                      <m:t>−1</m:t>
-                    </m:r>
-                  </m:oMath>
-                </a14:m>
-                <a:r>
-                  <a:rPr lang="en-US" dirty="0"/>
-                  <a:t> deviations we can always figure out the last one</a:t>
-                </a:r>
-              </a:p>
-              <a:p>
-                <a:endParaRPr lang="en-US" dirty="0"/>
-              </a:p>
-              <a:p>
-                <a:r>
-                  <a:rPr lang="en-US" dirty="0"/>
-                  <a:t>Ex.) suppose we have two data points and deviation of the first data point is </a:t>
-                </a:r>
-                <a14:m>
-                  <m:oMath xmlns:m="http://schemas.openxmlformats.org/officeDocument/2006/math">
-                    <m:r>
-                      <a:rPr lang="en-US" b="0" i="1" smtClean="0">
-                        <a:latin typeface="Cambria Math" panose="02040503050406030204" pitchFamily="18" charset="0"/>
-                      </a:rPr>
-                      <m:t>𝑥</m:t>
-                    </m:r>
-                    <m:r>
-                      <a:rPr lang="en-US" b="0" i="1" smtClean="0">
-                        <a:latin typeface="Cambria Math" panose="02040503050406030204" pitchFamily="18" charset="0"/>
-                      </a:rPr>
-                      <m:t> −</m:t>
-                    </m:r>
-                    <m:acc>
-                      <m:accPr>
-                        <m:chr m:val="̅"/>
-                        <m:ctrlPr>
-                          <a:rPr lang="en-US" b="0" i="1" smtClean="0">
-                            <a:latin typeface="Cambria Math" panose="02040503050406030204" pitchFamily="18" charset="0"/>
-                          </a:rPr>
-                        </m:ctrlPr>
-                      </m:accPr>
-                      <m:e>
-                        <m:r>
-                          <a:rPr lang="en-US" b="0" i="1" smtClean="0">
-                            <a:latin typeface="Cambria Math" panose="02040503050406030204" pitchFamily="18" charset="0"/>
-                          </a:rPr>
-                          <m:t>𝑥</m:t>
-                        </m:r>
-                      </m:e>
-                    </m:acc>
-                    <m:r>
-                      <a:rPr lang="en-US" b="0" i="1" smtClean="0">
-                        <a:latin typeface="Cambria Math" panose="02040503050406030204" pitchFamily="18" charset="0"/>
-                      </a:rPr>
-                      <m:t>=−5</m:t>
-                    </m:r>
-                  </m:oMath>
-                </a14:m>
-                <a:r>
-                  <a:rPr lang="en-US" dirty="0"/>
-                  <a:t> </a:t>
-                </a:r>
-              </a:p>
-              <a:p>
-                <a:pPr lvl="1"/>
-                <a:r>
-                  <a:rPr lang="en-US" dirty="0"/>
-                  <a:t>Then the deviation of the second data point </a:t>
-                </a:r>
-                <a:r>
-                  <a:rPr lang="en-US" u="sng" dirty="0"/>
-                  <a:t>has</a:t>
-                </a:r>
-                <a:r>
-                  <a:rPr lang="en-US" dirty="0"/>
-                  <a:t> to be 5 for the sum of deviations to be zero. </a:t>
-                </a:r>
-              </a:p>
-            </p:txBody>
-          </p:sp>
-        </mc:Choice>
-        <mc:Fallback xmlns="">
-          <p:sp>
-            <p:nvSpPr>
-              <p:cNvPr id="3" name="Content Placeholder 2">
-                <a:extLst>
-                  <a:ext uri="{FF2B5EF4-FFF2-40B4-BE49-F238E27FC236}">
-                    <a16:creationId xmlns:a16="http://schemas.microsoft.com/office/drawing/2014/main" id="{51A4BF34-A2FA-6993-0CE4-3573B865FE8F}"/>
-                  </a:ext>
-                </a:extLst>
-              </p:cNvPr>
-              <p:cNvSpPr>
-                <a:spLocks noGrp="1" noRot="1" noChangeAspect="1" noMove="1" noResize="1" noEditPoints="1" noAdjustHandles="1" noChangeArrowheads="1" noChangeShapeType="1" noTextEdit="1"/>
-              </p:cNvSpPr>
-              <p:nvPr>
-                <p:ph idx="1"/>
-              </p:nvPr>
-            </p:nvSpPr>
-            <p:spPr>
-              <a:blipFill>
-                <a:blip r:embed="rId3"/>
-                <a:stretch>
-                  <a:fillRect l="-1043" t="-3081" r="-1681"/>
-                </a:stretch>
-              </a:blipFill>
-            </p:spPr>
-            <p:txBody>
-              <a:bodyPr/>
-              <a:lstStyle/>
-              <a:p>
-                <a:r>
-                  <a:rPr lang="en-US">
-                    <a:noFill/>
-                  </a:rPr>
-                  <a:t> </a:t>
-                </a:r>
-              </a:p>
-            </p:txBody>
-          </p:sp>
-        </mc:Fallback>
-      </mc:AlternateContent>
-      <p:sp>
-        <p:nvSpPr>
-          <p:cNvPr id="4" name="Slide Number Placeholder 3">
-            <a:extLst>
-              <a:ext uri="{FF2B5EF4-FFF2-40B4-BE49-F238E27FC236}">
-                <a16:creationId xmlns:a16="http://schemas.microsoft.com/office/drawing/2014/main" id="{3C60D4E2-DF09-B131-AB19-D6E73490E800}"/>
-              </a:ext>
-            </a:extLst>
-          </p:cNvPr>
-          <p:cNvSpPr>
-            <a:spLocks noGrp="1"/>
-          </p:cNvSpPr>
-          <p:nvPr>
-            <p:ph type="sldNum" sz="quarter" idx="12"/>
-          </p:nvPr>
-        </p:nvSpPr>
-        <p:spPr/>
-        <p:txBody>
-          <a:bodyPr/>
-          <a:lstStyle/>
-          <a:p>
-            <a:fld id="{A80A81DD-F10A-4B1C-963A-0ABBB4865886}" type="slidenum">
-              <a:rPr lang="en-US" smtClean="0"/>
-              <a:t>34</a:t>
-            </a:fld>
-            <a:endParaRPr lang="en-US"/>
-          </a:p>
-        </p:txBody>
-      </p:sp>
-      <p:sp>
-        <p:nvSpPr>
-          <p:cNvPr id="5" name="Title rule">
-            <a:extLst>
-              <a:ext uri="{FF2B5EF4-FFF2-40B4-BE49-F238E27FC236}">
-                <a16:creationId xmlns:a16="http://schemas.microsoft.com/office/drawing/2014/main" id="{E4346553-408C-AAA9-A308-0A74A79B30F4}"/>
-              </a:ext>
-            </a:extLst>
-          </p:cNvPr>
-          <p:cNvSpPr/>
-          <p:nvPr/>
-        </p:nvSpPr>
-        <p:spPr>
-          <a:xfrm>
-            <a:off x="838200" y="1600200"/>
-            <a:ext cx="10515600" cy="38100"/>
-          </a:xfrm>
-          <a:prstGeom prst="rect">
-            <a:avLst/>
-          </a:prstGeom>
-          <a:solidFill>
-            <a:srgbClr val="4472C4"/>
-          </a:solidFill>
-          <a:ln w="12700" cap="flat" cmpd="sng" algn="ctr">
-            <a:noFill/>
-            <a:prstDash val="solid"/>
-            <a:miter lim="800000"/>
-          </a:ln>
-          <a:effectLst/>
-          <a:extLst>
-            <a:ext uri="{91240B29-F687-4F45-9708-019B960494DF}">
-              <a14:hiddenLine xmlns:a14="http://schemas.microsoft.com/office/drawing/2010/main" w="12700" cap="flat" cmpd="sng" algn="ctr">
-                <a:solidFill>
-                  <a:schemeClr val="accent1">
-                    <a:shade val="15000"/>
-                  </a:schemeClr>
-                </a:solidFill>
-                <a:prstDash val="solid"/>
-                <a:miter lim="800000"/>
-              </a14:hiddenLine>
-            </a:ext>
-          </a:extLst>
-        </p:spPr>
-        <p:style>
-          <a:lnRef idx="2">
-            <a:schemeClr val="accent1">
-              <a:shade val="15000"/>
-            </a:schemeClr>
-          </a:lnRef>
-          <a:fillRef idx="1">
-            <a:schemeClr val="accent1"/>
-          </a:fillRef>
-          <a:effectRef idx="0">
-            <a:schemeClr val="accent1"/>
-          </a:effectRef>
-          <a:fontRef idx="minor">
-            <a:schemeClr val="lt1"/>
-          </a:fontRef>
-        </p:style>
-        <p:txBody>
-          <a:bodyPr rtlCol="0" anchor="ctr"/>
-          <a:lstStyle/>
-          <a:p>
-            <a:pPr algn="ctr"/>
-            <a:endParaRPr lang="en-US"/>
-          </a:p>
-        </p:txBody>
-      </p:sp>
-    </p:spTree>
-    <p:extLst>
-      <p:ext uri="{BB962C8B-B14F-4D97-AF65-F5344CB8AC3E}">
-        <p14:creationId xmlns:p14="http://schemas.microsoft.com/office/powerpoint/2010/main" val="515702394"/>
-      </p:ext>
-    </p:extLst>
-  </p:cSld>
-  <p:clrMapOvr>
-    <a:masterClrMapping/>
-  </p:clrMapOvr>
-</p:sld>
-</file>
-
-<file path=ppt/slides/slide35.xml><?xml version="1.0" encoding="utf-8"?>
-<p:sld xmlns:a="http://schemas.openxmlformats.org/drawingml/2006/main" xmlns:r="http://schemas.openxmlformats.org/officeDocument/2006/relationships" xmlns:p="http://schemas.openxmlformats.org/presentationml/2006/main">
-  <p:cSld>
-    <p:spTree>
-      <p:nvGrpSpPr>
-        <p:cNvPr id="1" name=""/>
-        <p:cNvGrpSpPr/>
-        <p:nvPr/>
-      </p:nvGrpSpPr>
-      <p:grpSpPr>
-        <a:xfrm>
-          <a:off x="0" y="0"/>
-          <a:ext cx="0" cy="0"/>
-          <a:chOff x="0" y="0"/>
-          <a:chExt cx="0" cy="0"/>
-        </a:xfrm>
-      </p:grpSpPr>
-      <p:sp useBgFill="1">
-        <p:nvSpPr>
-          <p:cNvPr id="10" name="Rectangle 9">
-            <a:extLst>
-              <a:ext uri="{FF2B5EF4-FFF2-40B4-BE49-F238E27FC236}">
-                <a16:creationId xmlns:a16="http://schemas.microsoft.com/office/drawing/2014/main" id="{22587ECF-85E9-4393-9D87-8EB6F3F6C208}"/>
-              </a:ext>
-              <a:ext uri="{C183D7F6-B498-43B3-948B-1728B52AA6E4}">
-                <adec:decorative xmlns:adec="http://schemas.microsoft.com/office/drawing/2017/decorative" val="1"/>
-              </a:ext>
-            </a:extLst>
-          </p:cNvPr>
-          <p:cNvSpPr>
-            <a:spLocks noGrp="1" noRot="1" noChangeAspect="1" noMove="1" noResize="1" noEditPoints="1" noAdjustHandles="1" noChangeArrowheads="1" noChangeShapeType="1" noTextEdit="1"/>
-          </p:cNvSpPr>
-          <p:nvPr>
-            <p:extLst>
-              <p:ext uri="{386F3935-93C4-4BCD-93E2-E3B085C9AB24}">
-                <p16:designElem xmlns:p16="http://schemas.microsoft.com/office/powerpoint/2015/main" val="1"/>
-              </p:ext>
-            </p:extLst>
-          </p:nvPr>
-        </p:nvSpPr>
-        <p:spPr>
-          <a:xfrm>
-            <a:off x="-1" y="0"/>
-            <a:ext cx="12188952" cy="6858000"/>
-          </a:xfrm>
-          <a:prstGeom prst="rect">
-            <a:avLst/>
-          </a:prstGeom>
-          <a:ln>
-            <a:noFill/>
-          </a:ln>
-        </p:spPr>
-        <p:style>
-          <a:lnRef idx="2">
-            <a:schemeClr val="accent1">
-              <a:shade val="50000"/>
-            </a:schemeClr>
-          </a:lnRef>
-          <a:fillRef idx="1">
-            <a:schemeClr val="accent1"/>
-          </a:fillRef>
-          <a:effectRef idx="0">
-            <a:schemeClr val="accent1"/>
-          </a:effectRef>
-          <a:fontRef idx="minor">
-            <a:schemeClr val="lt1"/>
-          </a:fontRef>
-        </p:style>
-        <p:txBody>
-          <a:bodyPr rtlCol="0" anchor="ctr"/>
-          <a:lstStyle/>
-          <a:p>
-            <a:pPr marL="0" marR="0" lvl="0" indent="0" algn="ctr" defTabSz="914400" rtl="0" eaLnBrk="1" fontAlgn="auto" latinLnBrk="0" hangingPunct="1">
-              <a:lnSpc>
-                <a:spcPct val="100000"/>
-              </a:lnSpc>
-              <a:spcBef>
-                <a:spcPts val="0"/>
-              </a:spcBef>
-              <a:spcAft>
-                <a:spcPts val="0"/>
-              </a:spcAft>
-              <a:buClrTx/>
-              <a:buSzTx/>
-              <a:buFontTx/>
-              <a:buNone/>
-              <a:tabLst/>
-              <a:defRPr/>
-            </a:pPr>
-            <a:endParaRPr kumimoji="0" lang="en-US" sz="1800" b="0" i="0" u="none" strike="noStrike" kern="1200" cap="none" spc="0" normalizeH="0" baseline="0" noProof="0">
-              <a:ln>
-                <a:noFill/>
-              </a:ln>
-              <a:solidFill>
-                <a:prstClr val="white"/>
-              </a:solidFill>
-              <a:effectLst/>
-              <a:uLnTx/>
-              <a:uFillTx/>
-              <a:latin typeface="Calibri" panose="020F0502020204030204"/>
-              <a:ea typeface="+mn-ea"/>
-              <a:cs typeface="+mn-cs"/>
-            </a:endParaRPr>
-          </a:p>
-        </p:txBody>
-      </p:sp>
-      <p:sp>
-        <p:nvSpPr>
-          <p:cNvPr id="2" name="Title 1">
-            <a:extLst>
-              <a:ext uri="{FF2B5EF4-FFF2-40B4-BE49-F238E27FC236}">
-                <a16:creationId xmlns:a16="http://schemas.microsoft.com/office/drawing/2014/main" id="{6EA75132-6122-451D-8580-53616DB7E950}"/>
-              </a:ext>
-            </a:extLst>
-          </p:cNvPr>
-          <p:cNvSpPr>
-            <a:spLocks noGrp="1"/>
-          </p:cNvSpPr>
-          <p:nvPr>
-            <p:ph type="title"/>
-          </p:nvPr>
-        </p:nvSpPr>
-        <p:spPr>
-          <a:xfrm>
-            <a:off x="838199" y="537883"/>
-            <a:ext cx="4783697" cy="1942810"/>
-          </a:xfrm>
-        </p:spPr>
-        <p:txBody>
-          <a:bodyPr vert="horz" lIns="91440" tIns="45720" rIns="91440" bIns="45720" rtlCol="0" anchor="b">
-            <a:normAutofit/>
-          </a:bodyPr>
-          <a:lstStyle/>
-          <a:p>
-            <a:r>
-              <a:rPr lang="en-US" sz="4000" kern="1200">
-                <a:solidFill>
-                  <a:srgbClr val="1F3864"/>
-                </a:solidFill>
-                <a:latin typeface="+mj-lt"/>
-                <a:ea typeface="+mj-ea"/>
-                <a:cs typeface="+mj-cs"/>
-              </a:rPr>
-              <a:t>Try it out: Computing 𝑠 and  𝑠 2</a:t>
-            </a:r>
-            <a:endParaRPr lang="en-US" sz="4000" kern="1200" dirty="0">
-              <a:solidFill>
-                <a:srgbClr val="1F3864"/>
-              </a:solidFill>
-              <a:latin typeface="+mj-lt"/>
-              <a:ea typeface="+mj-ea"/>
-              <a:cs typeface="+mj-cs"/>
-            </a:endParaRPr>
-          </a:p>
-        </p:txBody>
-      </p:sp>
-      <mc:AlternateContent xmlns:mc="http://schemas.openxmlformats.org/markup-compatibility/2006" xmlns:a14="http://schemas.microsoft.com/office/drawing/2010/main">
-        <mc:Choice Requires="a14">
-          <p:sp>
-            <p:nvSpPr>
-              <p:cNvPr id="4" name="Content Placeholder 2">
-                <a:extLst>
-                  <a:ext uri="{FF2B5EF4-FFF2-40B4-BE49-F238E27FC236}">
-                    <a16:creationId xmlns:a16="http://schemas.microsoft.com/office/drawing/2014/main" id="{C933D906-CF81-5AD4-2902-D9DD0E0EF8B7}"/>
-                  </a:ext>
-                </a:extLst>
-              </p:cNvPr>
-              <p:cNvSpPr txBox="1">
-                <a:spLocks/>
-              </p:cNvSpPr>
-              <p:nvPr/>
-            </p:nvSpPr>
-            <p:spPr>
-              <a:xfrm>
-                <a:off x="838199" y="2686323"/>
-                <a:ext cx="4783697" cy="3433583"/>
-              </a:xfrm>
-              <a:prstGeom prst="rect">
-                <a:avLst/>
-              </a:prstGeom>
-            </p:spPr>
-            <p:txBody>
-              <a:bodyPr vert="horz" lIns="91440" tIns="45720" rIns="91440" bIns="45720" rtlCol="0">
-                <a:normAutofit/>
-              </a:bodyPr>
-              <a:lstStyle>
-                <a:lvl1pPr marL="228600" indent="-228600" algn="l" defTabSz="914400" rtl="0" eaLnBrk="1" latinLnBrk="0" hangingPunct="1">
-                  <a:lnSpc>
-                    <a:spcPct val="90000"/>
-                  </a:lnSpc>
-                  <a:spcBef>
-                    <a:spcPts val="1000"/>
-                  </a:spcBef>
-                  <a:buFont typeface="Arial" panose="020B0604020202020204" pitchFamily="34" charset="0"/>
-                  <a:buChar char="•"/>
-                  <a:defRPr sz="2800" kern="1200">
-                    <a:solidFill>
-                      <a:schemeClr val="tx1"/>
-                    </a:solidFill>
-                    <a:latin typeface="+mn-lt"/>
-                    <a:ea typeface="+mn-ea"/>
-                    <a:cs typeface="+mn-cs"/>
-                  </a:defRPr>
-                </a:lvl1pPr>
-                <a:lvl2pPr marL="685800" indent="-228600" algn="l" defTabSz="914400" rtl="0" eaLnBrk="1" latinLnBrk="0" hangingPunct="1">
-                  <a:lnSpc>
-                    <a:spcPct val="90000"/>
-                  </a:lnSpc>
-                  <a:spcBef>
-                    <a:spcPts val="500"/>
-                  </a:spcBef>
-                  <a:buFont typeface="Arial" panose="020B0604020202020204" pitchFamily="34" charset="0"/>
-                  <a:buChar char="•"/>
-                  <a:defRPr sz="2400" kern="1200">
-                    <a:solidFill>
-                      <a:schemeClr val="tx1"/>
-                    </a:solidFill>
-                    <a:latin typeface="+mn-lt"/>
-                    <a:ea typeface="+mn-ea"/>
-                    <a:cs typeface="+mn-cs"/>
-                  </a:defRPr>
-                </a:lvl2pPr>
-                <a:lvl3pPr marL="1143000" indent="-228600" algn="l" defTabSz="914400" rtl="0" eaLnBrk="1" latinLnBrk="0" hangingPunct="1">
-                  <a:lnSpc>
-                    <a:spcPct val="90000"/>
-                  </a:lnSpc>
-                  <a:spcBef>
-                    <a:spcPts val="500"/>
-                  </a:spcBef>
-                  <a:buFont typeface="Arial" panose="020B0604020202020204" pitchFamily="34" charset="0"/>
-                  <a:buChar char="•"/>
-                  <a:defRPr sz="2000" kern="1200">
-                    <a:solidFill>
-                      <a:schemeClr val="tx1"/>
-                    </a:solidFill>
-                    <a:latin typeface="+mn-lt"/>
-                    <a:ea typeface="+mn-ea"/>
-                    <a:cs typeface="+mn-cs"/>
-                  </a:defRPr>
-                </a:lvl3pPr>
-                <a:lvl4pPr marL="1600200" indent="-228600" algn="l" defTabSz="914400" rtl="0" eaLnBrk="1" latinLnBrk="0" hangingPunct="1">
-                  <a:lnSpc>
-                    <a:spcPct val="90000"/>
-                  </a:lnSpc>
-                  <a:spcBef>
-                    <a:spcPts val="500"/>
-                  </a:spcBef>
-                  <a:buFont typeface="Arial" panose="020B0604020202020204" pitchFamily="34" charset="0"/>
-                  <a:buChar char="•"/>
-                  <a:defRPr sz="1800" kern="1200">
-                    <a:solidFill>
-                      <a:schemeClr val="tx1"/>
-                    </a:solidFill>
-                    <a:latin typeface="+mn-lt"/>
-                    <a:ea typeface="+mn-ea"/>
-                    <a:cs typeface="+mn-cs"/>
-                  </a:defRPr>
-                </a:lvl4pPr>
-                <a:lvl5pPr marL="2057400" indent="-228600" algn="l" defTabSz="914400" rtl="0" eaLnBrk="1" latinLnBrk="0" hangingPunct="1">
-                  <a:lnSpc>
-                    <a:spcPct val="90000"/>
-                  </a:lnSpc>
-                  <a:spcBef>
-                    <a:spcPts val="500"/>
-                  </a:spcBef>
-                  <a:buFont typeface="Arial" panose="020B0604020202020204" pitchFamily="34" charset="0"/>
-                  <a:buChar char="•"/>
-                  <a:defRPr sz="1800" kern="1200">
-                    <a:solidFill>
-                      <a:schemeClr val="tx1"/>
-                    </a:solidFill>
-                    <a:latin typeface="+mn-lt"/>
-                    <a:ea typeface="+mn-ea"/>
-                    <a:cs typeface="+mn-cs"/>
-                  </a:defRPr>
-                </a:lvl5pPr>
-                <a:lvl6pPr marL="2514600" indent="-228600" algn="l" defTabSz="914400" rtl="0" eaLnBrk="1" latinLnBrk="0" hangingPunct="1">
-                  <a:lnSpc>
-                    <a:spcPct val="90000"/>
-                  </a:lnSpc>
-                  <a:spcBef>
-                    <a:spcPts val="500"/>
-                  </a:spcBef>
-                  <a:buFont typeface="Arial" panose="020B0604020202020204" pitchFamily="34" charset="0"/>
-                  <a:buChar char="•"/>
-                  <a:defRPr sz="1800" kern="1200">
-                    <a:solidFill>
-                      <a:schemeClr val="tx1"/>
-                    </a:solidFill>
-                    <a:latin typeface="+mn-lt"/>
-                    <a:ea typeface="+mn-ea"/>
-                    <a:cs typeface="+mn-cs"/>
-                  </a:defRPr>
-                </a:lvl6pPr>
-                <a:lvl7pPr marL="2971800" indent="-228600" algn="l" defTabSz="914400" rtl="0" eaLnBrk="1" latinLnBrk="0" hangingPunct="1">
-                  <a:lnSpc>
-                    <a:spcPct val="90000"/>
-                  </a:lnSpc>
-                  <a:spcBef>
-                    <a:spcPts val="500"/>
-                  </a:spcBef>
-                  <a:buFont typeface="Arial" panose="020B0604020202020204" pitchFamily="34" charset="0"/>
-                  <a:buChar char="•"/>
-                  <a:defRPr sz="1800" kern="1200">
-                    <a:solidFill>
-                      <a:schemeClr val="tx1"/>
-                    </a:solidFill>
-                    <a:latin typeface="+mn-lt"/>
-                    <a:ea typeface="+mn-ea"/>
-                    <a:cs typeface="+mn-cs"/>
-                  </a:defRPr>
-                </a:lvl7pPr>
-                <a:lvl8pPr marL="3429000" indent="-228600" algn="l" defTabSz="914400" rtl="0" eaLnBrk="1" latinLnBrk="0" hangingPunct="1">
-                  <a:lnSpc>
-                    <a:spcPct val="90000"/>
-                  </a:lnSpc>
-                  <a:spcBef>
-                    <a:spcPts val="500"/>
-                  </a:spcBef>
-                  <a:buFont typeface="Arial" panose="020B0604020202020204" pitchFamily="34" charset="0"/>
-                  <a:buChar char="•"/>
-                  <a:defRPr sz="1800" kern="1200">
-                    <a:solidFill>
-                      <a:schemeClr val="tx1"/>
-                    </a:solidFill>
-                    <a:latin typeface="+mn-lt"/>
-                    <a:ea typeface="+mn-ea"/>
-                    <a:cs typeface="+mn-cs"/>
-                  </a:defRPr>
-                </a:lvl8pPr>
-                <a:lvl9pPr marL="3886200" indent="-228600" algn="l" defTabSz="914400" rtl="0" eaLnBrk="1" latinLnBrk="0" hangingPunct="1">
-                  <a:lnSpc>
-                    <a:spcPct val="90000"/>
-                  </a:lnSpc>
-                  <a:spcBef>
-                    <a:spcPts val="500"/>
-                  </a:spcBef>
-                  <a:buFont typeface="Arial" panose="020B0604020202020204" pitchFamily="34" charset="0"/>
-                  <a:buChar char="•"/>
-                  <a:defRPr sz="1800" kern="1200">
-                    <a:solidFill>
-                      <a:schemeClr val="tx1"/>
-                    </a:solidFill>
-                    <a:latin typeface="+mn-lt"/>
-                    <a:ea typeface="+mn-ea"/>
-                    <a:cs typeface="+mn-cs"/>
-                  </a:defRPr>
-                </a:lvl9pPr>
-              </a:lstStyle>
-              <a:p>
-                <a:pPr marL="0" marR="0" lvl="0" indent="-228600" algn="l" defTabSz="914400" rtl="0" eaLnBrk="1" fontAlgn="auto" latinLnBrk="0" hangingPunct="1">
-                  <a:lnSpc>
-                    <a:spcPct val="90000"/>
-                  </a:lnSpc>
-                  <a:spcBef>
-                    <a:spcPts val="1000"/>
-                  </a:spcBef>
-                  <a:spcAft>
-                    <a:spcPts val="0"/>
-                  </a:spcAft>
-                  <a:buClrTx/>
-                  <a:buSzTx/>
-                  <a:buFont typeface="Arial" panose="020B0604020202020204" pitchFamily="34" charset="0"/>
-                  <a:buChar char="•"/>
-                  <a:tabLst/>
-                  <a:defRPr/>
-                </a:pPr>
-                <a:endParaRPr kumimoji="0" lang="en-US" sz="2000" b="0" i="0" u="none" strike="noStrike" kern="1200" cap="none" spc="0" normalizeH="0" baseline="0" noProof="0" dirty="0">
-                  <a:ln>
-                    <a:noFill/>
-                  </a:ln>
-                  <a:solidFill>
-                    <a:prstClr val="black"/>
-                  </a:solidFill>
-                  <a:effectLst/>
-                  <a:uLnTx/>
-                  <a:uFillTx/>
-                  <a:latin typeface="Calibri" panose="020F0502020204030204"/>
-                  <a:ea typeface="+mn-ea"/>
-                  <a:cs typeface="+mn-cs"/>
-                </a:endParaRPr>
-              </a:p>
-              <a:p>
-                <a:pPr marL="0" marR="0" lvl="0" indent="-228600" algn="l" defTabSz="914400" rtl="0" eaLnBrk="1" fontAlgn="auto" latinLnBrk="0" hangingPunct="1">
-                  <a:lnSpc>
-                    <a:spcPct val="90000"/>
-                  </a:lnSpc>
-                  <a:spcBef>
-                    <a:spcPts val="1000"/>
-                  </a:spcBef>
-                  <a:spcAft>
-                    <a:spcPts val="0"/>
-                  </a:spcAft>
-                  <a:buClrTx/>
-                  <a:buSzTx/>
-                  <a:buFont typeface="Arial" panose="020B0604020202020204" pitchFamily="34" charset="0"/>
-                  <a:buChar char="•"/>
-                  <a:tabLst/>
-                  <a:defRPr/>
-                </a:pPr>
-                <a:r>
-                  <a:rPr kumimoji="0" lang="en-US" sz="2400" b="0" i="0" u="none" strike="noStrike" kern="1200" cap="none" spc="0" normalizeH="0" baseline="0" noProof="0" dirty="0">
-                    <a:ln>
-                      <a:noFill/>
-                    </a:ln>
-                    <a:solidFill>
-                      <a:prstClr val="black"/>
-                    </a:solidFill>
-                    <a:effectLst/>
-                    <a:uLnTx/>
-                    <a:uFillTx/>
-                    <a:latin typeface="Calibri" panose="020F0502020204030204"/>
-                    <a:ea typeface="+mn-ea"/>
-                    <a:cs typeface="+mn-cs"/>
-                  </a:rPr>
-                  <a:t>Roll a six-sided die </a:t>
-                </a:r>
-                <a14:m>
-                  <m:oMath xmlns:m="http://schemas.openxmlformats.org/officeDocument/2006/math">
-                    <m:r>
-                      <a:rPr kumimoji="0" lang="en-US" sz="2400" b="0" i="1" u="none" strike="noStrike" kern="1200" cap="none" spc="0" normalizeH="0" baseline="0" noProof="0" smtClean="0">
-                        <a:ln>
-                          <a:noFill/>
-                        </a:ln>
-                        <a:solidFill>
-                          <a:prstClr val="black"/>
-                        </a:solidFill>
-                        <a:effectLst/>
-                        <a:uLnTx/>
-                        <a:uFillTx/>
-                        <a:latin typeface="Cambria Math" panose="02040503050406030204" pitchFamily="18" charset="0"/>
-                        <a:ea typeface="+mn-ea"/>
-                        <a:cs typeface="+mn-cs"/>
-                      </a:rPr>
-                      <m:t>𝑛</m:t>
-                    </m:r>
-                    <m:r>
-                      <a:rPr kumimoji="0" lang="en-US" sz="2400" b="0" i="1" u="none" strike="noStrike" kern="1200" cap="none" spc="0" normalizeH="0" baseline="0" noProof="0" smtClean="0">
-                        <a:ln>
-                          <a:noFill/>
-                        </a:ln>
-                        <a:solidFill>
-                          <a:prstClr val="black"/>
-                        </a:solidFill>
-                        <a:effectLst/>
-                        <a:uLnTx/>
-                        <a:uFillTx/>
-                        <a:latin typeface="Cambria Math" panose="02040503050406030204" pitchFamily="18" charset="0"/>
-                        <a:ea typeface="+mn-ea"/>
-                        <a:cs typeface="+mn-cs"/>
-                      </a:rPr>
-                      <m:t>=10</m:t>
-                    </m:r>
-                  </m:oMath>
-                </a14:m>
-                <a:r>
-                  <a:rPr kumimoji="0" lang="en-US" sz="2400" b="0" i="0" u="none" strike="noStrike" kern="1200" cap="none" spc="0" normalizeH="0" baseline="0" noProof="0" dirty="0">
-                    <a:ln>
-                      <a:noFill/>
-                    </a:ln>
-                    <a:solidFill>
-                      <a:prstClr val="black"/>
-                    </a:solidFill>
-                    <a:effectLst/>
-                    <a:uLnTx/>
-                    <a:uFillTx/>
-                    <a:latin typeface="Calibri" panose="020F0502020204030204"/>
-                    <a:ea typeface="+mn-ea"/>
-                    <a:cs typeface="+mn-cs"/>
-                  </a:rPr>
-                  <a:t> times and record the number rolled each time</a:t>
-                </a:r>
-                <a:endParaRPr kumimoji="0" lang="en-US" sz="2000" b="0" i="0" u="none" strike="noStrike" kern="1200" cap="none" spc="0" normalizeH="0" baseline="0" noProof="0" dirty="0">
-                  <a:ln>
-                    <a:noFill/>
-                  </a:ln>
-                  <a:solidFill>
-                    <a:prstClr val="black"/>
-                  </a:solidFill>
-                  <a:effectLst/>
-                  <a:uLnTx/>
-                  <a:uFillTx/>
-                  <a:latin typeface="Calibri" panose="020F0502020204030204"/>
-                  <a:ea typeface="+mn-ea"/>
-                  <a:cs typeface="+mn-cs"/>
-                </a:endParaRPr>
-              </a:p>
-              <a:p>
-                <a:pPr marL="0" marR="0" lvl="0" indent="-228600" algn="l" defTabSz="914400" rtl="0" eaLnBrk="1" fontAlgn="auto" latinLnBrk="0" hangingPunct="1">
-                  <a:lnSpc>
-                    <a:spcPct val="90000"/>
-                  </a:lnSpc>
-                  <a:spcBef>
-                    <a:spcPts val="1000"/>
-                  </a:spcBef>
-                  <a:spcAft>
-                    <a:spcPts val="0"/>
-                  </a:spcAft>
-                  <a:buClrTx/>
-                  <a:buSzTx/>
-                  <a:buFont typeface="Arial" panose="020B0604020202020204" pitchFamily="34" charset="0"/>
-                  <a:buChar char="•"/>
-                  <a:tabLst/>
-                  <a:defRPr/>
-                </a:pPr>
-                <a:endParaRPr kumimoji="0" lang="en-US" sz="2000" b="0" i="0" u="none" strike="noStrike" kern="1200" cap="none" spc="0" normalizeH="0" baseline="0" noProof="0" dirty="0">
-                  <a:ln>
-                    <a:noFill/>
-                  </a:ln>
-                  <a:solidFill>
-                    <a:prstClr val="black"/>
-                  </a:solidFill>
-                  <a:effectLst/>
-                  <a:uLnTx/>
-                  <a:uFillTx/>
-                  <a:latin typeface="Calibri" panose="020F0502020204030204"/>
-                  <a:ea typeface="+mn-ea"/>
-                  <a:cs typeface="+mn-cs"/>
-                </a:endParaRPr>
-              </a:p>
-              <a:p>
-                <a:pPr marL="0" marR="0" lvl="0" indent="-228600" algn="l" defTabSz="914400" rtl="0" eaLnBrk="1" fontAlgn="auto" latinLnBrk="0" hangingPunct="1">
-                  <a:lnSpc>
-                    <a:spcPct val="90000"/>
-                  </a:lnSpc>
-                  <a:spcBef>
-                    <a:spcPts val="1000"/>
-                  </a:spcBef>
-                  <a:spcAft>
-                    <a:spcPts val="0"/>
-                  </a:spcAft>
-                  <a:buClrTx/>
-                  <a:buSzTx/>
-                  <a:buFont typeface="Arial" panose="020B0604020202020204" pitchFamily="34" charset="0"/>
-                  <a:buChar char="•"/>
-                  <a:tabLst/>
-                  <a:defRPr/>
-                </a:pPr>
-                <a:r>
-                  <a:rPr kumimoji="0" lang="en-US" sz="2400" b="0" i="0" u="none" strike="noStrike" kern="1200" cap="none" spc="0" normalizeH="0" baseline="0" noProof="0" dirty="0">
-                    <a:ln>
-                      <a:noFill/>
-                    </a:ln>
-                    <a:solidFill>
-                      <a:prstClr val="black"/>
-                    </a:solidFill>
-                    <a:effectLst/>
-                    <a:uLnTx/>
-                    <a:uFillTx/>
-                    <a:latin typeface="Calibri" panose="020F0502020204030204"/>
-                    <a:ea typeface="+mn-ea"/>
-                    <a:cs typeface="+mn-cs"/>
-                  </a:rPr>
-                  <a:t>Data = 1,2,3,3,4,4,4,5,6,6</a:t>
-                </a:r>
-              </a:p>
-              <a:p>
-                <a:pPr marL="0" marR="0" lvl="0" indent="-228600" algn="l" defTabSz="914400" rtl="0" eaLnBrk="1" fontAlgn="auto" latinLnBrk="0" hangingPunct="1">
-                  <a:lnSpc>
-                    <a:spcPct val="90000"/>
-                  </a:lnSpc>
-                  <a:spcBef>
-                    <a:spcPts val="1000"/>
-                  </a:spcBef>
-                  <a:spcAft>
-                    <a:spcPts val="0"/>
-                  </a:spcAft>
-                  <a:buClrTx/>
-                  <a:buSzTx/>
-                  <a:buFont typeface="Arial" panose="020B0604020202020204" pitchFamily="34" charset="0"/>
-                  <a:buChar char="•"/>
-                  <a:tabLst/>
-                  <a:defRPr/>
-                </a:pPr>
-                <a:endParaRPr lang="en-US" sz="2400" dirty="0">
-                  <a:solidFill>
-                    <a:prstClr val="black"/>
-                  </a:solidFill>
-                  <a:latin typeface="Calibri" panose="020F0502020204030204"/>
-                </a:endParaRPr>
-              </a:p>
-              <a:p>
-                <a:pPr marL="0" marR="0" lvl="0" indent="-228600" algn="l" defTabSz="914400" rtl="0" eaLnBrk="1" fontAlgn="auto" latinLnBrk="0" hangingPunct="1">
-                  <a:lnSpc>
-                    <a:spcPct val="90000"/>
-                  </a:lnSpc>
-                  <a:spcBef>
-                    <a:spcPts val="1000"/>
-                  </a:spcBef>
-                  <a:spcAft>
-                    <a:spcPts val="0"/>
-                  </a:spcAft>
-                  <a:buClrTx/>
-                  <a:buSzTx/>
-                  <a:buFont typeface="Arial" panose="020B0604020202020204" pitchFamily="34" charset="0"/>
-                  <a:buChar char="•"/>
-                  <a:tabLst/>
-                  <a:defRPr/>
-                </a:pPr>
-                <a:r>
-                  <a:rPr kumimoji="0" lang="en-US" sz="2400" b="0" i="0" u="none" strike="noStrike" kern="1200" cap="none" spc="0" normalizeH="0" baseline="0" noProof="0" dirty="0">
-                    <a:ln>
-                      <a:noFill/>
-                    </a:ln>
-                    <a:solidFill>
-                      <a:prstClr val="black"/>
-                    </a:solidFill>
-                    <a:effectLst/>
-                    <a:uLnTx/>
-                    <a:uFillTx/>
-                    <a:latin typeface="Calibri" panose="020F0502020204030204"/>
-                    <a:ea typeface="+mn-ea"/>
-                    <a:cs typeface="+mn-cs"/>
-                  </a:rPr>
-                  <a:t>Mean = 3.8</a:t>
-                </a:r>
-                <a:endParaRPr kumimoji="0" lang="en-US" sz="2000" b="0" i="0" u="none" strike="noStrike" kern="1200" cap="none" spc="0" normalizeH="0" baseline="0" noProof="0" dirty="0">
-                  <a:ln>
-                    <a:noFill/>
-                  </a:ln>
-                  <a:solidFill>
-                    <a:prstClr val="black"/>
-                  </a:solidFill>
-                  <a:effectLst/>
-                  <a:uLnTx/>
-                  <a:uFillTx/>
-                  <a:latin typeface="Calibri" panose="020F0502020204030204"/>
-                  <a:ea typeface="+mn-ea"/>
-                  <a:cs typeface="+mn-cs"/>
-                </a:endParaRPr>
-              </a:p>
-              <a:p>
-                <a:pPr marL="228600" marR="0" lvl="0" indent="-228600" algn="l" defTabSz="914400" rtl="0" eaLnBrk="1" fontAlgn="auto" latinLnBrk="0" hangingPunct="1">
-                  <a:lnSpc>
-                    <a:spcPct val="90000"/>
-                  </a:lnSpc>
-                  <a:spcBef>
-                    <a:spcPts val="1000"/>
-                  </a:spcBef>
-                  <a:spcAft>
-                    <a:spcPts val="0"/>
-                  </a:spcAft>
-                  <a:buClrTx/>
-                  <a:buSzTx/>
-                  <a:buFont typeface="Arial" panose="020B0604020202020204" pitchFamily="34" charset="0"/>
-                  <a:buChar char="•"/>
-                  <a:tabLst/>
-                  <a:defRPr/>
-                </a:pPr>
-                <a:endParaRPr kumimoji="0" lang="en-US" sz="2000" b="0" i="0" u="none" strike="noStrike" kern="1200" cap="none" spc="0" normalizeH="0" baseline="0" noProof="0" dirty="0">
-                  <a:ln>
-                    <a:noFill/>
-                  </a:ln>
-                  <a:solidFill>
-                    <a:prstClr val="black"/>
-                  </a:solidFill>
-                  <a:effectLst/>
-                  <a:uLnTx/>
-                  <a:uFillTx/>
-                  <a:latin typeface="Calibri" panose="020F0502020204030204"/>
-                  <a:ea typeface="+mn-ea"/>
-                  <a:cs typeface="+mn-cs"/>
-                </a:endParaRPr>
-              </a:p>
-              <a:p>
-                <a:pPr marL="228600" marR="0" lvl="0" indent="-228600" algn="l" defTabSz="914400" rtl="0" eaLnBrk="1" fontAlgn="auto" latinLnBrk="0" hangingPunct="1">
-                  <a:lnSpc>
-                    <a:spcPct val="90000"/>
-                  </a:lnSpc>
-                  <a:spcBef>
-                    <a:spcPts val="1000"/>
-                  </a:spcBef>
-                  <a:spcAft>
-                    <a:spcPts val="0"/>
-                  </a:spcAft>
-                  <a:buClrTx/>
-                  <a:buSzTx/>
-                  <a:buFont typeface="Arial" panose="020B0604020202020204" pitchFamily="34" charset="0"/>
-                  <a:buChar char="•"/>
-                  <a:tabLst/>
-                  <a:defRPr/>
-                </a:pPr>
-                <a:endParaRPr kumimoji="0" lang="en-US" sz="2000" b="0" i="0" u="none" strike="noStrike" kern="1200" cap="none" spc="0" normalizeH="0" baseline="0" noProof="0" dirty="0">
-                  <a:ln>
-                    <a:noFill/>
-                  </a:ln>
-                  <a:solidFill>
-                    <a:prstClr val="black"/>
-                  </a:solidFill>
-                  <a:effectLst/>
-                  <a:uLnTx/>
-                  <a:uFillTx/>
-                  <a:latin typeface="Calibri" panose="020F0502020204030204"/>
-                  <a:ea typeface="+mn-ea"/>
-                  <a:cs typeface="+mn-cs"/>
-                </a:endParaRPr>
-              </a:p>
-              <a:p>
-                <a:pPr marL="228600" marR="0" lvl="0" indent="-228600" algn="l" defTabSz="914400" rtl="0" eaLnBrk="1" fontAlgn="auto" latinLnBrk="0" hangingPunct="1">
-                  <a:lnSpc>
-                    <a:spcPct val="90000"/>
-                  </a:lnSpc>
-                  <a:spcBef>
-                    <a:spcPts val="1000"/>
-                  </a:spcBef>
-                  <a:spcAft>
-                    <a:spcPts val="0"/>
-                  </a:spcAft>
-                  <a:buClrTx/>
-                  <a:buSzTx/>
-                  <a:buFont typeface="Arial" panose="020B0604020202020204" pitchFamily="34" charset="0"/>
-                  <a:buChar char="•"/>
-                  <a:tabLst/>
-                  <a:defRPr/>
-                </a:pPr>
-                <a:endParaRPr kumimoji="0" lang="en-US" sz="2000" b="0" i="0" u="none" strike="noStrike" kern="1200" cap="none" spc="0" normalizeH="0" baseline="0" noProof="0" dirty="0">
-                  <a:ln>
-                    <a:noFill/>
-                  </a:ln>
-                  <a:solidFill>
-                    <a:prstClr val="black"/>
-                  </a:solidFill>
-                  <a:effectLst/>
-                  <a:uLnTx/>
-                  <a:uFillTx/>
-                  <a:latin typeface="Calibri" panose="020F0502020204030204"/>
-                  <a:ea typeface="+mn-ea"/>
-                  <a:cs typeface="+mn-cs"/>
-                </a:endParaRPr>
-              </a:p>
-            </p:txBody>
-          </p:sp>
-        </mc:Choice>
-        <mc:Fallback xmlns="">
-          <p:sp>
-            <p:nvSpPr>
-              <p:cNvPr id="4" name="Content Placeholder 2">
-                <a:extLst>
-                  <a:ext uri="{FF2B5EF4-FFF2-40B4-BE49-F238E27FC236}">
-                    <a16:creationId xmlns:a16="http://schemas.microsoft.com/office/drawing/2014/main" id="{C933D906-CF81-5AD4-2902-D9DD0E0EF8B7}"/>
-                  </a:ext>
-                </a:extLst>
-              </p:cNvPr>
-              <p:cNvSpPr txBox="1">
-                <a:spLocks noRot="1" noChangeAspect="1" noMove="1" noResize="1" noEditPoints="1" noAdjustHandles="1" noChangeArrowheads="1" noChangeShapeType="1" noTextEdit="1"/>
-              </p:cNvSpPr>
-              <p:nvPr/>
-            </p:nvSpPr>
-            <p:spPr>
-              <a:xfrm>
-                <a:off x="838199" y="2686323"/>
-                <a:ext cx="4783697" cy="3433583"/>
-              </a:xfrm>
-              <a:prstGeom prst="rect">
-                <a:avLst/>
-              </a:prstGeom>
-              <a:blipFill>
-                <a:blip r:embed="rId3"/>
-                <a:stretch>
-                  <a:fillRect l="-1911"/>
-                </a:stretch>
-              </a:blipFill>
-            </p:spPr>
-            <p:txBody>
-              <a:bodyPr/>
-              <a:lstStyle/>
-              <a:p>
-                <a:r>
-                  <a:rPr lang="en-US">
-                    <a:noFill/>
-                  </a:rPr>
-                  <a:t> </a:t>
-                </a:r>
-              </a:p>
-            </p:txBody>
-          </p:sp>
-        </mc:Fallback>
-      </mc:AlternateContent>
-      <p:pic>
-        <p:nvPicPr>
-          <p:cNvPr id="5" name="Picture 2" descr="Beer die - EUSwiki">
-            <a:extLst>
-              <a:ext uri="{FF2B5EF4-FFF2-40B4-BE49-F238E27FC236}">
-                <a16:creationId xmlns:a16="http://schemas.microsoft.com/office/drawing/2014/main" id="{98F16938-2ED7-9FB6-1FC2-1BF322196DF8}"/>
-              </a:ext>
-            </a:extLst>
-          </p:cNvPr>
-          <p:cNvPicPr>
-            <a:picLocks noChangeAspect="1" noChangeArrowheads="1"/>
-          </p:cNvPicPr>
-          <p:nvPr/>
-        </p:nvPicPr>
-        <p:blipFill>
-          <a:blip r:embed="rId4">
-            <a:extLst>
-              <a:ext uri="{28A0092B-C50C-407E-A947-70E740481C1C}">
-                <a14:useLocalDpi xmlns:a14="http://schemas.microsoft.com/office/drawing/2010/main" val="0"/>
-              </a:ext>
-            </a:extLst>
-          </a:blip>
-          <a:stretch>
-            <a:fillRect/>
-          </a:stretch>
-        </p:blipFill>
-        <p:spPr bwMode="auto">
-          <a:xfrm>
-            <a:off x="8276159" y="2927927"/>
-            <a:ext cx="3077639" cy="3124507"/>
-          </a:xfrm>
-          <a:prstGeom prst="rect">
-            <a:avLst/>
-          </a:prstGeom>
-          <a:noFill/>
-          <a:extLst>
-            <a:ext uri="{909E8E84-426E-40DD-AFC4-6F175D3DCCD1}">
-              <a14:hiddenFill xmlns:a14="http://schemas.microsoft.com/office/drawing/2010/main">
-                <a:solidFill>
-                  <a:srgbClr val="FFFFFF"/>
-                </a:solidFill>
-              </a14:hiddenFill>
-            </a:ext>
-          </a:extLst>
-        </p:spPr>
-      </p:pic>
-      <p:sp>
-        <p:nvSpPr>
-          <p:cNvPr id="3" name="Slide Number Placeholder 2">
-            <a:extLst>
-              <a:ext uri="{FF2B5EF4-FFF2-40B4-BE49-F238E27FC236}">
-                <a16:creationId xmlns:a16="http://schemas.microsoft.com/office/drawing/2014/main" id="{90818292-3AE6-B7AB-CA1F-D0F516426F68}"/>
-              </a:ext>
-            </a:extLst>
-          </p:cNvPr>
-          <p:cNvSpPr>
-            <a:spLocks noGrp="1"/>
-          </p:cNvSpPr>
-          <p:nvPr>
-            <p:ph type="sldNum" sz="quarter" idx="12"/>
-          </p:nvPr>
-        </p:nvSpPr>
-        <p:spPr/>
-        <p:txBody>
-          <a:bodyPr/>
-          <a:lstStyle/>
-          <a:p>
-            <a:fld id="{A80A81DD-F10A-4B1C-963A-0ABBB4865886}" type="slidenum">
-              <a:rPr lang="en-US" smtClean="0"/>
-              <a:t>35</a:t>
-            </a:fld>
-            <a:endParaRPr lang="en-US"/>
-          </a:p>
-        </p:txBody>
-      </p:sp>
-    </p:spTree>
-    <p:extLst>
-      <p:ext uri="{BB962C8B-B14F-4D97-AF65-F5344CB8AC3E}">
-        <p14:creationId xmlns:p14="http://schemas.microsoft.com/office/powerpoint/2010/main" val="3583992808"/>
-      </p:ext>
-    </p:extLst>
-  </p:cSld>
-  <p:clrMapOvr>
-    <a:masterClrMapping/>
-  </p:clrMapOvr>
-</p:sld>
-</file>
-
 <file path=ppt/slides/slide4.xml><?xml version="1.0" encoding="utf-8"?>
 <p:sld xmlns:a="http://schemas.openxmlformats.org/drawingml/2006/main" xmlns:r="http://schemas.openxmlformats.org/officeDocument/2006/relationships" xmlns:p="http://schemas.openxmlformats.org/presentationml/2006/main">
   <p:cSld>
@@ -19459,8 +12180,8 @@
           </a:p>
         </p:txBody>
       </p:sp>
-      <mc:AlternateContent xmlns:mc="http://schemas.openxmlformats.org/markup-compatibility/2006">
-        <mc:Choice xmlns:a14="http://schemas.microsoft.com/office/drawing/2010/main" Requires="a14">
+      <mc:AlternateContent xmlns:mc="http://schemas.openxmlformats.org/markup-compatibility/2006" xmlns:a14="http://schemas.microsoft.com/office/drawing/2010/main">
+        <mc:Choice Requires="a14">
           <p:sp>
             <p:nvSpPr>
               <p:cNvPr id="3" name="Content Placeholder 2">
@@ -19839,7 +12560,7 @@
             </p:txBody>
           </p:sp>
         </mc:Choice>
-        <mc:Fallback>
+        <mc:Fallback xmlns="">
           <p:sp>
             <p:nvSpPr>
               <p:cNvPr id="3" name="Content Placeholder 2">
@@ -21515,8 +14236,8 @@
           </a:p>
         </p:txBody>
       </p:sp>
-      <mc:AlternateContent xmlns:mc="http://schemas.openxmlformats.org/markup-compatibility/2006">
-        <mc:Choice xmlns:a14="http://schemas.microsoft.com/office/drawing/2010/main" Requires="a14">
+      <mc:AlternateContent xmlns:mc="http://schemas.openxmlformats.org/markup-compatibility/2006" xmlns:a14="http://schemas.microsoft.com/office/drawing/2010/main">
+        <mc:Choice Requires="a14">
           <p:sp>
             <p:nvSpPr>
               <p:cNvPr id="3" name="Content Placeholder 2">
@@ -21644,7 +14365,7 @@
             </p:txBody>
           </p:sp>
         </mc:Choice>
-        <mc:Fallback>
+        <mc:Fallback xmlns="">
           <p:sp>
             <p:nvSpPr>
               <p:cNvPr id="3" name="Content Placeholder 2">
